--- a/docs/posts/fpl-assessment/index.pptx
+++ b/docs/posts/fpl-assessment/index.pptx
@@ -4,6 +4,9 @@
   <p:sldMasterIdLst>
     <p:sldMasterId id="2147483648" r:id="rId1"/>
   </p:sldMasterIdLst>
+  <p:notesMasterIdLst>
+    <p:notesMasterId r:id="rId27"/>
+  </p:notesMasterIdLst>
   <p:sldIdLst>
     <p:sldId id="256" r:id="rId2"/>
     <p:sldId id="257" r:id="rId3"/>
@@ -16,6 +19,20 @@
     <p:sldId id="264" r:id="rId10"/>
     <p:sldId id="265" r:id="rId11"/>
     <p:sldId id="266" r:id="rId12"/>
+    <p:sldId id="267" r:id="rId13"/>
+    <p:sldId id="268" r:id="rId14"/>
+    <p:sldId id="269" r:id="rId15"/>
+    <p:sldId id="270" r:id="rId16"/>
+    <p:sldId id="271" r:id="rId17"/>
+    <p:sldId id="272" r:id="rId18"/>
+    <p:sldId id="273" r:id="rId19"/>
+    <p:sldId id="274" r:id="rId20"/>
+    <p:sldId id="275" r:id="rId21"/>
+    <p:sldId id="276" r:id="rId22"/>
+    <p:sldId id="277" r:id="rId23"/>
+    <p:sldId id="278" r:id="rId24"/>
+    <p:sldId id="279" r:id="rId25"/>
+    <p:sldId id="280" r:id="rId26"/>
   </p:sldIdLst>
   <p:sldSz cx="9144000" cy="5143500" type="screen16x9"/>
   <p:notesSz cx="6858000" cy="9144000"/>
@@ -131,6 +148,519 @@
     </p:ext>
   </p:extLst>
 </p:presentation>
+</file>
+
+<file path=ppt/notesMasters/notesMaster1.xml><?xml version="1.0" encoding="utf-8"?>
+<p:notesMaster xmlns:a="http://schemas.openxmlformats.org/drawingml/2006/main" xmlns:r="http://schemas.openxmlformats.org/officeDocument/2006/relationships" xmlns:p="http://schemas.openxmlformats.org/presentationml/2006/main">
+  <p:cSld>
+    <p:bg>
+      <p:bgRef idx="1001">
+        <a:schemeClr val="bg1"/>
+      </p:bgRef>
+    </p:bg>
+    <p:spTree>
+      <p:nvGrpSpPr>
+        <p:cNvPr id="1" name=""/>
+        <p:cNvGrpSpPr/>
+        <p:nvPr/>
+      </p:nvGrpSpPr>
+      <p:grpSpPr>
+        <a:xfrm>
+          <a:off x="0" y="0"/>
+          <a:ext cx="0" cy="0"/>
+          <a:chOff x="0" y="0"/>
+          <a:chExt cx="0" cy="0"/>
+        </a:xfrm>
+      </p:grpSpPr>
+      <p:sp>
+        <p:nvSpPr>
+          <p:cNvPr id="2" name="Header Placeholder 1"/>
+          <p:cNvSpPr>
+            <a:spLocks noGrp="1"/>
+          </p:cNvSpPr>
+          <p:nvPr>
+            <p:ph type="hdr" sz="quarter"/>
+          </p:nvPr>
+        </p:nvSpPr>
+        <p:spPr>
+          <a:xfrm>
+            <a:off x="0" y="0"/>
+            <a:ext cx="2971800" cy="458788"/>
+          </a:xfrm>
+          <a:prstGeom prst="rect">
+            <a:avLst/>
+          </a:prstGeom>
+        </p:spPr>
+        <p:txBody>
+          <a:bodyPr vert="horz" lIns="91440" tIns="45720" rIns="91440" bIns="45720" rtlCol="0"/>
+          <a:lstStyle>
+            <a:lvl1pPr algn="l">
+              <a:defRPr sz="1200"/>
+            </a:lvl1pPr>
+          </a:lstStyle>
+          <a:p>
+            <a:endParaRPr lang="en-US"/>
+          </a:p>
+        </p:txBody>
+      </p:sp>
+      <p:sp>
+        <p:nvSpPr>
+          <p:cNvPr id="3" name="Date Placeholder 2"/>
+          <p:cNvSpPr>
+            <a:spLocks noGrp="1"/>
+          </p:cNvSpPr>
+          <p:nvPr>
+            <p:ph type="dt" idx="1"/>
+          </p:nvPr>
+        </p:nvSpPr>
+        <p:spPr>
+          <a:xfrm>
+            <a:off x="3884613" y="0"/>
+            <a:ext cx="2971800" cy="458788"/>
+          </a:xfrm>
+          <a:prstGeom prst="rect">
+            <a:avLst/>
+          </a:prstGeom>
+        </p:spPr>
+        <p:txBody>
+          <a:bodyPr vert="horz" lIns="91440" tIns="45720" rIns="91440" bIns="45720" rtlCol="0"/>
+          <a:lstStyle>
+            <a:lvl1pPr algn="r">
+              <a:defRPr sz="1200"/>
+            </a:lvl1pPr>
+          </a:lstStyle>
+          <a:p>
+            <a:fld id="{0F9C1CCF-B725-44A7-AA57-5E433BD85C9F}" type="datetimeFigureOut">
+              <a:rPr lang="en-US" smtClean="0"/>
+              <a:t>1/2/22</a:t>
+            </a:fld>
+            <a:endParaRPr lang="en-US"/>
+          </a:p>
+        </p:txBody>
+      </p:sp>
+      <p:sp>
+        <p:nvSpPr>
+          <p:cNvPr id="4" name="Slide Image Placeholder 3"/>
+          <p:cNvSpPr>
+            <a:spLocks noGrp="1" noRot="1" noChangeAspect="1"/>
+          </p:cNvSpPr>
+          <p:nvPr>
+            <p:ph type="sldImg" idx="2"/>
+          </p:nvPr>
+        </p:nvSpPr>
+        <p:spPr>
+          <a:xfrm>
+            <a:off x="685800" y="1143000"/>
+            <a:ext cx="5486400" cy="3086100"/>
+          </a:xfrm>
+          <a:prstGeom prst="rect">
+            <a:avLst/>
+          </a:prstGeom>
+          <a:noFill/>
+          <a:ln w="12700">
+            <a:solidFill>
+              <a:prstClr val="black"/>
+            </a:solidFill>
+          </a:ln>
+        </p:spPr>
+        <p:txBody>
+          <a:bodyPr vert="horz" lIns="91440" tIns="45720" rIns="91440" bIns="45720" rtlCol="0" anchor="ctr"/>
+          <a:lstStyle/>
+          <a:p>
+            <a:endParaRPr lang="en-US"/>
+          </a:p>
+        </p:txBody>
+      </p:sp>
+      <p:sp>
+        <p:nvSpPr>
+          <p:cNvPr id="5" name="Notes Placeholder 4"/>
+          <p:cNvSpPr>
+            <a:spLocks noGrp="1"/>
+          </p:cNvSpPr>
+          <p:nvPr>
+            <p:ph type="body" sz="quarter" idx="3"/>
+          </p:nvPr>
+        </p:nvSpPr>
+        <p:spPr>
+          <a:xfrm>
+            <a:off x="685800" y="4400550"/>
+            <a:ext cx="5486400" cy="3600450"/>
+          </a:xfrm>
+          <a:prstGeom prst="rect">
+            <a:avLst/>
+          </a:prstGeom>
+        </p:spPr>
+        <p:txBody>
+          <a:bodyPr vert="horz" lIns="91440" tIns="45720" rIns="91440" bIns="45720" rtlCol="0"/>
+          <a:lstStyle/>
+          <a:p>
+            <a:pPr lvl="0"/>
+            <a:r>
+              <a:rPr lang="en-US"/>
+              <a:t>Click to edit Master text styles</a:t>
+            </a:r>
+          </a:p>
+          <a:p>
+            <a:pPr lvl="1"/>
+            <a:r>
+              <a:rPr lang="en-US"/>
+              <a:t>Second level</a:t>
+            </a:r>
+          </a:p>
+          <a:p>
+            <a:pPr lvl="2"/>
+            <a:r>
+              <a:rPr lang="en-US"/>
+              <a:t>Third level</a:t>
+            </a:r>
+          </a:p>
+          <a:p>
+            <a:pPr lvl="3"/>
+            <a:r>
+              <a:rPr lang="en-US"/>
+              <a:t>Fourth level</a:t>
+            </a:r>
+          </a:p>
+          <a:p>
+            <a:pPr lvl="4"/>
+            <a:r>
+              <a:rPr lang="en-US"/>
+              <a:t>Fifth level</a:t>
+            </a:r>
+          </a:p>
+        </p:txBody>
+      </p:sp>
+      <p:sp>
+        <p:nvSpPr>
+          <p:cNvPr id="6" name="Footer Placeholder 5"/>
+          <p:cNvSpPr>
+            <a:spLocks noGrp="1"/>
+          </p:cNvSpPr>
+          <p:nvPr>
+            <p:ph type="ftr" sz="quarter" idx="4"/>
+          </p:nvPr>
+        </p:nvSpPr>
+        <p:spPr>
+          <a:xfrm>
+            <a:off x="0" y="8685213"/>
+            <a:ext cx="2971800" cy="458787"/>
+          </a:xfrm>
+          <a:prstGeom prst="rect">
+            <a:avLst/>
+          </a:prstGeom>
+        </p:spPr>
+        <p:txBody>
+          <a:bodyPr vert="horz" lIns="91440" tIns="45720" rIns="91440" bIns="45720" rtlCol="0" anchor="b"/>
+          <a:lstStyle>
+            <a:lvl1pPr algn="l">
+              <a:defRPr sz="1200"/>
+            </a:lvl1pPr>
+          </a:lstStyle>
+          <a:p>
+            <a:endParaRPr lang="en-US"/>
+          </a:p>
+        </p:txBody>
+      </p:sp>
+      <p:sp>
+        <p:nvSpPr>
+          <p:cNvPr id="7" name="Slide Number Placeholder 6"/>
+          <p:cNvSpPr>
+            <a:spLocks noGrp="1"/>
+          </p:cNvSpPr>
+          <p:nvPr>
+            <p:ph type="sldNum" sz="quarter" idx="5"/>
+          </p:nvPr>
+        </p:nvSpPr>
+        <p:spPr>
+          <a:xfrm>
+            <a:off x="3884613" y="8685213"/>
+            <a:ext cx="2971800" cy="458787"/>
+          </a:xfrm>
+          <a:prstGeom prst="rect">
+            <a:avLst/>
+          </a:prstGeom>
+        </p:spPr>
+        <p:txBody>
+          <a:bodyPr vert="horz" lIns="91440" tIns="45720" rIns="91440" bIns="45720" rtlCol="0" anchor="b"/>
+          <a:lstStyle>
+            <a:lvl1pPr algn="r">
+              <a:defRPr sz="1200"/>
+            </a:lvl1pPr>
+          </a:lstStyle>
+          <a:p>
+            <a:fld id="{18BDFEC3-8487-43E8-A154-7C12CBC1FFF2}" type="slidenum">
+              <a:rPr lang="en-US" smtClean="0"/>
+              <a:t>‹#›</a:t>
+            </a:fld>
+            <a:endParaRPr lang="en-US"/>
+          </a:p>
+        </p:txBody>
+      </p:sp>
+    </p:spTree>
+    <p:extLst>
+      <p:ext uri="{BB962C8B-B14F-4D97-AF65-F5344CB8AC3E}">
+        <p14:creationId xmlns:p14="http://schemas.microsoft.com/office/powerpoint/2010/main" val="3782709779"/>
+      </p:ext>
+    </p:extLst>
+  </p:cSld>
+  <p:clrMap bg1="lt1" tx1="dk1" bg2="lt2" tx2="dk2" accent1="accent1" accent2="accent2" accent3="accent3" accent4="accent4" accent5="accent5" accent6="accent6" hlink="hlink" folHlink="folHlink"/>
+  <p:notesStyle>
+    <a:lvl1pPr marL="0" algn="l" defTabSz="914400" rtl="0" eaLnBrk="1" latinLnBrk="0" hangingPunct="1">
+      <a:defRPr sz="1200" kern="1200">
+        <a:solidFill>
+          <a:schemeClr val="tx1"/>
+        </a:solidFill>
+        <a:latin typeface="+mn-lt"/>
+        <a:ea typeface="+mn-ea"/>
+        <a:cs typeface="+mn-cs"/>
+      </a:defRPr>
+    </a:lvl1pPr>
+    <a:lvl2pPr marL="457200" algn="l" defTabSz="914400" rtl="0" eaLnBrk="1" latinLnBrk="0" hangingPunct="1">
+      <a:defRPr sz="1200" kern="1200">
+        <a:solidFill>
+          <a:schemeClr val="tx1"/>
+        </a:solidFill>
+        <a:latin typeface="+mn-lt"/>
+        <a:ea typeface="+mn-ea"/>
+        <a:cs typeface="+mn-cs"/>
+      </a:defRPr>
+    </a:lvl2pPr>
+    <a:lvl3pPr marL="914400" algn="l" defTabSz="914400" rtl="0" eaLnBrk="1" latinLnBrk="0" hangingPunct="1">
+      <a:defRPr sz="1200" kern="1200">
+        <a:solidFill>
+          <a:schemeClr val="tx1"/>
+        </a:solidFill>
+        <a:latin typeface="+mn-lt"/>
+        <a:ea typeface="+mn-ea"/>
+        <a:cs typeface="+mn-cs"/>
+      </a:defRPr>
+    </a:lvl3pPr>
+    <a:lvl4pPr marL="1371600" algn="l" defTabSz="914400" rtl="0" eaLnBrk="1" latinLnBrk="0" hangingPunct="1">
+      <a:defRPr sz="1200" kern="1200">
+        <a:solidFill>
+          <a:schemeClr val="tx1"/>
+        </a:solidFill>
+        <a:latin typeface="+mn-lt"/>
+        <a:ea typeface="+mn-ea"/>
+        <a:cs typeface="+mn-cs"/>
+      </a:defRPr>
+    </a:lvl4pPr>
+    <a:lvl5pPr marL="1828800" algn="l" defTabSz="914400" rtl="0" eaLnBrk="1" latinLnBrk="0" hangingPunct="1">
+      <a:defRPr sz="1200" kern="1200">
+        <a:solidFill>
+          <a:schemeClr val="tx1"/>
+        </a:solidFill>
+        <a:latin typeface="+mn-lt"/>
+        <a:ea typeface="+mn-ea"/>
+        <a:cs typeface="+mn-cs"/>
+      </a:defRPr>
+    </a:lvl5pPr>
+    <a:lvl6pPr marL="2286000" algn="l" defTabSz="914400" rtl="0" eaLnBrk="1" latinLnBrk="0" hangingPunct="1">
+      <a:defRPr sz="1200" kern="1200">
+        <a:solidFill>
+          <a:schemeClr val="tx1"/>
+        </a:solidFill>
+        <a:latin typeface="+mn-lt"/>
+        <a:ea typeface="+mn-ea"/>
+        <a:cs typeface="+mn-cs"/>
+      </a:defRPr>
+    </a:lvl6pPr>
+    <a:lvl7pPr marL="2743200" algn="l" defTabSz="914400" rtl="0" eaLnBrk="1" latinLnBrk="0" hangingPunct="1">
+      <a:defRPr sz="1200" kern="1200">
+        <a:solidFill>
+          <a:schemeClr val="tx1"/>
+        </a:solidFill>
+        <a:latin typeface="+mn-lt"/>
+        <a:ea typeface="+mn-ea"/>
+        <a:cs typeface="+mn-cs"/>
+      </a:defRPr>
+    </a:lvl7pPr>
+    <a:lvl8pPr marL="3200400" algn="l" defTabSz="914400" rtl="0" eaLnBrk="1" latinLnBrk="0" hangingPunct="1">
+      <a:defRPr sz="1200" kern="1200">
+        <a:solidFill>
+          <a:schemeClr val="tx1"/>
+        </a:solidFill>
+        <a:latin typeface="+mn-lt"/>
+        <a:ea typeface="+mn-ea"/>
+        <a:cs typeface="+mn-cs"/>
+      </a:defRPr>
+    </a:lvl8pPr>
+    <a:lvl9pPr marL="3657600" algn="l" defTabSz="914400" rtl="0" eaLnBrk="1" latinLnBrk="0" hangingPunct="1">
+      <a:defRPr sz="1200" kern="1200">
+        <a:solidFill>
+          <a:schemeClr val="tx1"/>
+        </a:solidFill>
+        <a:latin typeface="+mn-lt"/>
+        <a:ea typeface="+mn-ea"/>
+        <a:cs typeface="+mn-cs"/>
+      </a:defRPr>
+    </a:lvl9pPr>
+  </p:notesStyle>
+</p:notesMaster>
+</file>
+
+<file path=ppt/notesSlides/notesSlide1.xml><?xml version="1.0" encoding="utf-8"?>
+<p:notes xmlns:a="http://schemas.openxmlformats.org/drawingml/2006/main" xmlns:r="http://schemas.openxmlformats.org/officeDocument/2006/relationships" xmlns:p="http://schemas.openxmlformats.org/presentationml/2006/main">
+  <p:cSld>
+    <p:spTree>
+      <p:nvGrpSpPr>
+        <p:cNvPr id="1" name=""/>
+        <p:cNvGrpSpPr/>
+        <p:nvPr/>
+      </p:nvGrpSpPr>
+      <p:grpSpPr>
+        <a:xfrm>
+          <a:off x="0" y="0"/>
+          <a:ext cx="0" cy="0"/>
+          <a:chOff x="0" y="0"/>
+          <a:chExt cx="0" cy="0"/>
+        </a:xfrm>
+      </p:grpSpPr>
+      <p:sp>
+        <p:nvSpPr>
+          <p:cNvPr id="2" name="Slide Image Placeholder 1"/>
+          <p:cNvSpPr>
+            <a:spLocks noGrp="1" noRot="1" noChangeAspect="1"/>
+          </p:cNvSpPr>
+          <p:nvPr>
+            <p:ph type="sldImg"/>
+          </p:nvPr>
+        </p:nvSpPr>
+        <p:spPr/>
+      </p:sp>
+      <p:sp>
+        <p:nvSpPr>
+          <p:cNvPr id="3" name="Notes Placeholder 2"/>
+          <p:cNvSpPr>
+            <a:spLocks noGrp="1"/>
+          </p:cNvSpPr>
+          <p:nvPr>
+            <p:ph type="body" idx="1"/>
+          </p:nvPr>
+        </p:nvSpPr>
+        <p:spPr/>
+        <p:txBody>
+          <a:bodyPr/>
+          <a:lstStyle/>
+          <a:p>
+            <a:pPr lvl="0" indent="0" marL="0">
+              <a:buNone/>
+            </a:pPr>
+            <a:r>
+              <a:rPr/>
+              <a:t>Poll: Enter 1-3 words at a time that summarize your assessment identity. (WordCloud)</a:t>
+            </a:r>
+          </a:p>
+        </p:txBody>
+      </p:sp>
+      <p:sp>
+        <p:nvSpPr>
+          <p:cNvPr id="4" name="Slide Number Placeholder 3"/>
+          <p:cNvSpPr>
+            <a:spLocks noGrp="1"/>
+          </p:cNvSpPr>
+          <p:nvPr>
+            <p:ph type="sldNum" sz="quarter" idx="10"/>
+          </p:nvPr>
+        </p:nvSpPr>
+        <p:spPr/>
+        <p:txBody>
+          <a:bodyPr/>
+          <a:lstStyle/>
+          <a:p>
+            <a:fld id="{18BDFEC3-8487-43E8-A154-7C12CBC1FFF2}" type="slidenum">
+              <a:rPr lang="en-US"/>
+              <a:t>10</a:t>
+            </a:fld>
+            <a:endParaRPr lang="en-US"/>
+          </a:p>
+        </p:txBody>
+      </p:sp>
+    </p:spTree>
+  </p:cSld>
+</p:notes>
+</file>
+
+<file path=ppt/notesSlides/notesSlide2.xml><?xml version="1.0" encoding="utf-8"?>
+<p:notes xmlns:a="http://schemas.openxmlformats.org/drawingml/2006/main" xmlns:r="http://schemas.openxmlformats.org/officeDocument/2006/relationships" xmlns:p="http://schemas.openxmlformats.org/presentationml/2006/main">
+  <p:cSld>
+    <p:spTree>
+      <p:nvGrpSpPr>
+        <p:cNvPr id="1" name=""/>
+        <p:cNvGrpSpPr/>
+        <p:nvPr/>
+      </p:nvGrpSpPr>
+      <p:grpSpPr>
+        <a:xfrm>
+          <a:off x="0" y="0"/>
+          <a:ext cx="0" cy="0"/>
+          <a:chOff x="0" y="0"/>
+          <a:chExt cx="0" cy="0"/>
+        </a:xfrm>
+      </p:grpSpPr>
+      <p:sp>
+        <p:nvSpPr>
+          <p:cNvPr id="2" name="Slide Image Placeholder 1"/>
+          <p:cNvSpPr>
+            <a:spLocks noGrp="1" noRot="1" noChangeAspect="1"/>
+          </p:cNvSpPr>
+          <p:nvPr>
+            <p:ph type="sldImg"/>
+          </p:nvPr>
+        </p:nvSpPr>
+        <p:spPr/>
+      </p:sp>
+      <p:sp>
+        <p:nvSpPr>
+          <p:cNvPr id="3" name="Notes Placeholder 2"/>
+          <p:cNvSpPr>
+            <a:spLocks noGrp="1"/>
+          </p:cNvSpPr>
+          <p:nvPr>
+            <p:ph type="body" idx="1"/>
+          </p:nvPr>
+        </p:nvSpPr>
+        <p:spPr/>
+        <p:txBody>
+          <a:bodyPr/>
+          <a:lstStyle/>
+          <a:p>
+            <a:pPr lvl="0" indent="0" marL="0">
+              <a:buNone/>
+            </a:pPr>
+            <a:r>
+              <a:rPr/>
+              <a:t>What method of reporting assignment grades to learners best fits your current practice? - percentage scale (e.g., 74%) - raw score (e.g., 19/26) - letter grade (e.g., A+, A, A- … C-, D, F) - proficiency scale (e.g. Excellent, Meets Expectations, Revision Needed, Not Assessable) - a combination of the above - other (please specify)</a:t>
+            </a:r>
+          </a:p>
+        </p:txBody>
+      </p:sp>
+      <p:sp>
+        <p:nvSpPr>
+          <p:cNvPr id="4" name="Slide Number Placeholder 3"/>
+          <p:cNvSpPr>
+            <a:spLocks noGrp="1"/>
+          </p:cNvSpPr>
+          <p:nvPr>
+            <p:ph type="sldNum" sz="quarter" idx="10"/>
+          </p:nvPr>
+        </p:nvSpPr>
+        <p:spPr/>
+        <p:txBody>
+          <a:bodyPr/>
+          <a:lstStyle/>
+          <a:p>
+            <a:fld id="{18BDFEC3-8487-43E8-A154-7C12CBC1FFF2}" type="slidenum">
+              <a:rPr lang="en-US"/>
+              <a:t>15</a:t>
+            </a:fld>
+            <a:endParaRPr lang="en-US"/>
+          </a:p>
+        </p:txBody>
+      </p:sp>
+    </p:spTree>
+  </p:cSld>
+</p:notes>
 </file>
 
 <file path=ppt/slideLayouts/slideLayout1.xml><?xml version="1.0" encoding="utf-8"?>
@@ -3125,7 +3655,7 @@
             </a:pPr>
             <a:r>
               <a:rPr/>
-              <a:t>Transforming Assessment</a:t>
+              <a:t>Re-imagining Assessment Choices</a:t>
             </a:r>
           </a:p>
         </p:txBody>
@@ -3211,12 +3741,12 @@
       </p:grpSpPr>
       <p:sp>
         <p:nvSpPr>
-          <p:cNvPr id="4" name="Text Placeholder 3"/>
-          <p:cNvSpPr>
-            <a:spLocks noGrp="1"/>
-          </p:cNvSpPr>
-          <p:nvPr>
-            <p:ph idx="2" sz="half" type="body"/>
+          <p:cNvPr id="3" name="Content Placeholder 2"/>
+          <p:cNvSpPr>
+            <a:spLocks noGrp="1"/>
+          </p:cNvSpPr>
+          <p:nvPr>
+            <p:ph idx="1"/>
           </p:nvPr>
         </p:nvSpPr>
         <p:spPr/>
@@ -3232,46 +3762,11 @@
             </a:pPr>
             <a:r>
               <a:rPr b="1"/>
-              <a:t>Assessment as Transaction</a:t>
-            </a:r>
-          </a:p>
-          <a:p>
-            <a:pPr lvl="0" indent="0" marL="0">
-              <a:buNone/>
-            </a:pPr>
-          </a:p>
-        </p:txBody>
-      </p:sp>
-      <p:pic>
-        <p:nvPicPr>
-          <p:cNvPr descr="index_files/figure-pptx/mermaid-figure-1.png" id="0" name="Picture 1"/>
-          <p:cNvPicPr>
-            <a:picLocks noGrp="1" noChangeAspect="1"/>
-          </p:cNvPicPr>
-          <p:nvPr/>
-        </p:nvPicPr>
-        <p:blipFill>
-          <a:blip r:embed="rId2"/>
-          <a:stretch>
-            <a:fillRect/>
-          </a:stretch>
-        </p:blipFill>
-        <p:spPr bwMode="auto">
-          <a:xfrm>
-            <a:off x="3568700" y="596900"/>
-            <a:ext cx="5105400" cy="3594100"/>
-          </a:xfrm>
-          <a:prstGeom prst="rect">
-            <a:avLst/>
-          </a:prstGeom>
-          <a:noFill/>
-          <a:ln w="9525">
-            <a:noFill/>
-            <a:headEnd/>
-            <a:tailEnd/>
-          </a:ln>
-        </p:spPr>
-      </p:pic>
+              <a:t>Highlights?</a:t>
+            </a:r>
+          </a:p>
+        </p:txBody>
+      </p:sp>
     </p:spTree>
   </p:cSld>
 </p:sld>
@@ -3296,6 +3791,86 @@
       </p:grpSpPr>
       <p:sp>
         <p:nvSpPr>
+          <p:cNvPr id="4" name="Text Placeholder 3"/>
+          <p:cNvSpPr>
+            <a:spLocks noGrp="1"/>
+          </p:cNvSpPr>
+          <p:nvPr>
+            <p:ph idx="2" sz="half" type="body"/>
+          </p:nvPr>
+        </p:nvSpPr>
+        <p:spPr/>
+        <p:txBody>
+          <a:bodyPr/>
+          <a:lstStyle/>
+          <a:p>
+            <a:pPr lvl="0" indent="0" marL="0">
+              <a:spcBef>
+                <a:spcPts val="3000"/>
+              </a:spcBef>
+              <a:buNone/>
+            </a:pPr>
+            <a:r>
+              <a:rPr b="1"/>
+              <a:t>Assessment as Transaction</a:t>
+            </a:r>
+          </a:p>
+        </p:txBody>
+      </p:sp>
+      <p:pic>
+        <p:nvPicPr>
+          <p:cNvPr descr="friere-book.png" id="0" name="Picture 1"/>
+          <p:cNvPicPr>
+            <a:picLocks noGrp="1" noChangeAspect="1"/>
+          </p:cNvPicPr>
+          <p:nvPr/>
+        </p:nvPicPr>
+        <p:blipFill>
+          <a:blip r:embed="rId2"/>
+          <a:stretch>
+            <a:fillRect/>
+          </a:stretch>
+        </p:blipFill>
+        <p:spPr bwMode="auto">
+          <a:xfrm>
+            <a:off x="3568700" y="673100"/>
+            <a:ext cx="5105400" cy="3441700"/>
+          </a:xfrm>
+          <a:prstGeom prst="rect">
+            <a:avLst/>
+          </a:prstGeom>
+          <a:noFill/>
+          <a:ln w="9525">
+            <a:noFill/>
+            <a:headEnd/>
+            <a:tailEnd/>
+          </a:ln>
+        </p:spPr>
+      </p:pic>
+    </p:spTree>
+  </p:cSld>
+</p:sld>
+</file>
+
+<file path=ppt/slides/slide12.xml><?xml version="1.0" encoding="utf-8"?>
+<p:sld xmlns:a="http://schemas.openxmlformats.org/drawingml/2006/main" xmlns:r="http://schemas.openxmlformats.org/officeDocument/2006/relationships" xmlns:p="http://schemas.openxmlformats.org/presentationml/2006/main">
+  <p:cSld>
+    <p:spTree>
+      <p:nvGrpSpPr>
+        <p:cNvPr id="1" name=""/>
+        <p:cNvGrpSpPr/>
+        <p:nvPr/>
+      </p:nvGrpSpPr>
+      <p:grpSpPr>
+        <a:xfrm>
+          <a:off x="0" y="0"/>
+          <a:ext cx="0" cy="0"/>
+          <a:chOff x="0" y="0"/>
+          <a:chExt cx="0" cy="0"/>
+        </a:xfrm>
+      </p:grpSpPr>
+      <p:sp>
+        <p:nvSpPr>
           <p:cNvPr id="3" name="Content Placeholder 2"/>
           <p:cNvSpPr>
             <a:spLocks noGrp="1"/>
@@ -3309,22 +3884,1285 @@
           <a:bodyPr/>
           <a:lstStyle/>
           <a:p>
+            <a:pPr lvl="0" indent="0" marL="1270000">
+              <a:buNone/>
+            </a:pPr>
+            <a:r>
+              <a:rPr sz="2000"/>
+              <a:t>Instead of communicating, the teacher issues communiqués and makes deposits which the students patiently receive, memorize, and repeat. This is the “banking” concept of education, in which the scope of action allowed to students extends only as far as receiving, filing, and storing the deposits. (Freire, 1990, p. 72)</a:t>
+            </a:r>
+          </a:p>
+        </p:txBody>
+      </p:sp>
+    </p:spTree>
+  </p:cSld>
+</p:sld>
+</file>
+
+<file path=ppt/slides/slide13.xml><?xml version="1.0" encoding="utf-8"?>
+<p:sld xmlns:a="http://schemas.openxmlformats.org/drawingml/2006/main" xmlns:r="http://schemas.openxmlformats.org/officeDocument/2006/relationships" xmlns:p="http://schemas.openxmlformats.org/presentationml/2006/main">
+  <p:cSld>
+    <p:spTree>
+      <p:nvGrpSpPr>
+        <p:cNvPr id="1" name=""/>
+        <p:cNvGrpSpPr/>
+        <p:nvPr/>
+      </p:nvGrpSpPr>
+      <p:grpSpPr>
+        <a:xfrm>
+          <a:off x="0" y="0"/>
+          <a:ext cx="0" cy="0"/>
+          <a:chOff x="0" y="0"/>
+          <a:chExt cx="0" cy="0"/>
+        </a:xfrm>
+      </p:grpSpPr>
+      <p:sp>
+        <p:nvSpPr>
+          <p:cNvPr id="4" name="Text Placeholder 3"/>
+          <p:cNvSpPr>
+            <a:spLocks noGrp="1"/>
+          </p:cNvSpPr>
+          <p:nvPr>
+            <p:ph idx="2" sz="half" type="body"/>
+          </p:nvPr>
+        </p:nvSpPr>
+        <p:spPr/>
+        <p:txBody>
+          <a:bodyPr/>
+          <a:lstStyle/>
+          <a:p>
             <a:pPr lvl="0" indent="0" marL="0">
               <a:buNone/>
             </a:pPr>
-            <a:r>
-              <a:rPr>
-                <a:hlinkClick r:id="rId2"/>
-              </a:rPr>
-              <a:t>cmad.land</a:t>
-            </a:r>
+          </a:p>
+        </p:txBody>
+      </p:sp>
+      <p:pic>
+        <p:nvPicPr>
+          <p:cNvPr descr="index_files/figure-pptx/mermaid-figure-1.png" id="0" name="Picture 1"/>
+          <p:cNvPicPr>
+            <a:picLocks noGrp="1" noChangeAspect="1"/>
+          </p:cNvPicPr>
+          <p:nvPr/>
+        </p:nvPicPr>
+        <p:blipFill>
+          <a:blip r:embed="rId2"/>
+          <a:stretch>
+            <a:fillRect/>
+          </a:stretch>
+        </p:blipFill>
+        <p:spPr bwMode="auto">
+          <a:xfrm>
+            <a:off x="3568700" y="711200"/>
+            <a:ext cx="5105400" cy="3365500"/>
+          </a:xfrm>
+          <a:prstGeom prst="rect">
+            <a:avLst/>
+          </a:prstGeom>
+          <a:noFill/>
+          <a:ln w="9525">
+            <a:noFill/>
+            <a:headEnd/>
+            <a:tailEnd/>
+          </a:ln>
+        </p:spPr>
+      </p:pic>
+    </p:spTree>
+  </p:cSld>
+</p:sld>
+</file>
+
+<file path=ppt/slides/slide14.xml><?xml version="1.0" encoding="utf-8"?>
+<p:sld xmlns:a="http://schemas.openxmlformats.org/drawingml/2006/main" xmlns:r="http://schemas.openxmlformats.org/officeDocument/2006/relationships" xmlns:p="http://schemas.openxmlformats.org/presentationml/2006/main">
+  <p:cSld>
+    <p:spTree>
+      <p:nvGrpSpPr>
+        <p:cNvPr id="1" name=""/>
+        <p:cNvGrpSpPr/>
+        <p:nvPr/>
+      </p:nvGrpSpPr>
+      <p:grpSpPr>
+        <a:xfrm>
+          <a:off x="0" y="0"/>
+          <a:ext cx="0" cy="0"/>
+          <a:chOff x="0" y="0"/>
+          <a:chExt cx="0" cy="0"/>
+        </a:xfrm>
+      </p:grpSpPr>
+      <p:sp>
+        <p:nvSpPr>
+          <p:cNvPr id="2" name="Title 1"/>
+          <p:cNvSpPr>
+            <a:spLocks noGrp="1"/>
+          </p:cNvSpPr>
+          <p:nvPr>
+            <p:ph type="title"/>
+          </p:nvPr>
+        </p:nvSpPr>
+        <p:spPr/>
+        <p:txBody>
+          <a:bodyPr/>
+          <a:lstStyle/>
+          <a:p>
+            <a:pPr lvl="0" indent="0" marL="0">
+              <a:buNone/>
+            </a:pPr>
             <a:r>
               <a:rPr/>
-              <a:t> - slides</a:t>
-            </a:r>
-          </a:p>
-        </p:txBody>
-      </p:sp>
+              <a:t>Stop. Be outside. Think.</a:t>
+            </a:r>
+          </a:p>
+        </p:txBody>
+      </p:sp>
+      <p:sp>
+        <p:nvSpPr>
+          <p:cNvPr id="3" name="Content Placeholder 2"/>
+          <p:cNvSpPr>
+            <a:spLocks noGrp="1"/>
+          </p:cNvSpPr>
+          <p:nvPr>
+            <p:ph idx="1"/>
+          </p:nvPr>
+        </p:nvSpPr>
+        <p:spPr/>
+        <p:txBody>
+          <a:bodyPr/>
+          <a:lstStyle/>
+          <a:p>
+            <a:pPr lvl="0" indent="0" marL="0">
+              <a:buNone/>
+            </a:pPr>
+            <a:r>
+              <a:rPr/>
+              <a:t>Recall a time when you were the </a:t>
+            </a:r>
+            <a:r>
+              <a:rPr i="1"/>
+              <a:t>object</a:t>
+            </a:r>
+            <a:r>
+              <a:rPr/>
+              <a:t> in an educational transaction, where ‘teaching’ or ‘assessing’ was something done </a:t>
+            </a:r>
+            <a:r>
+              <a:rPr b="1"/>
+              <a:t>to</a:t>
+            </a:r>
+            <a:r>
+              <a:rPr/>
+              <a:t> you. What might YOU do to avoid commoditizing grades in your practice?</a:t>
+            </a:r>
+          </a:p>
+        </p:txBody>
+      </p:sp>
+    </p:spTree>
+  </p:cSld>
+</p:sld>
+</file>
+
+<file path=ppt/slides/slide15.xml><?xml version="1.0" encoding="utf-8"?>
+<p:sld xmlns:a="http://schemas.openxmlformats.org/drawingml/2006/main" xmlns:r="http://schemas.openxmlformats.org/officeDocument/2006/relationships" xmlns:p="http://schemas.openxmlformats.org/presentationml/2006/main">
+  <p:cSld>
+    <p:spTree>
+      <p:nvGrpSpPr>
+        <p:cNvPr id="1" name=""/>
+        <p:cNvGrpSpPr/>
+        <p:nvPr/>
+      </p:nvGrpSpPr>
+      <p:grpSpPr>
+        <a:xfrm>
+          <a:off x="0" y="0"/>
+          <a:ext cx="0" cy="0"/>
+          <a:chOff x="0" y="0"/>
+          <a:chExt cx="0" cy="0"/>
+        </a:xfrm>
+      </p:grpSpPr>
+      <p:sp>
+        <p:nvSpPr>
+          <p:cNvPr id="3" name="Content Placeholder 2"/>
+          <p:cNvSpPr>
+            <a:spLocks noGrp="1"/>
+          </p:cNvSpPr>
+          <p:nvPr>
+            <p:ph idx="1"/>
+          </p:nvPr>
+        </p:nvSpPr>
+        <p:spPr/>
+        <p:txBody>
+          <a:bodyPr/>
+          <a:lstStyle/>
+          <a:p>
+            <a:pPr lvl="0" indent="0" marL="0">
+              <a:spcBef>
+                <a:spcPts val="3000"/>
+              </a:spcBef>
+              <a:buNone/>
+            </a:pPr>
+            <a:r>
+              <a:rPr b="1"/>
+              <a:t>Agency in Assessment</a:t>
+            </a:r>
+          </a:p>
+        </p:txBody>
+      </p:sp>
+    </p:spTree>
+  </p:cSld>
+</p:sld>
+</file>
+
+<file path=ppt/slides/slide16.xml><?xml version="1.0" encoding="utf-8"?>
+<p:sld xmlns:a="http://schemas.openxmlformats.org/drawingml/2006/main" xmlns:r="http://schemas.openxmlformats.org/officeDocument/2006/relationships" xmlns:p="http://schemas.openxmlformats.org/presentationml/2006/main">
+  <p:cSld>
+    <p:spTree>
+      <p:nvGrpSpPr>
+        <p:cNvPr id="1" name=""/>
+        <p:cNvGrpSpPr/>
+        <p:nvPr/>
+      </p:nvGrpSpPr>
+      <p:grpSpPr>
+        <a:xfrm>
+          <a:off x="0" y="0"/>
+          <a:ext cx="0" cy="0"/>
+          <a:chOff x="0" y="0"/>
+          <a:chExt cx="0" cy="0"/>
+        </a:xfrm>
+      </p:grpSpPr>
+      <p:graphicFrame>
+        <p:nvGraphicFramePr>
+          <p:cNvPr id="6" name="Content Placeholder 5"/>
+          <p:cNvGraphicFramePr>
+            <a:graphicFrameLocks noGrp="1"/>
+          </p:cNvGraphicFramePr>
+          <p:nvPr>
+            <p:ph idx="1"/>
+          </p:nvPr>
+        </p:nvGraphicFramePr>
+        <p:xfrm>
+          <a:off x="457200" y="1193800"/>
+          <a:ext cx="8229600" cy="3390900"/>
+        </p:xfrm>
+        <a:graphic>
+          <a:graphicData uri="http://schemas.openxmlformats.org/drawingml/2006/table">
+            <a:tbl>
+              <a:tblPr firstRow="1" bandRow="1">
+                <a:tableStyleId>{5C22544A-7EE6-4342-B048-85BDC9FD1C3A}</a:tableStyleId>
+              </a:tblPr>
+              <a:tblGrid>
+                <a:gridCol w="1231900"/>
+                <a:gridCol w="6997700"/>
+              </a:tblGrid>
+              <a:tr h="0">
+                <a:tc>
+                  <a:txBody>
+                    <a:bodyPr/>
+                    <a:lstStyle/>
+                    <a:p>
+                      <a:pPr lvl="0" indent="0" marL="0">
+                        <a:buNone/>
+                      </a:pPr>
+                      <a:r>
+                        <a:rPr/>
+                        <a:t>letter.grade</a:t>
+                      </a:r>
+                    </a:p>
+                  </a:txBody>
+                  <a:tcPr/>
+                </a:tc>
+                <a:tc>
+                  <a:txBody>
+                    <a:bodyPr/>
+                    <a:lstStyle/>
+                    <a:p>
+                      <a:pPr lvl="0" indent="0" marL="0">
+                        <a:buNone/>
+                      </a:pPr>
+                      <a:r>
+                        <a:rPr/>
+                        <a:t>quality.characteristics</a:t>
+                      </a:r>
+                    </a:p>
+                  </a:txBody>
+                  <a:tcPr/>
+                </a:tc>
+              </a:tr>
+              <a:tr h="0">
+                <a:tc>
+                  <a:txBody>
+                    <a:bodyPr/>
+                    <a:lstStyle/>
+                    <a:p>
+                      <a:pPr lvl="0" indent="0" marL="0">
+                        <a:buNone/>
+                      </a:pPr>
+                      <a:r>
+                        <a:rPr/>
+                        <a:t>A</a:t>
+                      </a:r>
+                    </a:p>
+                  </a:txBody>
+                </a:tc>
+                <a:tc>
+                  <a:txBody>
+                    <a:bodyPr/>
+                    <a:lstStyle/>
+                    <a:p>
+                      <a:pPr lvl="0" indent="0" marL="0">
+                        <a:buNone/>
+                      </a:pPr>
+                      <a:r>
+                        <a:rPr/>
+                        <a:t>Outstanding, excellent work; exceptional performance with …</a:t>
+                      </a:r>
+                    </a:p>
+                  </a:txBody>
+                </a:tc>
+              </a:tr>
+              <a:tr h="0">
+                <a:tc>
+                  <a:txBody>
+                    <a:bodyPr/>
+                    <a:lstStyle/>
+                    <a:p>
+                      <a:pPr lvl="0" indent="0" marL="0">
+                        <a:buNone/>
+                      </a:pPr>
+                      <a:r>
+                        <a:rPr/>
+                        <a:t>B</a:t>
+                      </a:r>
+                    </a:p>
+                  </a:txBody>
+                </a:tc>
+                <a:tc>
+                  <a:txBody>
+                    <a:bodyPr/>
+                    <a:lstStyle/>
+                    <a:p>
+                      <a:pPr lvl="0" indent="0" marL="0">
+                        <a:buNone/>
+                      </a:pPr>
+                      <a:r>
+                        <a:rPr/>
+                        <a:t>Good, competent work; laudable performance with…</a:t>
+                      </a:r>
+                    </a:p>
+                  </a:txBody>
+                </a:tc>
+              </a:tr>
+              <a:tr h="0">
+                <a:tc>
+                  <a:txBody>
+                    <a:bodyPr/>
+                    <a:lstStyle/>
+                    <a:p>
+                      <a:pPr lvl="0" indent="0" marL="0">
+                        <a:buNone/>
+                      </a:pPr>
+                      <a:r>
+                        <a:rPr/>
+                        <a:t>C</a:t>
+                      </a:r>
+                    </a:p>
+                  </a:txBody>
+                </a:tc>
+                <a:tc>
+                  <a:txBody>
+                    <a:bodyPr/>
+                    <a:lstStyle/>
+                    <a:p>
+                      <a:pPr lvl="0" indent="0" marL="0">
+                        <a:buNone/>
+                      </a:pPr>
+                      <a:r>
+                        <a:rPr/>
+                        <a:t>Adequate, reasonably satisfactory work; fair performance but infrequent evidence …</a:t>
+                      </a:r>
+                    </a:p>
+                  </a:txBody>
+                </a:tc>
+              </a:tr>
+              <a:tr h="0">
+                <a:tc>
+                  <a:txBody>
+                    <a:bodyPr/>
+                    <a:lstStyle/>
+                    <a:p>
+                      <a:pPr lvl="0" indent="0" marL="0">
+                        <a:buNone/>
+                      </a:pPr>
+                      <a:r>
+                        <a:rPr/>
+                        <a:t>D</a:t>
+                      </a:r>
+                    </a:p>
+                  </a:txBody>
+                </a:tc>
+                <a:tc>
+                  <a:txBody>
+                    <a:bodyPr/>
+                    <a:lstStyle/>
+                    <a:p>
+                      <a:pPr lvl="0" indent="0" marL="0">
+                        <a:buNone/>
+                      </a:pPr>
+                      <a:r>
+                        <a:rPr/>
+                        <a:t>Minimally acceptable work; relatively weak performance with …</a:t>
+                      </a:r>
+                    </a:p>
+                  </a:txBody>
+                </a:tc>
+              </a:tr>
+              <a:tr h="0">
+                <a:tc>
+                  <a:txBody>
+                    <a:bodyPr/>
+                    <a:lstStyle/>
+                    <a:p>
+                      <a:pPr lvl="0" indent="0" marL="0">
+                        <a:buNone/>
+                      </a:pPr>
+                      <a:r>
+                        <a:rPr/>
+                        <a:t>F</a:t>
+                      </a:r>
+                    </a:p>
+                  </a:txBody>
+                </a:tc>
+                <a:tc>
+                  <a:txBody>
+                    <a:bodyPr/>
+                    <a:lstStyle/>
+                    <a:p>
+                      <a:pPr lvl="0" indent="0" marL="0">
+                        <a:buNone/>
+                      </a:pPr>
+                      <a:r>
+                        <a:rPr/>
+                        <a:t>Inadequate work; poor performance that indicates a lack of understanding …</a:t>
+                      </a:r>
+                    </a:p>
+                  </a:txBody>
+                </a:tc>
+              </a:tr>
+            </a:tbl>
+          </a:graphicData>
+        </a:graphic>
+      </p:graphicFrame>
+    </p:spTree>
+  </p:cSld>
+</p:sld>
+</file>
+
+<file path=ppt/slides/slide17.xml><?xml version="1.0" encoding="utf-8"?>
+<p:sld xmlns:a="http://schemas.openxmlformats.org/drawingml/2006/main" xmlns:r="http://schemas.openxmlformats.org/officeDocument/2006/relationships" xmlns:p="http://schemas.openxmlformats.org/presentationml/2006/main">
+  <p:cSld>
+    <p:spTree>
+      <p:nvGrpSpPr>
+        <p:cNvPr id="1" name=""/>
+        <p:cNvGrpSpPr/>
+        <p:nvPr/>
+      </p:nvGrpSpPr>
+      <p:grpSpPr>
+        <a:xfrm>
+          <a:off x="0" y="0"/>
+          <a:ext cx="0" cy="0"/>
+          <a:chOff x="0" y="0"/>
+          <a:chExt cx="0" cy="0"/>
+        </a:xfrm>
+      </p:grpSpPr>
+      <p:sp>
+        <p:nvSpPr>
+          <p:cNvPr id="3" name="Content Placeholder 2"/>
+          <p:cNvSpPr>
+            <a:spLocks noGrp="1"/>
+          </p:cNvSpPr>
+          <p:nvPr>
+            <p:ph idx="1"/>
+          </p:nvPr>
+        </p:nvSpPr>
+        <p:spPr/>
+        <p:txBody>
+          <a:bodyPr/>
+          <a:lstStyle/>
+          <a:p>
+            <a:pPr lvl="0" indent="0" marL="1270000">
+              <a:buNone/>
+            </a:pPr>
+            <a:r>
+              <a:rPr sz="2000"/>
+              <a:t>The University-wide system of percentage equivalents is shown in the table below [next slide]. </a:t>
+            </a:r>
+            <a:r>
+              <a:rPr sz="2000" i="1"/>
+              <a:t>Faculty members may deviate from this scale</a:t>
+            </a:r>
+            <a:r>
+              <a:rPr sz="2000"/>
+              <a:t>; however, if they do so, they must indicate, in their course syllabus, the percentage equivalency system they use.</a:t>
+            </a:r>
+          </a:p>
+        </p:txBody>
+      </p:sp>
+    </p:spTree>
+  </p:cSld>
+</p:sld>
+</file>
+
+<file path=ppt/slides/slide18.xml><?xml version="1.0" encoding="utf-8"?>
+<p:sld xmlns:a="http://schemas.openxmlformats.org/drawingml/2006/main" xmlns:r="http://schemas.openxmlformats.org/officeDocument/2006/relationships" xmlns:p="http://schemas.openxmlformats.org/presentationml/2006/main">
+  <p:cSld>
+    <p:spTree>
+      <p:nvGrpSpPr>
+        <p:cNvPr id="1" name=""/>
+        <p:cNvGrpSpPr/>
+        <p:nvPr/>
+      </p:nvGrpSpPr>
+      <p:grpSpPr>
+        <a:xfrm>
+          <a:off x="0" y="0"/>
+          <a:ext cx="0" cy="0"/>
+          <a:chOff x="0" y="0"/>
+          <a:chExt cx="0" cy="0"/>
+        </a:xfrm>
+      </p:grpSpPr>
+      <p:sp>
+        <p:nvSpPr>
+          <p:cNvPr id="2" name="Title 1"/>
+          <p:cNvSpPr>
+            <a:spLocks noGrp="1"/>
+          </p:cNvSpPr>
+          <p:nvPr>
+            <p:ph type="title"/>
+          </p:nvPr>
+        </p:nvSpPr>
+        <p:spPr/>
+        <p:txBody>
+          <a:bodyPr/>
+          <a:lstStyle/>
+          <a:p>
+            <a:pPr lvl="0" indent="0" marL="0">
+              <a:buNone/>
+            </a:pPr>
+            <a:r>
+              <a:rPr/>
+              <a:t>What do you notice? What do you wonder?</a:t>
+            </a:r>
+          </a:p>
+        </p:txBody>
+      </p:sp>
+    </p:spTree>
+  </p:cSld>
+</p:sld>
+</file>
+
+<file path=ppt/slides/slide19.xml><?xml version="1.0" encoding="utf-8"?>
+<p:sld xmlns:a="http://schemas.openxmlformats.org/drawingml/2006/main" xmlns:r="http://schemas.openxmlformats.org/officeDocument/2006/relationships" xmlns:p="http://schemas.openxmlformats.org/presentationml/2006/main">
+  <p:cSld>
+    <p:spTree>
+      <p:nvGrpSpPr>
+        <p:cNvPr id="1" name=""/>
+        <p:cNvGrpSpPr/>
+        <p:nvPr/>
+      </p:nvGrpSpPr>
+      <p:grpSpPr>
+        <a:xfrm>
+          <a:off x="0" y="0"/>
+          <a:ext cx="0" cy="0"/>
+          <a:chOff x="0" y="0"/>
+          <a:chExt cx="0" cy="0"/>
+        </a:xfrm>
+      </p:grpSpPr>
+      <p:graphicFrame>
+        <p:nvGraphicFramePr>
+          <p:cNvPr id="6" name="Content Placeholder 5"/>
+          <p:cNvGraphicFramePr>
+            <a:graphicFrameLocks noGrp="1"/>
+          </p:cNvGraphicFramePr>
+          <p:nvPr>
+            <p:ph idx="1"/>
+          </p:nvPr>
+        </p:nvGraphicFramePr>
+        <p:xfrm>
+          <a:off x="457200" y="1193800"/>
+          <a:ext cx="8229600" cy="3390900"/>
+        </p:xfrm>
+        <a:graphic>
+          <a:graphicData uri="http://schemas.openxmlformats.org/drawingml/2006/table">
+            <a:tbl>
+              <a:tblPr firstRow="1" bandRow="1">
+                <a:tableStyleId>{5C22544A-7EE6-4342-B048-85BDC9FD1C3A}</a:tableStyleId>
+              </a:tblPr>
+              <a:tblGrid>
+                <a:gridCol w="2933700"/>
+                <a:gridCol w="2552700"/>
+                <a:gridCol w="2743200"/>
+              </a:tblGrid>
+              <a:tr h="0">
+                <a:tc>
+                  <a:txBody>
+                    <a:bodyPr/>
+                    <a:lstStyle/>
+                    <a:p>
+                      <a:pPr lvl="0" indent="0" marL="0">
+                        <a:buNone/>
+                      </a:pPr>
+                      <a:r>
+                        <a:rPr/>
+                        <a:t>letter.grade</a:t>
+                      </a:r>
+                    </a:p>
+                  </a:txBody>
+                  <a:tcPr/>
+                </a:tc>
+                <a:tc>
+                  <a:txBody>
+                    <a:bodyPr/>
+                    <a:lstStyle/>
+                    <a:p>
+                      <a:pPr lvl="0" indent="0" marL="0">
+                        <a:buNone/>
+                      </a:pPr>
+                      <a:r>
+                        <a:rPr/>
+                        <a:t>percentage</a:t>
+                      </a:r>
+                    </a:p>
+                  </a:txBody>
+                  <a:tcPr/>
+                </a:tc>
+                <a:tc>
+                  <a:txBody>
+                    <a:bodyPr/>
+                    <a:lstStyle/>
+                    <a:p>
+                      <a:pPr lvl="0" indent="0" marL="0">
+                        <a:buNone/>
+                      </a:pPr>
+                      <a:r>
+                        <a:rPr/>
+                        <a:t>grade.point</a:t>
+                      </a:r>
+                    </a:p>
+                  </a:txBody>
+                  <a:tcPr/>
+                </a:tc>
+              </a:tr>
+              <a:tr h="0">
+                <a:tc>
+                  <a:txBody>
+                    <a:bodyPr/>
+                    <a:lstStyle/>
+                    <a:p>
+                      <a:pPr lvl="0" indent="0" marL="0">
+                        <a:buNone/>
+                      </a:pPr>
+                      <a:r>
+                        <a:rPr/>
+                        <a:t>A+</a:t>
+                      </a:r>
+                    </a:p>
+                  </a:txBody>
+                </a:tc>
+                <a:tc>
+                  <a:txBody>
+                    <a:bodyPr/>
+                    <a:lstStyle/>
+                    <a:p>
+                      <a:pPr lvl="0" indent="0" marL="0">
+                        <a:buNone/>
+                      </a:pPr>
+                      <a:r>
+                        <a:rPr/>
+                        <a:t>90-100</a:t>
+                      </a:r>
+                    </a:p>
+                  </a:txBody>
+                </a:tc>
+                <a:tc>
+                  <a:txBody>
+                    <a:bodyPr/>
+                    <a:lstStyle/>
+                    <a:p>
+                      <a:pPr lvl="0" indent="0" marL="0">
+                        <a:buNone/>
+                      </a:pPr>
+                      <a:r>
+                        <a:rPr/>
+                        <a:t>4.3</a:t>
+                      </a:r>
+                    </a:p>
+                  </a:txBody>
+                </a:tc>
+              </a:tr>
+              <a:tr h="0">
+                <a:tc>
+                  <a:txBody>
+                    <a:bodyPr/>
+                    <a:lstStyle/>
+                    <a:p>
+                      <a:pPr lvl="0" indent="0" marL="0">
+                        <a:buNone/>
+                      </a:pPr>
+                      <a:r>
+                        <a:rPr/>
+                        <a:t>A</a:t>
+                      </a:r>
+                    </a:p>
+                  </a:txBody>
+                </a:tc>
+                <a:tc>
+                  <a:txBody>
+                    <a:bodyPr/>
+                    <a:lstStyle/>
+                    <a:p>
+                      <a:pPr lvl="0" indent="0" marL="0">
+                        <a:buNone/>
+                      </a:pPr>
+                      <a:r>
+                        <a:rPr/>
+                        <a:t>85-89</a:t>
+                      </a:r>
+                    </a:p>
+                  </a:txBody>
+                </a:tc>
+                <a:tc>
+                  <a:txBody>
+                    <a:bodyPr/>
+                    <a:lstStyle/>
+                    <a:p>
+                      <a:pPr lvl="0" indent="0" marL="0">
+                        <a:buNone/>
+                      </a:pPr>
+                      <a:r>
+                        <a:rPr/>
+                        <a:t>4.0</a:t>
+                      </a:r>
+                    </a:p>
+                  </a:txBody>
+                </a:tc>
+              </a:tr>
+              <a:tr h="0">
+                <a:tc>
+                  <a:txBody>
+                    <a:bodyPr/>
+                    <a:lstStyle/>
+                    <a:p>
+                      <a:pPr lvl="0" indent="0" marL="0">
+                        <a:buNone/>
+                      </a:pPr>
+                      <a:r>
+                        <a:rPr/>
+                        <a:t>A-</a:t>
+                      </a:r>
+                    </a:p>
+                  </a:txBody>
+                </a:tc>
+                <a:tc>
+                  <a:txBody>
+                    <a:bodyPr/>
+                    <a:lstStyle/>
+                    <a:p>
+                      <a:pPr lvl="0" indent="0" marL="0">
+                        <a:buNone/>
+                      </a:pPr>
+                      <a:r>
+                        <a:rPr/>
+                        <a:t>80-84</a:t>
+                      </a:r>
+                    </a:p>
+                  </a:txBody>
+                </a:tc>
+                <a:tc>
+                  <a:txBody>
+                    <a:bodyPr/>
+                    <a:lstStyle/>
+                    <a:p>
+                      <a:pPr lvl="0" indent="0" marL="0">
+                        <a:buNone/>
+                      </a:pPr>
+                      <a:r>
+                        <a:rPr/>
+                        <a:t>3.7</a:t>
+                      </a:r>
+                    </a:p>
+                  </a:txBody>
+                </a:tc>
+              </a:tr>
+              <a:tr h="0">
+                <a:tc>
+                  <a:txBody>
+                    <a:bodyPr/>
+                    <a:lstStyle/>
+                    <a:p>
+                      <a:pPr lvl="0" indent="0" marL="0">
+                        <a:buNone/>
+                      </a:pPr>
+                      <a:r>
+                        <a:rPr/>
+                        <a:t>B+</a:t>
+                      </a:r>
+                    </a:p>
+                  </a:txBody>
+                </a:tc>
+                <a:tc>
+                  <a:txBody>
+                    <a:bodyPr/>
+                    <a:lstStyle/>
+                    <a:p>
+                      <a:pPr lvl="0" indent="0" marL="0">
+                        <a:buNone/>
+                      </a:pPr>
+                      <a:r>
+                        <a:rPr/>
+                        <a:t>77-79</a:t>
+                      </a:r>
+                    </a:p>
+                  </a:txBody>
+                </a:tc>
+                <a:tc>
+                  <a:txBody>
+                    <a:bodyPr/>
+                    <a:lstStyle/>
+                    <a:p>
+                      <a:pPr lvl="0" indent="0" marL="0">
+                        <a:buNone/>
+                      </a:pPr>
+                      <a:r>
+                        <a:rPr/>
+                        <a:t>3.3</a:t>
+                      </a:r>
+                    </a:p>
+                  </a:txBody>
+                </a:tc>
+              </a:tr>
+              <a:tr h="0">
+                <a:tc>
+                  <a:txBody>
+                    <a:bodyPr/>
+                    <a:lstStyle/>
+                    <a:p>
+                      <a:pPr lvl="0" indent="0" marL="0">
+                        <a:buNone/>
+                      </a:pPr>
+                      <a:r>
+                        <a:rPr/>
+                        <a:t>B</a:t>
+                      </a:r>
+                    </a:p>
+                  </a:txBody>
+                </a:tc>
+                <a:tc>
+                  <a:txBody>
+                    <a:bodyPr/>
+                    <a:lstStyle/>
+                    <a:p>
+                      <a:pPr lvl="0" indent="0" marL="0">
+                        <a:buNone/>
+                      </a:pPr>
+                      <a:r>
+                        <a:rPr/>
+                        <a:t>73-76</a:t>
+                      </a:r>
+                    </a:p>
+                  </a:txBody>
+                </a:tc>
+                <a:tc>
+                  <a:txBody>
+                    <a:bodyPr/>
+                    <a:lstStyle/>
+                    <a:p>
+                      <a:pPr lvl="0" indent="0" marL="0">
+                        <a:buNone/>
+                      </a:pPr>
+                      <a:r>
+                        <a:rPr/>
+                        <a:t>3.0</a:t>
+                      </a:r>
+                    </a:p>
+                  </a:txBody>
+                </a:tc>
+              </a:tr>
+              <a:tr h="0">
+                <a:tc>
+                  <a:txBody>
+                    <a:bodyPr/>
+                    <a:lstStyle/>
+                    <a:p>
+                      <a:pPr lvl="0" indent="0" marL="0">
+                        <a:buNone/>
+                      </a:pPr>
+                      <a:r>
+                        <a:rPr/>
+                        <a:t>B-</a:t>
+                      </a:r>
+                    </a:p>
+                  </a:txBody>
+                </a:tc>
+                <a:tc>
+                  <a:txBody>
+                    <a:bodyPr/>
+                    <a:lstStyle/>
+                    <a:p>
+                      <a:pPr lvl="0" indent="0" marL="0">
+                        <a:buNone/>
+                      </a:pPr>
+                      <a:r>
+                        <a:rPr/>
+                        <a:t>70-72</a:t>
+                      </a:r>
+                    </a:p>
+                  </a:txBody>
+                </a:tc>
+                <a:tc>
+                  <a:txBody>
+                    <a:bodyPr/>
+                    <a:lstStyle/>
+                    <a:p>
+                      <a:pPr lvl="0" indent="0" marL="0">
+                        <a:buNone/>
+                      </a:pPr>
+                      <a:r>
+                        <a:rPr/>
+                        <a:t>2.7</a:t>
+                      </a:r>
+                    </a:p>
+                  </a:txBody>
+                </a:tc>
+              </a:tr>
+              <a:tr h="0">
+                <a:tc>
+                  <a:txBody>
+                    <a:bodyPr/>
+                    <a:lstStyle/>
+                    <a:p>
+                      <a:pPr lvl="0" indent="0" marL="0">
+                        <a:buNone/>
+                      </a:pPr>
+                      <a:r>
+                        <a:rPr/>
+                        <a:t>C+</a:t>
+                      </a:r>
+                    </a:p>
+                  </a:txBody>
+                </a:tc>
+                <a:tc>
+                  <a:txBody>
+                    <a:bodyPr/>
+                    <a:lstStyle/>
+                    <a:p>
+                      <a:pPr lvl="0" indent="0" marL="0">
+                        <a:buNone/>
+                      </a:pPr>
+                      <a:r>
+                        <a:rPr/>
+                        <a:t>67-69</a:t>
+                      </a:r>
+                    </a:p>
+                  </a:txBody>
+                </a:tc>
+                <a:tc>
+                  <a:txBody>
+                    <a:bodyPr/>
+                    <a:lstStyle/>
+                    <a:p>
+                      <a:pPr lvl="0" indent="0" marL="0">
+                        <a:buNone/>
+                      </a:pPr>
+                      <a:r>
+                        <a:rPr/>
+                        <a:t>2.3</a:t>
+                      </a:r>
+                    </a:p>
+                  </a:txBody>
+                </a:tc>
+              </a:tr>
+              <a:tr h="0">
+                <a:tc>
+                  <a:txBody>
+                    <a:bodyPr/>
+                    <a:lstStyle/>
+                    <a:p>
+                      <a:pPr lvl="0" indent="0" marL="0">
+                        <a:buNone/>
+                      </a:pPr>
+                      <a:r>
+                        <a:rPr/>
+                        <a:t>C</a:t>
+                      </a:r>
+                    </a:p>
+                  </a:txBody>
+                </a:tc>
+                <a:tc>
+                  <a:txBody>
+                    <a:bodyPr/>
+                    <a:lstStyle/>
+                    <a:p>
+                      <a:pPr lvl="0" indent="0" marL="0">
+                        <a:buNone/>
+                      </a:pPr>
+                      <a:r>
+                        <a:rPr/>
+                        <a:t>63-66</a:t>
+                      </a:r>
+                    </a:p>
+                  </a:txBody>
+                </a:tc>
+                <a:tc>
+                  <a:txBody>
+                    <a:bodyPr/>
+                    <a:lstStyle/>
+                    <a:p>
+                      <a:pPr lvl="0" indent="0" marL="0">
+                        <a:buNone/>
+                      </a:pPr>
+                      <a:r>
+                        <a:rPr/>
+                        <a:t>2.0</a:t>
+                      </a:r>
+                    </a:p>
+                  </a:txBody>
+                </a:tc>
+              </a:tr>
+              <a:tr h="0">
+                <a:tc>
+                  <a:txBody>
+                    <a:bodyPr/>
+                    <a:lstStyle/>
+                    <a:p>
+                      <a:pPr lvl="0" indent="0" marL="0">
+                        <a:buNone/>
+                      </a:pPr>
+                      <a:r>
+                        <a:rPr/>
+                        <a:t>C-</a:t>
+                      </a:r>
+                    </a:p>
+                  </a:txBody>
+                </a:tc>
+                <a:tc>
+                  <a:txBody>
+                    <a:bodyPr/>
+                    <a:lstStyle/>
+                    <a:p>
+                      <a:pPr lvl="0" indent="0" marL="0">
+                        <a:buNone/>
+                      </a:pPr>
+                      <a:r>
+                        <a:rPr/>
+                        <a:t>60-62</a:t>
+                      </a:r>
+                    </a:p>
+                  </a:txBody>
+                </a:tc>
+                <a:tc>
+                  <a:txBody>
+                    <a:bodyPr/>
+                    <a:lstStyle/>
+                    <a:p>
+                      <a:pPr lvl="0" indent="0" marL="0">
+                        <a:buNone/>
+                      </a:pPr>
+                      <a:r>
+                        <a:rPr/>
+                        <a:t>1.7</a:t>
+                      </a:r>
+                    </a:p>
+                  </a:txBody>
+                </a:tc>
+              </a:tr>
+              <a:tr h="0">
+                <a:tc>
+                  <a:txBody>
+                    <a:bodyPr/>
+                    <a:lstStyle/>
+                    <a:p>
+                      <a:pPr lvl="0" indent="0" marL="0">
+                        <a:buNone/>
+                      </a:pPr>
+                      <a:r>
+                        <a:rPr/>
+                        <a:t>D+</a:t>
+                      </a:r>
+                    </a:p>
+                  </a:txBody>
+                </a:tc>
+                <a:tc>
+                  <a:txBody>
+                    <a:bodyPr/>
+                    <a:lstStyle/>
+                    <a:p>
+                      <a:pPr lvl="0" indent="0" marL="0">
+                        <a:buNone/>
+                      </a:pPr>
+                      <a:r>
+                        <a:rPr/>
+                        <a:t>57-59</a:t>
+                      </a:r>
+                    </a:p>
+                  </a:txBody>
+                </a:tc>
+                <a:tc>
+                  <a:txBody>
+                    <a:bodyPr/>
+                    <a:lstStyle/>
+                    <a:p>
+                      <a:pPr lvl="0" indent="0" marL="0">
+                        <a:buNone/>
+                      </a:pPr>
+                      <a:r>
+                        <a:rPr/>
+                        <a:t>1.3</a:t>
+                      </a:r>
+                    </a:p>
+                  </a:txBody>
+                </a:tc>
+              </a:tr>
+              <a:tr h="0">
+                <a:tc>
+                  <a:txBody>
+                    <a:bodyPr/>
+                    <a:lstStyle/>
+                    <a:p>
+                      <a:pPr lvl="0" indent="0" marL="0">
+                        <a:buNone/>
+                      </a:pPr>
+                      <a:r>
+                        <a:rPr/>
+                        <a:t>D</a:t>
+                      </a:r>
+                    </a:p>
+                  </a:txBody>
+                </a:tc>
+                <a:tc>
+                  <a:txBody>
+                    <a:bodyPr/>
+                    <a:lstStyle/>
+                    <a:p>
+                      <a:pPr lvl="0" indent="0" marL="0">
+                        <a:buNone/>
+                      </a:pPr>
+                      <a:r>
+                        <a:rPr/>
+                        <a:t>53-56</a:t>
+                      </a:r>
+                    </a:p>
+                  </a:txBody>
+                </a:tc>
+                <a:tc>
+                  <a:txBody>
+                    <a:bodyPr/>
+                    <a:lstStyle/>
+                    <a:p>
+                      <a:pPr lvl="0" indent="0" marL="0">
+                        <a:buNone/>
+                      </a:pPr>
+                      <a:r>
+                        <a:rPr/>
+                        <a:t>1.0</a:t>
+                      </a:r>
+                    </a:p>
+                  </a:txBody>
+                </a:tc>
+              </a:tr>
+              <a:tr h="0">
+                <a:tc>
+                  <a:txBody>
+                    <a:bodyPr/>
+                    <a:lstStyle/>
+                    <a:p>
+                      <a:pPr lvl="0" indent="0" marL="0">
+                        <a:buNone/>
+                      </a:pPr>
+                      <a:r>
+                        <a:rPr/>
+                        <a:t>D-</a:t>
+                      </a:r>
+                    </a:p>
+                  </a:txBody>
+                </a:tc>
+                <a:tc>
+                  <a:txBody>
+                    <a:bodyPr/>
+                    <a:lstStyle/>
+                    <a:p>
+                      <a:pPr lvl="0" indent="0" marL="0">
+                        <a:buNone/>
+                      </a:pPr>
+                      <a:r>
+                        <a:rPr/>
+                        <a:t>50-52</a:t>
+                      </a:r>
+                    </a:p>
+                  </a:txBody>
+                </a:tc>
+                <a:tc>
+                  <a:txBody>
+                    <a:bodyPr/>
+                    <a:lstStyle/>
+                    <a:p>
+                      <a:pPr lvl="0" indent="0" marL="0">
+                        <a:buNone/>
+                      </a:pPr>
+                      <a:r>
+                        <a:rPr/>
+                        <a:t>0.7</a:t>
+                      </a:r>
+                    </a:p>
+                  </a:txBody>
+                </a:tc>
+              </a:tr>
+              <a:tr h="0">
+                <a:tc>
+                  <a:txBody>
+                    <a:bodyPr/>
+                    <a:lstStyle/>
+                    <a:p>
+                      <a:pPr lvl="0" indent="0" marL="0">
+                        <a:buNone/>
+                      </a:pPr>
+                      <a:r>
+                        <a:rPr/>
+                        <a:t>F</a:t>
+                      </a:r>
+                    </a:p>
+                  </a:txBody>
+                </a:tc>
+                <a:tc>
+                  <a:txBody>
+                    <a:bodyPr/>
+                    <a:lstStyle/>
+                    <a:p>
+                      <a:pPr lvl="0" indent="0" marL="0">
+                        <a:buNone/>
+                      </a:pPr>
+                      <a:r>
+                        <a:rPr/>
+                        <a:t>Below 50</a:t>
+                      </a:r>
+                    </a:p>
+                  </a:txBody>
+                </a:tc>
+                <a:tc>
+                  <a:txBody>
+                    <a:bodyPr/>
+                    <a:lstStyle/>
+                    <a:p>
+                      <a:pPr lvl="0" indent="0" marL="0">
+                        <a:buNone/>
+                      </a:pPr>
+                      <a:r>
+                        <a:rPr/>
+                        <a:t>0.0</a:t>
+                      </a:r>
+                    </a:p>
+                  </a:txBody>
+                </a:tc>
+              </a:tr>
+            </a:tbl>
+          </a:graphicData>
+        </a:graphic>
+      </p:graphicFrame>
     </p:spTree>
   </p:cSld>
 </p:sld>
@@ -3368,6 +5206,701 @@
             <a:r>
               <a:rPr/>
               <a:t>What is Assessment?</a:t>
+            </a:r>
+          </a:p>
+        </p:txBody>
+      </p:sp>
+    </p:spTree>
+  </p:cSld>
+</p:sld>
+</file>
+
+<file path=ppt/slides/slide20.xml><?xml version="1.0" encoding="utf-8"?>
+<p:sld xmlns:a="http://schemas.openxmlformats.org/drawingml/2006/main" xmlns:r="http://schemas.openxmlformats.org/officeDocument/2006/relationships" xmlns:p="http://schemas.openxmlformats.org/presentationml/2006/main">
+  <p:cSld>
+    <p:spTree>
+      <p:nvGrpSpPr>
+        <p:cNvPr id="1" name=""/>
+        <p:cNvGrpSpPr/>
+        <p:nvPr/>
+      </p:nvGrpSpPr>
+      <p:grpSpPr>
+        <a:xfrm>
+          <a:off x="0" y="0"/>
+          <a:ext cx="0" cy="0"/>
+          <a:chOff x="0" y="0"/>
+          <a:chExt cx="0" cy="0"/>
+        </a:xfrm>
+      </p:grpSpPr>
+      <p:sp>
+        <p:nvSpPr>
+          <p:cNvPr id="4" name="Text Placeholder 3"/>
+          <p:cNvSpPr>
+            <a:spLocks noGrp="1"/>
+          </p:cNvSpPr>
+          <p:nvPr>
+            <p:ph idx="2" sz="half" type="body"/>
+          </p:nvPr>
+        </p:nvSpPr>
+        <p:spPr/>
+        <p:txBody>
+          <a:bodyPr/>
+          <a:lstStyle/>
+          <a:p>
+            <a:pPr lvl="0" indent="0" marL="0">
+              <a:buNone/>
+            </a:pPr>
+          </a:p>
+        </p:txBody>
+      </p:sp>
+      <p:pic>
+        <p:nvPicPr>
+          <p:cNvPr descr="index_files/figure-pptx/mermaid-figure-2.png" id="0" name="Picture 1"/>
+          <p:cNvPicPr>
+            <a:picLocks noGrp="1" noChangeAspect="1"/>
+          </p:cNvPicPr>
+          <p:nvPr/>
+        </p:nvPicPr>
+        <p:blipFill>
+          <a:blip r:embed="rId2"/>
+          <a:stretch>
+            <a:fillRect/>
+          </a:stretch>
+        </p:blipFill>
+        <p:spPr bwMode="auto">
+          <a:xfrm>
+            <a:off x="3568700" y="1143000"/>
+            <a:ext cx="5105400" cy="2514600"/>
+          </a:xfrm>
+          <a:prstGeom prst="rect">
+            <a:avLst/>
+          </a:prstGeom>
+          <a:noFill/>
+          <a:ln w="9525">
+            <a:noFill/>
+            <a:headEnd/>
+            <a:tailEnd/>
+          </a:ln>
+        </p:spPr>
+      </p:pic>
+    </p:spTree>
+  </p:cSld>
+</p:sld>
+</file>
+
+<file path=ppt/slides/slide21.xml><?xml version="1.0" encoding="utf-8"?>
+<p:sld xmlns:a="http://schemas.openxmlformats.org/drawingml/2006/main" xmlns:r="http://schemas.openxmlformats.org/officeDocument/2006/relationships" xmlns:p="http://schemas.openxmlformats.org/presentationml/2006/main">
+  <p:cSld>
+    <p:spTree>
+      <p:nvGrpSpPr>
+        <p:cNvPr id="1" name=""/>
+        <p:cNvGrpSpPr/>
+        <p:nvPr/>
+      </p:nvGrpSpPr>
+      <p:grpSpPr>
+        <a:xfrm>
+          <a:off x="0" y="0"/>
+          <a:ext cx="0" cy="0"/>
+          <a:chOff x="0" y="0"/>
+          <a:chExt cx="0" cy="0"/>
+        </a:xfrm>
+      </p:grpSpPr>
+      <p:graphicFrame>
+        <p:nvGraphicFramePr>
+          <p:cNvPr id="6" name="Content Placeholder 5"/>
+          <p:cNvGraphicFramePr>
+            <a:graphicFrameLocks noGrp="1"/>
+          </p:cNvGraphicFramePr>
+          <p:nvPr>
+            <p:ph idx="1"/>
+          </p:nvPr>
+        </p:nvGraphicFramePr>
+        <p:xfrm>
+          <a:off x="457200" y="1193800"/>
+          <a:ext cx="8229600" cy="3390900"/>
+        </p:xfrm>
+        <a:graphic>
+          <a:graphicData uri="http://schemas.openxmlformats.org/drawingml/2006/table">
+            <a:tbl>
+              <a:tblPr firstRow="1" bandRow="1">
+                <a:tableStyleId>{5C22544A-7EE6-4342-B048-85BDC9FD1C3A}</a:tableStyleId>
+              </a:tblPr>
+              <a:tblGrid>
+                <a:gridCol w="2197100"/>
+                <a:gridCol w="1282700"/>
+                <a:gridCol w="2565400"/>
+                <a:gridCol w="2197100"/>
+              </a:tblGrid>
+              <a:tr h="0">
+                <a:tc>
+                  <a:txBody>
+                    <a:bodyPr/>
+                    <a:lstStyle/>
+                    <a:p>
+                      <a:pPr lvl="0" indent="0" marL="0">
+                        <a:buNone/>
+                      </a:pPr>
+                      <a:r>
+                        <a:rPr/>
+                        <a:t>Data_type</a:t>
+                      </a:r>
+                    </a:p>
+                  </a:txBody>
+                  <a:tcPr/>
+                </a:tc>
+                <a:tc>
+                  <a:txBody>
+                    <a:bodyPr/>
+                    <a:lstStyle/>
+                    <a:p>
+                      <a:pPr lvl="0" indent="0" marL="0">
+                        <a:buNone/>
+                      </a:pPr>
+                      <a:r>
+                        <a:rPr/>
+                        <a:t>Mean</a:t>
+                      </a:r>
+                    </a:p>
+                  </a:txBody>
+                  <a:tcPr/>
+                </a:tc>
+                <a:tc>
+                  <a:txBody>
+                    <a:bodyPr/>
+                    <a:lstStyle/>
+                    <a:p>
+                      <a:pPr lvl="0" indent="0" marL="0">
+                        <a:buNone/>
+                      </a:pPr>
+                      <a:r>
+                        <a:rPr/>
+                        <a:t>Equidistant</a:t>
+                      </a:r>
+                    </a:p>
+                  </a:txBody>
+                  <a:tcPr/>
+                </a:tc>
+                <a:tc>
+                  <a:txBody>
+                    <a:bodyPr/>
+                    <a:lstStyle/>
+                    <a:p>
+                      <a:pPr lvl="0" indent="0" marL="0">
+                        <a:buNone/>
+                      </a:pPr>
+                      <a:r>
+                        <a:rPr/>
+                        <a:t>True.Zero</a:t>
+                      </a:r>
+                    </a:p>
+                  </a:txBody>
+                  <a:tcPr/>
+                </a:tc>
+              </a:tr>
+              <a:tr h="0">
+                <a:tc>
+                  <a:txBody>
+                    <a:bodyPr/>
+                    <a:lstStyle/>
+                    <a:p>
+                      <a:pPr lvl="0" indent="0" marL="0">
+                        <a:buNone/>
+                      </a:pPr>
+                      <a:r>
+                        <a:rPr/>
+                        <a:t>Nominal</a:t>
+                      </a:r>
+                    </a:p>
+                  </a:txBody>
+                </a:tc>
+                <a:tc>
+                  <a:txBody>
+                    <a:bodyPr/>
+                    <a:lstStyle/>
+                    <a:p>
+                      <a:pPr lvl="0" indent="0" marL="0">
+                        <a:buNone/>
+                      </a:pPr>
+                      <a:r>
+                        <a:rPr/>
+                        <a:t>❌ | ❌ | ❌</a:t>
+                      </a:r>
+                    </a:p>
+                  </a:txBody>
+                </a:tc>
+                <a:tc>
+                  <a:txBody>
+                    <a:bodyPr/>
+                    <a:lstStyle/>
+                    <a:p>
+                      <a:endParaRPr/>
+                    </a:p>
+                  </a:txBody>
+                </a:tc>
+                <a:tc>
+                  <a:txBody>
+                    <a:bodyPr/>
+                    <a:lstStyle/>
+                    <a:p>
+                      <a:endParaRPr/>
+                    </a:p>
+                  </a:txBody>
+                </a:tc>
+              </a:tr>
+              <a:tr h="0">
+                <a:tc>
+                  <a:txBody>
+                    <a:bodyPr/>
+                    <a:lstStyle/>
+                    <a:p>
+                      <a:pPr lvl="0" indent="0" marL="0">
+                        <a:buNone/>
+                      </a:pPr>
+                      <a:r>
+                        <a:rPr/>
+                        <a:t>Ordinal</a:t>
+                      </a:r>
+                    </a:p>
+                  </a:txBody>
+                </a:tc>
+                <a:tc>
+                  <a:txBody>
+                    <a:bodyPr/>
+                    <a:lstStyle/>
+                    <a:p>
+                      <a:pPr lvl="0" indent="0" marL="0">
+                        <a:buNone/>
+                      </a:pPr>
+                      <a:r>
+                        <a:rPr/>
+                        <a:t>❌ | ❌ | ❌</a:t>
+                      </a:r>
+                    </a:p>
+                  </a:txBody>
+                </a:tc>
+                <a:tc>
+                  <a:txBody>
+                    <a:bodyPr/>
+                    <a:lstStyle/>
+                    <a:p>
+                      <a:endParaRPr/>
+                    </a:p>
+                  </a:txBody>
+                </a:tc>
+                <a:tc>
+                  <a:txBody>
+                    <a:bodyPr/>
+                    <a:lstStyle/>
+                    <a:p>
+                      <a:endParaRPr/>
+                    </a:p>
+                  </a:txBody>
+                </a:tc>
+              </a:tr>
+              <a:tr h="0">
+                <a:tc>
+                  <a:txBody>
+                    <a:bodyPr/>
+                    <a:lstStyle/>
+                    <a:p>
+                      <a:pPr lvl="0" indent="0" marL="0">
+                        <a:buNone/>
+                      </a:pPr>
+                      <a:r>
+                        <a:rPr/>
+                        <a:t>Interval</a:t>
+                      </a:r>
+                    </a:p>
+                  </a:txBody>
+                </a:tc>
+                <a:tc>
+                  <a:txBody>
+                    <a:bodyPr/>
+                    <a:lstStyle/>
+                    <a:p>
+                      <a:pPr lvl="0" indent="0" marL="0">
+                        <a:buNone/>
+                      </a:pPr>
+                      <a:r>
+                        <a:rPr/>
+                        <a:t>✅ | ✅ | ❌</a:t>
+                      </a:r>
+                    </a:p>
+                  </a:txBody>
+                </a:tc>
+                <a:tc>
+                  <a:txBody>
+                    <a:bodyPr/>
+                    <a:lstStyle/>
+                    <a:p>
+                      <a:endParaRPr/>
+                    </a:p>
+                  </a:txBody>
+                </a:tc>
+                <a:tc>
+                  <a:txBody>
+                    <a:bodyPr/>
+                    <a:lstStyle/>
+                    <a:p>
+                      <a:endParaRPr/>
+                    </a:p>
+                  </a:txBody>
+                </a:tc>
+              </a:tr>
+              <a:tr h="0">
+                <a:tc>
+                  <a:txBody>
+                    <a:bodyPr/>
+                    <a:lstStyle/>
+                    <a:p>
+                      <a:pPr lvl="0" indent="0" marL="0">
+                        <a:buNone/>
+                      </a:pPr>
+                      <a:r>
+                        <a:rPr/>
+                        <a:t>Ratio</a:t>
+                      </a:r>
+                    </a:p>
+                  </a:txBody>
+                </a:tc>
+                <a:tc>
+                  <a:txBody>
+                    <a:bodyPr/>
+                    <a:lstStyle/>
+                    <a:p>
+                      <a:pPr lvl="0" indent="0" marL="0">
+                        <a:buNone/>
+                      </a:pPr>
+                      <a:r>
+                        <a:rPr/>
+                        <a:t>✅ | ✅ | ✅</a:t>
+                      </a:r>
+                    </a:p>
+                  </a:txBody>
+                </a:tc>
+                <a:tc>
+                  <a:txBody>
+                    <a:bodyPr/>
+                    <a:lstStyle/>
+                    <a:p>
+                      <a:endParaRPr/>
+                    </a:p>
+                  </a:txBody>
+                </a:tc>
+                <a:tc>
+                  <a:txBody>
+                    <a:bodyPr/>
+                    <a:lstStyle/>
+                    <a:p>
+                      <a:endParaRPr/>
+                    </a:p>
+                  </a:txBody>
+                </a:tc>
+              </a:tr>
+            </a:tbl>
+          </a:graphicData>
+        </a:graphic>
+      </p:graphicFrame>
+    </p:spTree>
+  </p:cSld>
+</p:sld>
+</file>
+
+<file path=ppt/slides/slide22.xml><?xml version="1.0" encoding="utf-8"?>
+<p:sld xmlns:a="http://schemas.openxmlformats.org/drawingml/2006/main" xmlns:r="http://schemas.openxmlformats.org/officeDocument/2006/relationships" xmlns:p="http://schemas.openxmlformats.org/presentationml/2006/main">
+  <p:cSld>
+    <p:spTree>
+      <p:nvGrpSpPr>
+        <p:cNvPr id="1" name=""/>
+        <p:cNvGrpSpPr/>
+        <p:nvPr/>
+      </p:nvGrpSpPr>
+      <p:grpSpPr>
+        <a:xfrm>
+          <a:off x="0" y="0"/>
+          <a:ext cx="0" cy="0"/>
+          <a:chOff x="0" y="0"/>
+          <a:chExt cx="0" cy="0"/>
+        </a:xfrm>
+      </p:grpSpPr>
+      <p:sp>
+        <p:nvSpPr>
+          <p:cNvPr id="3" name="Content Placeholder 2"/>
+          <p:cNvSpPr>
+            <a:spLocks noGrp="1"/>
+          </p:cNvSpPr>
+          <p:nvPr>
+            <p:ph idx="1"/>
+          </p:nvPr>
+        </p:nvSpPr>
+        <p:spPr/>
+        <p:txBody>
+          <a:bodyPr/>
+          <a:lstStyle/>
+          <a:p>
+            <a:pPr lvl="0" indent="0" marL="0">
+              <a:buNone/>
+            </a:pPr>
+            <a:r>
+              <a:rPr b="1"/>
+              <a:t>Nominal</a:t>
+            </a:r>
+          </a:p>
+          <a:p>
+            <a:pPr lvl="0" indent="0" marL="1270000">
+              <a:buNone/>
+            </a:pPr>
+            <a:r>
+              <a:rPr sz="2000"/>
+              <a:t>named</a:t>
+            </a:r>
+          </a:p>
+          <a:p>
+            <a:pPr lvl="0" indent="0" marL="1270000">
+              <a:buNone/>
+            </a:pPr>
+            <a:r>
+              <a:rPr sz="2000"/>
+              <a:t>counts, mode</a:t>
+            </a:r>
+          </a:p>
+          <a:p>
+            <a:pPr lvl="0" indent="0" marL="0">
+              <a:buNone/>
+            </a:pPr>
+            <a:r>
+              <a:rPr b="1"/>
+              <a:t>Ordinal</a:t>
+            </a:r>
+          </a:p>
+          <a:p>
+            <a:pPr lvl="0" indent="0" marL="1270000">
+              <a:buNone/>
+            </a:pPr>
+            <a:r>
+              <a:rPr sz="2000"/>
+              <a:t>named, ordered</a:t>
+            </a:r>
+          </a:p>
+          <a:p>
+            <a:pPr lvl="0" indent="0" marL="1270000">
+              <a:buNone/>
+            </a:pPr>
+            <a:r>
+              <a:rPr sz="2000"/>
+              <a:t>counts, mode, median</a:t>
+            </a:r>
+          </a:p>
+          <a:p>
+            <a:pPr lvl="0" indent="0" marL="0">
+              <a:buNone/>
+            </a:pPr>
+            <a:r>
+              <a:rPr b="1"/>
+              <a:t>Interval</a:t>
+            </a:r>
+          </a:p>
+          <a:p>
+            <a:pPr lvl="0" indent="0" marL="1270000">
+              <a:buNone/>
+            </a:pPr>
+            <a:r>
+              <a:rPr sz="2000"/>
+              <a:t>named, ordered, equidistant</a:t>
+            </a:r>
+          </a:p>
+          <a:p>
+            <a:pPr lvl="0" indent="0" marL="1270000">
+              <a:buNone/>
+            </a:pPr>
+            <a:r>
+              <a:rPr sz="2000"/>
+              <a:t>counts, mean, median, mode, standard deviation</a:t>
+            </a:r>
+          </a:p>
+          <a:p>
+            <a:pPr lvl="0" indent="0" marL="0">
+              <a:buNone/>
+            </a:pPr>
+            <a:r>
+              <a:rPr b="1"/>
+              <a:t>Ratio</a:t>
+            </a:r>
+          </a:p>
+          <a:p>
+            <a:pPr lvl="0" indent="0" marL="1270000">
+              <a:buNone/>
+            </a:pPr>
+            <a:r>
+              <a:rPr sz="2000"/>
+              <a:t>named, ordered, equidistant, true zero</a:t>
+            </a:r>
+          </a:p>
+        </p:txBody>
+      </p:sp>
+    </p:spTree>
+  </p:cSld>
+</p:sld>
+</file>
+
+<file path=ppt/slides/slide23.xml><?xml version="1.0" encoding="utf-8"?>
+<p:sld xmlns:a="http://schemas.openxmlformats.org/drawingml/2006/main" xmlns:r="http://schemas.openxmlformats.org/officeDocument/2006/relationships" xmlns:p="http://schemas.openxmlformats.org/presentationml/2006/main">
+  <p:cSld>
+    <p:spTree>
+      <p:nvGrpSpPr>
+        <p:cNvPr id="1" name=""/>
+        <p:cNvGrpSpPr/>
+        <p:nvPr/>
+      </p:nvGrpSpPr>
+      <p:grpSpPr>
+        <a:xfrm>
+          <a:off x="0" y="0"/>
+          <a:ext cx="0" cy="0"/>
+          <a:chOff x="0" y="0"/>
+          <a:chExt cx="0" cy="0"/>
+        </a:xfrm>
+      </p:grpSpPr>
+      <p:sp>
+        <p:nvSpPr>
+          <p:cNvPr id="3" name="Content Placeholder 2"/>
+          <p:cNvSpPr>
+            <a:spLocks noGrp="1"/>
+          </p:cNvSpPr>
+          <p:nvPr>
+            <p:ph idx="1"/>
+          </p:nvPr>
+        </p:nvSpPr>
+        <p:spPr/>
+        <p:txBody>
+          <a:bodyPr/>
+          <a:lstStyle/>
+          <a:p>
+            <a:pPr lvl="0" indent="0" marL="1270000">
+              <a:buNone/>
+            </a:pPr>
+            <a:r>
+              <a:rPr sz="2000"/>
+              <a:t>Knowledge emerges only through invention and re-invention, through the restless, impatient, continuing, hopeful inquiry human beings pursue in the world, with the world, and with each other. (Freire, 1990, p. 72)</a:t>
+            </a:r>
+          </a:p>
+        </p:txBody>
+      </p:sp>
+    </p:spTree>
+  </p:cSld>
+</p:sld>
+</file>
+
+<file path=ppt/slides/slide24.xml><?xml version="1.0" encoding="utf-8"?>
+<p:sld xmlns:a="http://schemas.openxmlformats.org/drawingml/2006/main" xmlns:r="http://schemas.openxmlformats.org/officeDocument/2006/relationships" xmlns:p="http://schemas.openxmlformats.org/presentationml/2006/main">
+  <p:cSld>
+    <p:spTree>
+      <p:nvGrpSpPr>
+        <p:cNvPr id="1" name=""/>
+        <p:cNvGrpSpPr/>
+        <p:nvPr/>
+      </p:nvGrpSpPr>
+      <p:grpSpPr>
+        <a:xfrm>
+          <a:off x="0" y="0"/>
+          <a:ext cx="0" cy="0"/>
+          <a:chOff x="0" y="0"/>
+          <a:chExt cx="0" cy="0"/>
+        </a:xfrm>
+      </p:grpSpPr>
+      <p:sp>
+        <p:nvSpPr>
+          <p:cNvPr id="3" name="Content Placeholder 2"/>
+          <p:cNvSpPr>
+            <a:spLocks noGrp="1"/>
+          </p:cNvSpPr>
+          <p:nvPr>
+            <p:ph idx="1"/>
+          </p:nvPr>
+        </p:nvSpPr>
+        <p:spPr/>
+        <p:txBody>
+          <a:bodyPr/>
+          <a:lstStyle/>
+          <a:p>
+            <a:pPr lvl="0" indent="0" marL="0">
+              <a:buNone/>
+            </a:pPr>
+            <a:r>
+              <a:rPr>
+                <a:hlinkClick r:id="rId2"/>
+              </a:rPr>
+              <a:t>cmad.land</a:t>
+            </a:r>
+            <a:r>
+              <a:rPr/>
+              <a:t> - slides</a:t>
+            </a:r>
+          </a:p>
+        </p:txBody>
+      </p:sp>
+    </p:spTree>
+  </p:cSld>
+</p:sld>
+</file>
+
+<file path=ppt/slides/slide25.xml><?xml version="1.0" encoding="utf-8"?>
+<p:sld xmlns:a="http://schemas.openxmlformats.org/drawingml/2006/main" xmlns:r="http://schemas.openxmlformats.org/officeDocument/2006/relationships" xmlns:p="http://schemas.openxmlformats.org/presentationml/2006/main">
+  <p:cSld>
+    <p:spTree>
+      <p:nvGrpSpPr>
+        <p:cNvPr id="1" name=""/>
+        <p:cNvGrpSpPr/>
+        <p:nvPr/>
+      </p:nvGrpSpPr>
+      <p:grpSpPr>
+        <a:xfrm>
+          <a:off x="0" y="0"/>
+          <a:ext cx="0" cy="0"/>
+          <a:chOff x="0" y="0"/>
+          <a:chExt cx="0" cy="0"/>
+        </a:xfrm>
+      </p:grpSpPr>
+      <p:sp>
+        <p:nvSpPr>
+          <p:cNvPr id="3" name="Content Placeholder 2"/>
+          <p:cNvSpPr>
+            <a:spLocks noGrp="1"/>
+          </p:cNvSpPr>
+          <p:nvPr>
+            <p:ph idx="1"/>
+          </p:nvPr>
+        </p:nvSpPr>
+        <p:spPr/>
+        <p:txBody>
+          <a:bodyPr/>
+          <a:lstStyle/>
+          <a:p>
+            <a:pPr lvl="0" indent="0" marL="0">
+              <a:spcBef>
+                <a:spcPts val="3000"/>
+              </a:spcBef>
+              <a:buNone/>
+            </a:pPr>
+            <a:r>
+              <a:rPr b="1"/>
+              <a:t>References</a:t>
+            </a:r>
+          </a:p>
+          <a:p>
+            <a:pPr lvl="0" indent="0" marL="0">
+              <a:buNone/>
+            </a:pPr>
+            <a:r>
+              <a:rPr/>
+              <a:t>Freire, P. (1990). </a:t>
+            </a:r>
+            <a:r>
+              <a:rPr i="1"/>
+              <a:t>Pedagogy of the oppressed</a:t>
+            </a:r>
+            <a:r>
+              <a:rPr/>
+              <a:t>. Penguin.</a:t>
             </a:r>
           </a:p>
         </p:txBody>
@@ -3563,7 +6096,7 @@
             </a:pPr>
             <a:r>
               <a:rPr/>
-              <a:t>Assessment Identity</a:t>
+              <a:t>learning is ontological</a:t>
             </a:r>
           </a:p>
         </p:txBody>
@@ -3583,12 +6116,12 @@
           <a:bodyPr/>
           <a:lstStyle/>
           <a:p>
-            <a:pPr lvl="0" indent="0" marL="0">
+            <a:pPr lvl="0" indent="0" marL="1270000">
               <a:buNone/>
             </a:pPr>
             <a:r>
-              <a:rPr/>
-              <a:t>beliefs | feelings | knowledge | skills</a:t>
+              <a:rPr sz="2000"/>
+              <a:t>“The mission of Trinity Western University, as an arm of the Church, is to develop godly Christian leaders: positive, goal-oriented university graduates with thoroughly Christian minds; growing disciples of Jesus Christ who glorify God through fulfilling the Great Commission, serving God and people in the various marketplaces of life.”</a:t>
             </a:r>
           </a:p>
         </p:txBody>
@@ -3635,7 +6168,7 @@
             </a:pPr>
             <a:r>
               <a:rPr/>
-              <a:t>learning is ontological</a:t>
+              <a:t>teaching is ontological</a:t>
             </a:r>
           </a:p>
         </p:txBody>
@@ -3664,12 +6197,12 @@
       </p:grpSpPr>
       <p:sp>
         <p:nvSpPr>
-          <p:cNvPr id="3" name="Content Placeholder 2"/>
-          <p:cNvSpPr>
-            <a:spLocks noGrp="1"/>
-          </p:cNvSpPr>
-          <p:nvPr>
-            <p:ph idx="1"/>
+          <p:cNvPr id="2" name="Title 1"/>
+          <p:cNvSpPr>
+            <a:spLocks noGrp="1"/>
+          </p:cNvSpPr>
+          <p:nvPr>
+            <p:ph type="title"/>
           </p:nvPr>
         </p:nvSpPr>
         <p:spPr/>
@@ -3678,14 +6211,11 @@
           <a:lstStyle/>
           <a:p>
             <a:pPr lvl="0" indent="0" marL="0">
-              <a:spcBef>
-                <a:spcPts val="3000"/>
-              </a:spcBef>
               <a:buNone/>
             </a:pPr>
             <a:r>
-              <a:rPr b="1"/>
-              <a:t>Breakout</a:t>
+              <a:rPr/>
+              <a:t>assessing is ontological</a:t>
             </a:r>
           </a:p>
         </p:txBody>
@@ -3732,7 +6262,32 @@
             </a:pPr>
             <a:r>
               <a:rPr/>
-              <a:t>Discuss with your group how you would characterize your assessment identity.</a:t>
+              <a:t>Assessment Identity</a:t>
+            </a:r>
+          </a:p>
+        </p:txBody>
+      </p:sp>
+      <p:sp>
+        <p:nvSpPr>
+          <p:cNvPr id="3" name="Content Placeholder 2"/>
+          <p:cNvSpPr>
+            <a:spLocks noGrp="1"/>
+          </p:cNvSpPr>
+          <p:nvPr>
+            <p:ph idx="1"/>
+          </p:nvPr>
+        </p:nvSpPr>
+        <p:spPr/>
+        <p:txBody>
+          <a:bodyPr/>
+          <a:lstStyle/>
+          <a:p>
+            <a:pPr lvl="0" indent="0" marL="0">
+              <a:buNone/>
+            </a:pPr>
+            <a:r>
+              <a:rPr/>
+              <a:t>beliefs | feelings | knowledge | skills</a:t>
             </a:r>
           </a:p>
         </p:txBody>
@@ -3761,12 +6316,12 @@
       </p:grpSpPr>
       <p:sp>
         <p:nvSpPr>
-          <p:cNvPr id="3" name="Content Placeholder 2"/>
-          <p:cNvSpPr>
-            <a:spLocks noGrp="1"/>
-          </p:cNvSpPr>
-          <p:nvPr>
-            <p:ph idx="1"/>
+          <p:cNvPr id="2" name="Title 1"/>
+          <p:cNvSpPr>
+            <a:spLocks noGrp="1"/>
+          </p:cNvSpPr>
+          <p:nvPr>
+            <p:ph type="title"/>
           </p:nvPr>
         </p:nvSpPr>
         <p:spPr/>
@@ -3775,14 +6330,11 @@
           <a:lstStyle/>
           <a:p>
             <a:pPr lvl="0" indent="0" marL="0">
-              <a:spcBef>
-                <a:spcPts val="3000"/>
-              </a:spcBef>
               <a:buNone/>
             </a:pPr>
             <a:r>
-              <a:rPr b="1"/>
-              <a:t>Highlights?</a:t>
+              <a:rPr/>
+              <a:t>Discuss with your group how you would characterize your assessment identity as it is and how it came to be.</a:t>
             </a:r>
           </a:p>
         </p:txBody>

--- a/docs/posts/fpl-assessment/index.pptx
+++ b/docs/posts/fpl-assessment/index.pptx
@@ -5,7 +5,7 @@
     <p:sldMasterId id="2147483648" r:id="rId1"/>
   </p:sldMasterIdLst>
   <p:notesMasterIdLst>
-    <p:notesMasterId r:id="rId24"/>
+    <p:notesMasterId r:id="rId38"/>
   </p:notesMasterIdLst>
   <p:sldIdLst>
     <p:sldId id="256" r:id="rId2"/>
@@ -30,6 +30,20 @@
     <p:sldId id="275" r:id="rId21"/>
     <p:sldId id="276" r:id="rId22"/>
     <p:sldId id="277" r:id="rId23"/>
+    <p:sldId id="278" r:id="rId24"/>
+    <p:sldId id="279" r:id="rId25"/>
+    <p:sldId id="280" r:id="rId26"/>
+    <p:sldId id="281" r:id="rId27"/>
+    <p:sldId id="282" r:id="rId28"/>
+    <p:sldId id="283" r:id="rId29"/>
+    <p:sldId id="284" r:id="rId30"/>
+    <p:sldId id="285" r:id="rId31"/>
+    <p:sldId id="286" r:id="rId32"/>
+    <p:sldId id="287" r:id="rId33"/>
+    <p:sldId id="288" r:id="rId34"/>
+    <p:sldId id="289" r:id="rId35"/>
+    <p:sldId id="290" r:id="rId36"/>
+    <p:sldId id="291" r:id="rId37"/>
   </p:sldIdLst>
   <p:sldSz cx="9144000" cy="5143500" type="screen16x9"/>
   <p:notesSz cx="6858000" cy="9144000"/>
@@ -567,7 +581,7 @@
           <a:p>
             <a:fld id="{18BDFEC3-8487-43E8-A154-7C12CBC1FFF2}" type="slidenum">
               <a:rPr lang="en-US"/>
-              <a:t>10</a:t>
+              <a:t>11</a:t>
             </a:fld>
             <a:endParaRPr lang="en-US"/>
           </a:p>
@@ -627,7 +641,7 @@
             </a:pPr>
             <a:r>
               <a:rPr/>
-              <a:t>What method of reporting assignment grades to learners best fits your current practice? - percentage scale (e.g., 74%) - raw score (e.g., 19/26) - letter grade (e.g., A+, A, A- … C-, D, F) - proficiency scale (e.g. Excellent, Meets Expectations, Revision Needed, Not Assessable) - a combination of the above - other (please specify)</a:t>
+              <a:t>Poll: What method of reporting assignment grades to learners best fits your current practice? - percentage scale (e.g., 74%) - raw score (e.g., 19/26) - letter grade (e.g., A+, A, A- … C-, D, F) - proficiency scale (e.g. Excellent, Meets Expectations, Revision Needed, Not Assessable) - a combination of the above - other (please specify)</a:t>
             </a:r>
           </a:p>
         </p:txBody>
@@ -650,6 +664,170 @@
             <a:fld id="{18BDFEC3-8487-43E8-A154-7C12CBC1FFF2}" type="slidenum">
               <a:rPr lang="en-US"/>
               <a:t>12</a:t>
+            </a:fld>
+            <a:endParaRPr lang="en-US"/>
+          </a:p>
+        </p:txBody>
+      </p:sp>
+    </p:spTree>
+  </p:cSld>
+</p:notes>
+</file>
+
+<file path=ppt/notesSlides/notesSlide3.xml><?xml version="1.0" encoding="utf-8"?>
+<p:notes xmlns:a="http://schemas.openxmlformats.org/drawingml/2006/main" xmlns:r="http://schemas.openxmlformats.org/officeDocument/2006/relationships" xmlns:p="http://schemas.openxmlformats.org/presentationml/2006/main">
+  <p:cSld>
+    <p:spTree>
+      <p:nvGrpSpPr>
+        <p:cNvPr id="1" name=""/>
+        <p:cNvGrpSpPr/>
+        <p:nvPr/>
+      </p:nvGrpSpPr>
+      <p:grpSpPr>
+        <a:xfrm>
+          <a:off x="0" y="0"/>
+          <a:ext cx="0" cy="0"/>
+          <a:chOff x="0" y="0"/>
+          <a:chExt cx="0" cy="0"/>
+        </a:xfrm>
+      </p:grpSpPr>
+      <p:sp>
+        <p:nvSpPr>
+          <p:cNvPr id="2" name="Slide Image Placeholder 1"/>
+          <p:cNvSpPr>
+            <a:spLocks noGrp="1" noRot="1" noChangeAspect="1"/>
+          </p:cNvSpPr>
+          <p:nvPr>
+            <p:ph type="sldImg"/>
+          </p:nvPr>
+        </p:nvSpPr>
+        <p:spPr/>
+      </p:sp>
+      <p:sp>
+        <p:nvSpPr>
+          <p:cNvPr id="3" name="Notes Placeholder 2"/>
+          <p:cNvSpPr>
+            <a:spLocks noGrp="1"/>
+          </p:cNvSpPr>
+          <p:nvPr>
+            <p:ph type="body" idx="1"/>
+          </p:nvPr>
+        </p:nvSpPr>
+        <p:spPr/>
+        <p:txBody>
+          <a:bodyPr/>
+          <a:lstStyle/>
+          <a:p>
+            <a:pPr lvl="0" indent="0" marL="0">
+              <a:buNone/>
+            </a:pPr>
+            <a:r>
+              <a:rPr/>
+              <a:t>https://mytwu-my.sharepoint.com/:x:/g/personal/colin_madland_twu_ca/EWFESCk49hFIvdhXM_YrZlwBUs5ZCTvQIiQZ9olWTNWdVg?e=ed9rWu</a:t>
+            </a:r>
+          </a:p>
+        </p:txBody>
+      </p:sp>
+      <p:sp>
+        <p:nvSpPr>
+          <p:cNvPr id="4" name="Slide Number Placeholder 3"/>
+          <p:cNvSpPr>
+            <a:spLocks noGrp="1"/>
+          </p:cNvSpPr>
+          <p:nvPr>
+            <p:ph type="sldNum" sz="quarter" idx="10"/>
+          </p:nvPr>
+        </p:nvSpPr>
+        <p:spPr/>
+        <p:txBody>
+          <a:bodyPr/>
+          <a:lstStyle/>
+          <a:p>
+            <a:fld id="{18BDFEC3-8487-43E8-A154-7C12CBC1FFF2}" type="slidenum">
+              <a:rPr lang="en-US"/>
+              <a:t>17</a:t>
+            </a:fld>
+            <a:endParaRPr lang="en-US"/>
+          </a:p>
+        </p:txBody>
+      </p:sp>
+    </p:spTree>
+  </p:cSld>
+</p:notes>
+</file>
+
+<file path=ppt/notesSlides/notesSlide4.xml><?xml version="1.0" encoding="utf-8"?>
+<p:notes xmlns:a="http://schemas.openxmlformats.org/drawingml/2006/main" xmlns:r="http://schemas.openxmlformats.org/officeDocument/2006/relationships" xmlns:p="http://schemas.openxmlformats.org/presentationml/2006/main">
+  <p:cSld>
+    <p:spTree>
+      <p:nvGrpSpPr>
+        <p:cNvPr id="1" name=""/>
+        <p:cNvGrpSpPr/>
+        <p:nvPr/>
+      </p:nvGrpSpPr>
+      <p:grpSpPr>
+        <a:xfrm>
+          <a:off x="0" y="0"/>
+          <a:ext cx="0" cy="0"/>
+          <a:chOff x="0" y="0"/>
+          <a:chExt cx="0" cy="0"/>
+        </a:xfrm>
+      </p:grpSpPr>
+      <p:sp>
+        <p:nvSpPr>
+          <p:cNvPr id="2" name="Slide Image Placeholder 1"/>
+          <p:cNvSpPr>
+            <a:spLocks noGrp="1" noRot="1" noChangeAspect="1"/>
+          </p:cNvSpPr>
+          <p:nvPr>
+            <p:ph type="sldImg"/>
+          </p:nvPr>
+        </p:nvSpPr>
+        <p:spPr/>
+      </p:sp>
+      <p:sp>
+        <p:nvSpPr>
+          <p:cNvPr id="3" name="Notes Placeholder 2"/>
+          <p:cNvSpPr>
+            <a:spLocks noGrp="1"/>
+          </p:cNvSpPr>
+          <p:nvPr>
+            <p:ph type="body" idx="1"/>
+          </p:nvPr>
+        </p:nvSpPr>
+        <p:spPr/>
+        <p:txBody>
+          <a:bodyPr/>
+          <a:lstStyle/>
+          <a:p>
+            <a:pPr lvl="0" indent="0" marL="0">
+              <a:buNone/>
+            </a:pPr>
+            <a:r>
+              <a:rPr/>
+              <a:t>https://mytwu-my.sharepoint.com/:u:/g/personal/colin_madland_twu_ca/EdaTKeQImyZJk4o8TNQbBvgBo7G8Bg-PvRDwZhIUGAqwTQ?e=hAglQl</a:t>
+            </a:r>
+          </a:p>
+        </p:txBody>
+      </p:sp>
+      <p:sp>
+        <p:nvSpPr>
+          <p:cNvPr id="4" name="Slide Number Placeholder 3"/>
+          <p:cNvSpPr>
+            <a:spLocks noGrp="1"/>
+          </p:cNvSpPr>
+          <p:nvPr>
+            <p:ph type="sldNum" sz="quarter" idx="10"/>
+          </p:nvPr>
+        </p:nvSpPr>
+        <p:spPr/>
+        <p:txBody>
+          <a:bodyPr/>
+          <a:lstStyle/>
+          <a:p>
+            <a:fld id="{18BDFEC3-8487-43E8-A154-7C12CBC1FFF2}" type="slidenum">
+              <a:rPr lang="en-US"/>
+              <a:t>24</a:t>
             </a:fld>
             <a:endParaRPr lang="en-US"/>
           </a:p>
@@ -3738,12 +3916,12 @@
       </p:grpSpPr>
       <p:sp>
         <p:nvSpPr>
-          <p:cNvPr id="3" name="Content Placeholder 2"/>
-          <p:cNvSpPr>
-            <a:spLocks noGrp="1"/>
-          </p:cNvSpPr>
-          <p:nvPr>
-            <p:ph idx="1"/>
+          <p:cNvPr id="2" name="Title 1"/>
+          <p:cNvSpPr>
+            <a:spLocks noGrp="1"/>
+          </p:cNvSpPr>
+          <p:nvPr>
+            <p:ph type="title"/>
           </p:nvPr>
         </p:nvSpPr>
         <p:spPr/>
@@ -3752,14 +3930,11 @@
           <a:lstStyle/>
           <a:p>
             <a:pPr lvl="0" indent="0" marL="0">
-              <a:spcBef>
-                <a:spcPts val="3000"/>
-              </a:spcBef>
               <a:buNone/>
             </a:pPr>
             <a:r>
-              <a:rPr b="1"/>
-              <a:t>Highlights?</a:t>
+              <a:rPr/>
+              <a:t>Discuss with your group how you would characterize your assessment identity as it is and how it came to be.</a:t>
             </a:r>
           </a:p>
         </p:txBody>
@@ -3788,12 +3963,12 @@
       </p:grpSpPr>
       <p:sp>
         <p:nvSpPr>
-          <p:cNvPr id="2" name="Title 1"/>
-          <p:cNvSpPr>
-            <a:spLocks noGrp="1"/>
-          </p:cNvSpPr>
-          <p:nvPr>
-            <p:ph type="title"/>
+          <p:cNvPr id="3" name="Content Placeholder 2"/>
+          <p:cNvSpPr>
+            <a:spLocks noGrp="1"/>
+          </p:cNvSpPr>
+          <p:nvPr>
+            <p:ph idx="1"/>
           </p:nvPr>
         </p:nvSpPr>
         <p:spPr/>
@@ -3802,52 +3977,14 @@
           <a:lstStyle/>
           <a:p>
             <a:pPr lvl="0" indent="0" marL="0">
+              <a:spcBef>
+                <a:spcPts val="3000"/>
+              </a:spcBef>
               <a:buNone/>
             </a:pPr>
             <a:r>
-              <a:rPr/>
-              <a:t>Stop. Be outside. Think.</a:t>
-            </a:r>
-          </a:p>
-        </p:txBody>
-      </p:sp>
-      <p:sp>
-        <p:nvSpPr>
-          <p:cNvPr id="3" name="Content Placeholder 2"/>
-          <p:cNvSpPr>
-            <a:spLocks noGrp="1"/>
-          </p:cNvSpPr>
-          <p:nvPr>
-            <p:ph idx="1"/>
-          </p:nvPr>
-        </p:nvSpPr>
-        <p:spPr/>
-        <p:txBody>
-          <a:bodyPr/>
-          <a:lstStyle/>
-          <a:p>
-            <a:pPr lvl="0" indent="0" marL="0">
-              <a:buNone/>
-            </a:pPr>
-            <a:r>
-              <a:rPr/>
-              <a:t>Recall a time when you were the </a:t>
-            </a:r>
-            <a:r>
-              <a:rPr i="1"/>
-              <a:t>object</a:t>
-            </a:r>
-            <a:r>
-              <a:rPr/>
-              <a:t> in an educational transaction, where ‘teaching’ or ‘assessing’ was something done </a:t>
-            </a:r>
-            <a:r>
               <a:rPr b="1"/>
-              <a:t>to</a:t>
-            </a:r>
-            <a:r>
-              <a:rPr/>
-              <a:t> you. What might YOU do to avoid commoditizing grades in your practice?</a:t>
+              <a:t>Highlights?</a:t>
             </a:r>
           </a:p>
         </p:txBody>
@@ -4984,6 +5121,173 @@
       </p:grpSpPr>
       <p:sp>
         <p:nvSpPr>
+          <p:cNvPr id="3" name="Content Placeholder 2"/>
+          <p:cNvSpPr>
+            <a:spLocks noGrp="1"/>
+          </p:cNvSpPr>
+          <p:nvPr>
+            <p:ph idx="1"/>
+          </p:nvPr>
+        </p:nvSpPr>
+        <p:spPr/>
+        <p:txBody>
+          <a:bodyPr/>
+          <a:lstStyle/>
+          <a:p>
+            <a:pPr lvl="0" indent="0" marL="0">
+              <a:spcBef>
+                <a:spcPts val="3000"/>
+              </a:spcBef>
+              <a:buNone/>
+            </a:pPr>
+            <a:r>
+              <a:rPr b="1"/>
+              <a:t>Breakout Cooperative Activity</a:t>
+            </a:r>
+          </a:p>
+          <a:p>
+            <a:pPr lvl="0" indent="0" marL="0">
+              <a:buNone/>
+            </a:pPr>
+            <a:r>
+              <a:rPr/>
+              <a:t>10 mins</a:t>
+            </a:r>
+          </a:p>
+          <a:p>
+            <a:pPr lvl="0"/>
+            <a:r>
+              <a:rPr/>
+              <a:t>shared MS Excel file which contains </a:t>
+            </a:r>
+            <a:r>
+              <a:rPr i="1"/>
+              <a:t>simulated</a:t>
+            </a:r>
+            <a:r>
+              <a:rPr/>
+              <a:t> grade data from a class of 100 learners who completed 11 assignments, two papers, one midterm exam, and one final exam.</a:t>
+            </a:r>
+          </a:p>
+          <a:p>
+            <a:pPr lvl="0"/>
+            <a:r>
+              <a:rPr/>
+              <a:t>all items in the gradebook are recorded as a raw score out of 100</a:t>
+            </a:r>
+          </a:p>
+          <a:p>
+            <a:pPr lvl="0"/>
+            <a:r>
+              <a:rPr/>
+              <a:t>download the file and open in MS Excel</a:t>
+            </a:r>
+          </a:p>
+          <a:p>
+            <a:pPr lvl="0"/>
+            <a:r>
+              <a:rPr/>
+              <a:t>using the tools in Excel, decide as a group how you would report these learners’ final letter grades</a:t>
+            </a:r>
+          </a:p>
+          <a:p>
+            <a:pPr lvl="0"/>
+            <a:r>
+              <a:rPr/>
+              <a:t>calculate the grades in the columns to the right of the data</a:t>
+            </a:r>
+          </a:p>
+          <a:p>
+            <a:pPr lvl="0"/>
+            <a:r>
+              <a:rPr/>
+              <a:t>Use the </a:t>
+            </a:r>
+            <a:r>
+              <a:rPr>
+                <a:hlinkClick r:id="rId3"/>
+              </a:rPr>
+              <a:t>TWU Standard Grading System</a:t>
+            </a:r>
+          </a:p>
+        </p:txBody>
+      </p:sp>
+    </p:spTree>
+  </p:cSld>
+</p:sld>
+</file>
+
+<file path=ppt/slides/slide18.xml><?xml version="1.0" encoding="utf-8"?>
+<p:sld xmlns:a="http://schemas.openxmlformats.org/drawingml/2006/main" xmlns:r="http://schemas.openxmlformats.org/officeDocument/2006/relationships" xmlns:p="http://schemas.openxmlformats.org/presentationml/2006/main">
+  <p:cSld>
+    <p:spTree>
+      <p:nvGrpSpPr>
+        <p:cNvPr id="1" name=""/>
+        <p:cNvGrpSpPr/>
+        <p:nvPr/>
+      </p:nvGrpSpPr>
+      <p:grpSpPr>
+        <a:xfrm>
+          <a:off x="0" y="0"/>
+          <a:ext cx="0" cy="0"/>
+          <a:chOff x="0" y="0"/>
+          <a:chExt cx="0" cy="0"/>
+        </a:xfrm>
+      </p:grpSpPr>
+      <p:pic>
+        <p:nvPicPr>
+          <p:cNvPr descr="download.png" id="0" name="Picture 1"/>
+          <p:cNvPicPr>
+            <a:picLocks noGrp="1" noChangeAspect="1"/>
+          </p:cNvPicPr>
+          <p:nvPr/>
+        </p:nvPicPr>
+        <p:blipFill>
+          <a:blip r:embed="rId2"/>
+          <a:stretch>
+            <a:fillRect/>
+          </a:stretch>
+        </p:blipFill>
+        <p:spPr bwMode="auto">
+          <a:xfrm>
+            <a:off x="2247900" y="1193800"/>
+            <a:ext cx="4648200" cy="3390900"/>
+          </a:xfrm>
+          <a:prstGeom prst="rect">
+            <a:avLst/>
+          </a:prstGeom>
+          <a:noFill/>
+          <a:ln w="9525">
+            <a:noFill/>
+            <a:headEnd/>
+            <a:tailEnd/>
+          </a:ln>
+        </p:spPr>
+      </p:pic>
+    </p:spTree>
+  </p:cSld>
+</p:sld>
+</file>
+
+<file path=ppt/slides/slide19.xml><?xml version="1.0" encoding="utf-8"?>
+<p:sld xmlns:a="http://schemas.openxmlformats.org/drawingml/2006/main" xmlns:r="http://schemas.openxmlformats.org/officeDocument/2006/relationships" xmlns:p="http://schemas.openxmlformats.org/presentationml/2006/main">
+  <p:cSld>
+    <p:spTree>
+      <p:nvGrpSpPr>
+        <p:cNvPr id="1" name=""/>
+        <p:cNvGrpSpPr/>
+        <p:nvPr/>
+      </p:nvGrpSpPr>
+      <p:grpSpPr>
+        <a:xfrm>
+          <a:off x="0" y="0"/>
+          <a:ext cx="0" cy="0"/>
+          <a:chOff x="0" y="0"/>
+          <a:chExt cx="0" cy="0"/>
+        </a:xfrm>
+      </p:grpSpPr>
+      <p:sp>
+        <p:nvSpPr>
           <p:cNvPr id="4" name="Text Placeholder 3"/>
           <p:cNvSpPr>
             <a:spLocks noGrp="1"/>
@@ -4996,6 +5300,18 @@
         <p:txBody>
           <a:bodyPr/>
           <a:lstStyle/>
+          <a:p>
+            <a:pPr lvl="0" indent="0" marL="0">
+              <a:spcBef>
+                <a:spcPts val="3000"/>
+              </a:spcBef>
+              <a:buNone/>
+            </a:pPr>
+            <a:r>
+              <a:rPr b="1"/>
+              <a:t>Data Types</a:t>
+            </a:r>
+          </a:p>
           <a:p>
             <a:pPr lvl="0" indent="0" marL="0">
               <a:buNone/>
@@ -5038,7 +5354,54 @@
 </p:sld>
 </file>
 
-<file path=ppt/slides/slide18.xml><?xml version="1.0" encoding="utf-8"?>
+<file path=ppt/slides/slide2.xml><?xml version="1.0" encoding="utf-8"?>
+<p:sld xmlns:a="http://schemas.openxmlformats.org/drawingml/2006/main" xmlns:r="http://schemas.openxmlformats.org/officeDocument/2006/relationships" xmlns:p="http://schemas.openxmlformats.org/presentationml/2006/main">
+  <p:cSld>
+    <p:spTree>
+      <p:nvGrpSpPr>
+        <p:cNvPr id="1" name=""/>
+        <p:cNvGrpSpPr/>
+        <p:nvPr/>
+      </p:nvGrpSpPr>
+      <p:grpSpPr>
+        <a:xfrm>
+          <a:off x="0" y="0"/>
+          <a:ext cx="0" cy="0"/>
+          <a:chOff x="0" y="0"/>
+          <a:chExt cx="0" cy="0"/>
+        </a:xfrm>
+      </p:grpSpPr>
+      <p:sp>
+        <p:nvSpPr>
+          <p:cNvPr id="2" name="Title 1"/>
+          <p:cNvSpPr>
+            <a:spLocks noGrp="1"/>
+          </p:cNvSpPr>
+          <p:nvPr>
+            <p:ph type="title"/>
+          </p:nvPr>
+        </p:nvSpPr>
+        <p:spPr/>
+        <p:txBody>
+          <a:bodyPr/>
+          <a:lstStyle/>
+          <a:p>
+            <a:pPr lvl="0" indent="0" marL="0">
+              <a:buNone/>
+            </a:pPr>
+            <a:r>
+              <a:rPr/>
+              <a:t>What is Assessment?</a:t>
+            </a:r>
+          </a:p>
+        </p:txBody>
+      </p:sp>
+    </p:spTree>
+  </p:cSld>
+</p:sld>
+</file>
+
+<file path=ppt/slides/slide20.xml><?xml version="1.0" encoding="utf-8"?>
 <p:sld xmlns:a="http://schemas.openxmlformats.org/drawingml/2006/main" xmlns:r="http://schemas.openxmlformats.org/officeDocument/2006/relationships" xmlns:p="http://schemas.openxmlformats.org/presentationml/2006/main">
   <p:cSld>
     <p:spTree>
@@ -5076,10 +5439,10 @@
                 <a:tableStyleId>{5C22544A-7EE6-4342-B048-85BDC9FD1C3A}</a:tableStyleId>
               </a:tblPr>
               <a:tblGrid>
-                <a:gridCol w="2197100"/>
-                <a:gridCol w="1282700"/>
-                <a:gridCol w="2565400"/>
-                <a:gridCol w="2197100"/>
+                <a:gridCol w="2057400"/>
+                <a:gridCol w="2057400"/>
+                <a:gridCol w="2057400"/>
+                <a:gridCol w="2057400"/>
               </a:tblGrid>
               <a:tr h="0">
                 <a:tc>
@@ -5092,7 +5455,7 @@
                       </a:pPr>
                       <a:r>
                         <a:rPr/>
-                        <a:t>Data_type</a:t>
+                        <a:t>Data Type</a:t>
                       </a:r>
                     </a:p>
                   </a:txBody>
@@ -5103,7 +5466,7 @@
                     <a:bodyPr/>
                     <a:lstStyle/>
                     <a:p>
-                      <a:pPr lvl="0" indent="0" marL="0">
+                      <a:pPr lvl="0" indent="0" marL="0" algn="ctr">
                         <a:buNone/>
                       </a:pPr>
                       <a:r>
@@ -5119,7 +5482,7 @@
                     <a:bodyPr/>
                     <a:lstStyle/>
                     <a:p>
-                      <a:pPr lvl="0" indent="0" marL="0">
+                      <a:pPr lvl="0" indent="0" marL="0" algn="ctr">
                         <a:buNone/>
                       </a:pPr>
                       <a:r>
@@ -5135,12 +5498,12 @@
                     <a:bodyPr/>
                     <a:lstStyle/>
                     <a:p>
-                      <a:pPr lvl="0" indent="0" marL="0">
+                      <a:pPr lvl="0" indent="0" marL="0" algn="ctr">
                         <a:buNone/>
                       </a:pPr>
                       <a:r>
                         <a:rPr/>
-                        <a:t>True.Zero</a:t>
+                        <a:t>True Zero</a:t>
                       </a:r>
                     </a:p>
                   </a:txBody>
@@ -5168,12 +5531,12 @@
                     <a:bodyPr/>
                     <a:lstStyle/>
                     <a:p>
-                      <a:pPr lvl="0" indent="0" marL="0">
+                      <a:pPr lvl="0" indent="0" marL="0" algn="ctr">
                         <a:buNone/>
                       </a:pPr>
                       <a:r>
                         <a:rPr/>
-                        <a:t>❌ | ❌ | ❌</a:t>
+                        <a:t>❌</a:t>
                       </a:r>
                     </a:p>
                   </a:txBody>
@@ -5183,7 +5546,13 @@
                     <a:bodyPr/>
                     <a:lstStyle/>
                     <a:p>
-                      <a:endParaRPr/>
+                      <a:pPr lvl="0" indent="0" marL="0" algn="ctr">
+                        <a:buNone/>
+                      </a:pPr>
+                      <a:r>
+                        <a:rPr/>
+                        <a:t>❌</a:t>
+                      </a:r>
                     </a:p>
                   </a:txBody>
                 </a:tc>
@@ -5192,7 +5561,13 @@
                     <a:bodyPr/>
                     <a:lstStyle/>
                     <a:p>
-                      <a:endParaRPr/>
+                      <a:pPr lvl="0" indent="0" marL="0" algn="ctr">
+                        <a:buNone/>
+                      </a:pPr>
+                      <a:r>
+                        <a:rPr/>
+                        <a:t>❌</a:t>
+                      </a:r>
                     </a:p>
                   </a:txBody>
                 </a:tc>
@@ -5218,12 +5593,12 @@
                     <a:bodyPr/>
                     <a:lstStyle/>
                     <a:p>
-                      <a:pPr lvl="0" indent="0" marL="0">
+                      <a:pPr lvl="0" indent="0" marL="0" algn="ctr">
                         <a:buNone/>
                       </a:pPr>
                       <a:r>
                         <a:rPr/>
-                        <a:t>❌ | ❌ | ❌</a:t>
+                        <a:t>❌</a:t>
                       </a:r>
                     </a:p>
                   </a:txBody>
@@ -5233,7 +5608,13 @@
                     <a:bodyPr/>
                     <a:lstStyle/>
                     <a:p>
-                      <a:endParaRPr/>
+                      <a:pPr lvl="0" indent="0" marL="0" algn="ctr">
+                        <a:buNone/>
+                      </a:pPr>
+                      <a:r>
+                        <a:rPr/>
+                        <a:t>❌</a:t>
+                      </a:r>
                     </a:p>
                   </a:txBody>
                 </a:tc>
@@ -5242,7 +5623,13 @@
                     <a:bodyPr/>
                     <a:lstStyle/>
                     <a:p>
-                      <a:endParaRPr/>
+                      <a:pPr lvl="0" indent="0" marL="0" algn="ctr">
+                        <a:buNone/>
+                      </a:pPr>
+                      <a:r>
+                        <a:rPr/>
+                        <a:t>❌</a:t>
+                      </a:r>
                     </a:p>
                   </a:txBody>
                 </a:tc>
@@ -5268,12 +5655,12 @@
                     <a:bodyPr/>
                     <a:lstStyle/>
                     <a:p>
-                      <a:pPr lvl="0" indent="0" marL="0">
+                      <a:pPr lvl="0" indent="0" marL="0" algn="ctr">
                         <a:buNone/>
                       </a:pPr>
                       <a:r>
                         <a:rPr/>
-                        <a:t>✅ | ✅ | ❌</a:t>
+                        <a:t>✅</a:t>
                       </a:r>
                     </a:p>
                   </a:txBody>
@@ -5283,7 +5670,13 @@
                     <a:bodyPr/>
                     <a:lstStyle/>
                     <a:p>
-                      <a:endParaRPr/>
+                      <a:pPr lvl="0" indent="0" marL="0" algn="ctr">
+                        <a:buNone/>
+                      </a:pPr>
+                      <a:r>
+                        <a:rPr/>
+                        <a:t>✅</a:t>
+                      </a:r>
                     </a:p>
                   </a:txBody>
                 </a:tc>
@@ -5292,7 +5685,13 @@
                     <a:bodyPr/>
                     <a:lstStyle/>
                     <a:p>
-                      <a:endParaRPr/>
+                      <a:pPr lvl="0" indent="0" marL="0" algn="ctr">
+                        <a:buNone/>
+                      </a:pPr>
+                      <a:r>
+                        <a:rPr/>
+                        <a:t>❌</a:t>
+                      </a:r>
                     </a:p>
                   </a:txBody>
                 </a:tc>
@@ -5318,12 +5717,12 @@
                     <a:bodyPr/>
                     <a:lstStyle/>
                     <a:p>
-                      <a:pPr lvl="0" indent="0" marL="0">
+                      <a:pPr lvl="0" indent="0" marL="0" algn="ctr">
                         <a:buNone/>
                       </a:pPr>
                       <a:r>
                         <a:rPr/>
-                        <a:t>✅ | ✅ | ✅</a:t>
+                        <a:t>✅</a:t>
                       </a:r>
                     </a:p>
                   </a:txBody>
@@ -5333,7 +5732,13 @@
                     <a:bodyPr/>
                     <a:lstStyle/>
                     <a:p>
-                      <a:endParaRPr/>
+                      <a:pPr lvl="0" indent="0" marL="0" algn="ctr">
+                        <a:buNone/>
+                      </a:pPr>
+                      <a:r>
+                        <a:rPr/>
+                        <a:t>✅</a:t>
+                      </a:r>
                     </a:p>
                   </a:txBody>
                 </a:tc>
@@ -5342,7 +5747,13 @@
                     <a:bodyPr/>
                     <a:lstStyle/>
                     <a:p>
-                      <a:endParaRPr/>
+                      <a:pPr lvl="0" indent="0" marL="0" algn="ctr">
+                        <a:buNone/>
+                      </a:pPr>
+                      <a:r>
+                        <a:rPr/>
+                        <a:t>✅</a:t>
+                      </a:r>
                     </a:p>
                   </a:txBody>
                 </a:tc>
@@ -5351,237 +5762,6 @@
           </a:graphicData>
         </a:graphic>
       </p:graphicFrame>
-    </p:spTree>
-  </p:cSld>
-</p:sld>
-</file>
-
-<file path=ppt/slides/slide19.xml><?xml version="1.0" encoding="utf-8"?>
-<p:sld xmlns:a="http://schemas.openxmlformats.org/drawingml/2006/main" xmlns:r="http://schemas.openxmlformats.org/officeDocument/2006/relationships" xmlns:p="http://schemas.openxmlformats.org/presentationml/2006/main">
-  <p:cSld>
-    <p:spTree>
-      <p:nvGrpSpPr>
-        <p:cNvPr id="1" name=""/>
-        <p:cNvGrpSpPr/>
-        <p:nvPr/>
-      </p:nvGrpSpPr>
-      <p:grpSpPr>
-        <a:xfrm>
-          <a:off x="0" y="0"/>
-          <a:ext cx="0" cy="0"/>
-          <a:chOff x="0" y="0"/>
-          <a:chExt cx="0" cy="0"/>
-        </a:xfrm>
-      </p:grpSpPr>
-      <p:sp>
-        <p:nvSpPr>
-          <p:cNvPr id="3" name="Content Placeholder 2"/>
-          <p:cNvSpPr>
-            <a:spLocks noGrp="1"/>
-          </p:cNvSpPr>
-          <p:nvPr>
-            <p:ph idx="1"/>
-          </p:nvPr>
-        </p:nvSpPr>
-        <p:spPr/>
-        <p:txBody>
-          <a:bodyPr/>
-          <a:lstStyle/>
-          <a:p>
-            <a:pPr lvl="0" indent="0" marL="0">
-              <a:buNone/>
-            </a:pPr>
-            <a:r>
-              <a:rPr b="1"/>
-              <a:t>Nominal</a:t>
-            </a:r>
-          </a:p>
-          <a:p>
-            <a:pPr lvl="0" indent="0" marL="1270000">
-              <a:buNone/>
-            </a:pPr>
-            <a:r>
-              <a:rPr sz="2000"/>
-              <a:t>named</a:t>
-            </a:r>
-          </a:p>
-          <a:p>
-            <a:pPr lvl="0" indent="0" marL="1270000">
-              <a:buNone/>
-            </a:pPr>
-            <a:r>
-              <a:rPr sz="2000"/>
-              <a:t>counts, mode</a:t>
-            </a:r>
-          </a:p>
-          <a:p>
-            <a:pPr lvl="0" indent="0" marL="0">
-              <a:buNone/>
-            </a:pPr>
-            <a:r>
-              <a:rPr b="1"/>
-              <a:t>Ordinal</a:t>
-            </a:r>
-          </a:p>
-          <a:p>
-            <a:pPr lvl="0" indent="0" marL="1270000">
-              <a:buNone/>
-            </a:pPr>
-            <a:r>
-              <a:rPr sz="2000"/>
-              <a:t>named, ordered</a:t>
-            </a:r>
-          </a:p>
-          <a:p>
-            <a:pPr lvl="0" indent="0" marL="1270000">
-              <a:buNone/>
-            </a:pPr>
-            <a:r>
-              <a:rPr sz="2000"/>
-              <a:t>counts, mode, median</a:t>
-            </a:r>
-          </a:p>
-          <a:p>
-            <a:pPr lvl="0" indent="0" marL="0">
-              <a:buNone/>
-            </a:pPr>
-            <a:r>
-              <a:rPr b="1"/>
-              <a:t>Interval</a:t>
-            </a:r>
-          </a:p>
-          <a:p>
-            <a:pPr lvl="0" indent="0" marL="1270000">
-              <a:buNone/>
-            </a:pPr>
-            <a:r>
-              <a:rPr sz="2000"/>
-              <a:t>named, ordered, equidistant</a:t>
-            </a:r>
-          </a:p>
-          <a:p>
-            <a:pPr lvl="0" indent="0" marL="1270000">
-              <a:buNone/>
-            </a:pPr>
-            <a:r>
-              <a:rPr sz="2000"/>
-              <a:t>counts, mean, median, mode, standard deviation</a:t>
-            </a:r>
-          </a:p>
-          <a:p>
-            <a:pPr lvl="0" indent="0" marL="0">
-              <a:buNone/>
-            </a:pPr>
-            <a:r>
-              <a:rPr b="1"/>
-              <a:t>Ratio</a:t>
-            </a:r>
-          </a:p>
-          <a:p>
-            <a:pPr lvl="0" indent="0" marL="1270000">
-              <a:buNone/>
-            </a:pPr>
-            <a:r>
-              <a:rPr sz="2000"/>
-              <a:t>named, ordered, equidistant, true zero</a:t>
-            </a:r>
-          </a:p>
-        </p:txBody>
-      </p:sp>
-    </p:spTree>
-  </p:cSld>
-</p:sld>
-</file>
-
-<file path=ppt/slides/slide2.xml><?xml version="1.0" encoding="utf-8"?>
-<p:sld xmlns:a="http://schemas.openxmlformats.org/drawingml/2006/main" xmlns:r="http://schemas.openxmlformats.org/officeDocument/2006/relationships" xmlns:p="http://schemas.openxmlformats.org/presentationml/2006/main">
-  <p:cSld>
-    <p:spTree>
-      <p:nvGrpSpPr>
-        <p:cNvPr id="1" name=""/>
-        <p:cNvGrpSpPr/>
-        <p:nvPr/>
-      </p:nvGrpSpPr>
-      <p:grpSpPr>
-        <a:xfrm>
-          <a:off x="0" y="0"/>
-          <a:ext cx="0" cy="0"/>
-          <a:chOff x="0" y="0"/>
-          <a:chExt cx="0" cy="0"/>
-        </a:xfrm>
-      </p:grpSpPr>
-      <p:sp>
-        <p:nvSpPr>
-          <p:cNvPr id="2" name="Title 1"/>
-          <p:cNvSpPr>
-            <a:spLocks noGrp="1"/>
-          </p:cNvSpPr>
-          <p:nvPr>
-            <p:ph type="title"/>
-          </p:nvPr>
-        </p:nvSpPr>
-        <p:spPr/>
-        <p:txBody>
-          <a:bodyPr/>
-          <a:lstStyle/>
-          <a:p>
-            <a:pPr lvl="0" indent="0" marL="0">
-              <a:buNone/>
-            </a:pPr>
-            <a:r>
-              <a:rPr/>
-              <a:t>What is Assessment?</a:t>
-            </a:r>
-          </a:p>
-        </p:txBody>
-      </p:sp>
-    </p:spTree>
-  </p:cSld>
-</p:sld>
-</file>
-
-<file path=ppt/slides/slide20.xml><?xml version="1.0" encoding="utf-8"?>
-<p:sld xmlns:a="http://schemas.openxmlformats.org/drawingml/2006/main" xmlns:r="http://schemas.openxmlformats.org/officeDocument/2006/relationships" xmlns:p="http://schemas.openxmlformats.org/presentationml/2006/main">
-  <p:cSld>
-    <p:spTree>
-      <p:nvGrpSpPr>
-        <p:cNvPr id="1" name=""/>
-        <p:cNvGrpSpPr/>
-        <p:nvPr/>
-      </p:nvGrpSpPr>
-      <p:grpSpPr>
-        <a:xfrm>
-          <a:off x="0" y="0"/>
-          <a:ext cx="0" cy="0"/>
-          <a:chOff x="0" y="0"/>
-          <a:chExt cx="0" cy="0"/>
-        </a:xfrm>
-      </p:grpSpPr>
-      <p:sp>
-        <p:nvSpPr>
-          <p:cNvPr id="3" name="Content Placeholder 2"/>
-          <p:cNvSpPr>
-            <a:spLocks noGrp="1"/>
-          </p:cNvSpPr>
-          <p:nvPr>
-            <p:ph idx="1"/>
-          </p:nvPr>
-        </p:nvSpPr>
-        <p:spPr/>
-        <p:txBody>
-          <a:bodyPr/>
-          <a:lstStyle/>
-          <a:p>
-            <a:pPr lvl="0" indent="0" marL="1270000">
-              <a:buNone/>
-            </a:pPr>
-            <a:r>
-              <a:rPr sz="2000"/>
-              <a:t>Knowledge emerges only through invention and re-invention, through the restless, impatient, continuing, hopeful inquiry human beings pursue in the world, with the world, and with each other. (Freire, 1990, p. 72)</a:t>
-            </a:r>
-          </a:p>
-        </p:txBody>
-      </p:sp>
     </p:spTree>
   </p:cSld>
 </p:sld>
@@ -5606,6 +5786,31 @@
       </p:grpSpPr>
       <p:sp>
         <p:nvSpPr>
+          <p:cNvPr id="2" name="Title 1"/>
+          <p:cNvSpPr>
+            <a:spLocks noGrp="1"/>
+          </p:cNvSpPr>
+          <p:nvPr>
+            <p:ph type="title"/>
+          </p:nvPr>
+        </p:nvSpPr>
+        <p:spPr/>
+        <p:txBody>
+          <a:bodyPr/>
+          <a:lstStyle/>
+          <a:p>
+            <a:pPr lvl="0" indent="0" marL="0">
+              <a:buNone/>
+            </a:pPr>
+            <a:r>
+              <a:rPr/>
+              <a:t>GRADE DATA IS ORDINAL!</a:t>
+            </a:r>
+          </a:p>
+        </p:txBody>
+      </p:sp>
+      <p:sp>
+        <p:nvSpPr>
           <p:cNvPr id="3" name="Content Placeholder 2"/>
           <p:cNvSpPr>
             <a:spLocks noGrp="1"/>
@@ -5619,18 +5824,17 @@
           <a:bodyPr/>
           <a:lstStyle/>
           <a:p>
-            <a:pPr lvl="0" indent="0" marL="0">
-              <a:buNone/>
-            </a:pPr>
-            <a:r>
-              <a:rPr>
-                <a:hlinkClick r:id="rId2"/>
-              </a:rPr>
-              <a:t>cmad.land</a:t>
-            </a:r>
+            <a:pPr lvl="0"/>
             <a:r>
               <a:rPr/>
-              <a:t> - slides</a:t>
+              <a:t>averages don’t make sense</a:t>
+            </a:r>
+          </a:p>
+          <a:p>
+            <a:pPr lvl="0"/>
+            <a:r>
+              <a:rPr/>
+              <a:t>no true zero</a:t>
             </a:r>
           </a:p>
         </p:txBody>
@@ -5659,6 +5863,313 @@
       </p:grpSpPr>
       <p:sp>
         <p:nvSpPr>
+          <p:cNvPr id="2" name="Title 1"/>
+          <p:cNvSpPr>
+            <a:spLocks noGrp="1"/>
+          </p:cNvSpPr>
+          <p:nvPr>
+            <p:ph type="title"/>
+          </p:nvPr>
+        </p:nvSpPr>
+        <p:spPr/>
+        <p:txBody>
+          <a:bodyPr/>
+          <a:lstStyle/>
+          <a:p>
+            <a:pPr lvl="0" indent="0" marL="0">
+              <a:buNone/>
+            </a:pPr>
+            <a:r>
+              <a:rPr/>
+              <a:t>Validity and Reliability</a:t>
+            </a:r>
+          </a:p>
+        </p:txBody>
+      </p:sp>
+    </p:spTree>
+  </p:cSld>
+</p:sld>
+</file>
+
+<file path=ppt/slides/slide23.xml><?xml version="1.0" encoding="utf-8"?>
+<p:sld xmlns:a="http://schemas.openxmlformats.org/drawingml/2006/main" xmlns:r="http://schemas.openxmlformats.org/officeDocument/2006/relationships" xmlns:p="http://schemas.openxmlformats.org/presentationml/2006/main">
+  <p:cSld>
+    <p:spTree>
+      <p:nvGrpSpPr>
+        <p:cNvPr id="1" name=""/>
+        <p:cNvGrpSpPr/>
+        <p:nvPr/>
+      </p:nvGrpSpPr>
+      <p:grpSpPr>
+        <a:xfrm>
+          <a:off x="0" y="0"/>
+          <a:ext cx="0" cy="0"/>
+          <a:chOff x="0" y="0"/>
+          <a:chExt cx="0" cy="0"/>
+        </a:xfrm>
+      </p:grpSpPr>
+      <p:pic>
+        <p:nvPicPr>
+          <p:cNvPr descr="valid_reliable.png" id="0" name="Picture 1"/>
+          <p:cNvPicPr>
+            <a:picLocks noGrp="1" noChangeAspect="1"/>
+          </p:cNvPicPr>
+          <p:nvPr/>
+        </p:nvPicPr>
+        <p:blipFill>
+          <a:blip r:embed="rId2"/>
+          <a:stretch>
+            <a:fillRect/>
+          </a:stretch>
+        </p:blipFill>
+        <p:spPr bwMode="auto">
+          <a:xfrm>
+            <a:off x="457200" y="1511300"/>
+            <a:ext cx="8229600" cy="2743200"/>
+          </a:xfrm>
+          <a:prstGeom prst="rect">
+            <a:avLst/>
+          </a:prstGeom>
+          <a:noFill/>
+          <a:ln w="9525">
+            <a:noFill/>
+            <a:headEnd/>
+            <a:tailEnd/>
+          </a:ln>
+        </p:spPr>
+      </p:pic>
+    </p:spTree>
+  </p:cSld>
+</p:sld>
+</file>
+
+<file path=ppt/slides/slide24.xml><?xml version="1.0" encoding="utf-8"?>
+<p:sld xmlns:a="http://schemas.openxmlformats.org/drawingml/2006/main" xmlns:r="http://schemas.openxmlformats.org/officeDocument/2006/relationships" xmlns:p="http://schemas.openxmlformats.org/presentationml/2006/main">
+  <p:cSld>
+    <p:spTree>
+      <p:nvGrpSpPr>
+        <p:cNvPr id="1" name=""/>
+        <p:cNvGrpSpPr/>
+        <p:nvPr/>
+      </p:nvGrpSpPr>
+      <p:grpSpPr>
+        <a:xfrm>
+          <a:off x="0" y="0"/>
+          <a:ext cx="0" cy="0"/>
+          <a:chOff x="0" y="0"/>
+          <a:chExt cx="0" cy="0"/>
+        </a:xfrm>
+      </p:grpSpPr>
+      <p:pic>
+        <p:nvPicPr>
+          <p:cNvPr descr="starch-histogram-1.png" id="0" name="Picture 1"/>
+          <p:cNvPicPr>
+            <a:picLocks noGrp="1" noChangeAspect="1"/>
+          </p:cNvPicPr>
+          <p:nvPr/>
+        </p:nvPicPr>
+        <p:blipFill>
+          <a:blip r:embed="rId3"/>
+          <a:stretch>
+            <a:fillRect/>
+          </a:stretch>
+        </p:blipFill>
+        <p:spPr bwMode="auto">
+          <a:xfrm>
+            <a:off x="1854200" y="1193800"/>
+            <a:ext cx="5422900" cy="3390900"/>
+          </a:xfrm>
+          <a:prstGeom prst="rect">
+            <a:avLst/>
+          </a:prstGeom>
+          <a:noFill/>
+          <a:ln w="9525">
+            <a:noFill/>
+            <a:headEnd/>
+            <a:tailEnd/>
+          </a:ln>
+        </p:spPr>
+      </p:pic>
+    </p:spTree>
+  </p:cSld>
+</p:sld>
+</file>
+
+<file path=ppt/slides/slide25.xml><?xml version="1.0" encoding="utf-8"?>
+<p:sld xmlns:a="http://schemas.openxmlformats.org/drawingml/2006/main" xmlns:r="http://schemas.openxmlformats.org/officeDocument/2006/relationships" xmlns:p="http://schemas.openxmlformats.org/presentationml/2006/main">
+  <p:cSld>
+    <p:spTree>
+      <p:nvGrpSpPr>
+        <p:cNvPr id="1" name=""/>
+        <p:cNvGrpSpPr/>
+        <p:nvPr/>
+      </p:nvGrpSpPr>
+      <p:grpSpPr>
+        <a:xfrm>
+          <a:off x="0" y="0"/>
+          <a:ext cx="0" cy="0"/>
+          <a:chOff x="0" y="0"/>
+          <a:chExt cx="0" cy="0"/>
+        </a:xfrm>
+      </p:grpSpPr>
+      <p:pic>
+        <p:nvPicPr>
+          <p:cNvPr descr="starch-scores-by-grader.png" id="0" name="Picture 1"/>
+          <p:cNvPicPr>
+            <a:picLocks noGrp="1" noChangeAspect="1"/>
+          </p:cNvPicPr>
+          <p:nvPr/>
+        </p:nvPicPr>
+        <p:blipFill>
+          <a:blip r:embed="rId2"/>
+          <a:stretch>
+            <a:fillRect/>
+          </a:stretch>
+        </p:blipFill>
+        <p:spPr bwMode="auto">
+          <a:xfrm>
+            <a:off x="1854200" y="1193800"/>
+            <a:ext cx="5422900" cy="3390900"/>
+          </a:xfrm>
+          <a:prstGeom prst="rect">
+            <a:avLst/>
+          </a:prstGeom>
+          <a:noFill/>
+          <a:ln w="9525">
+            <a:noFill/>
+            <a:headEnd/>
+            <a:tailEnd/>
+          </a:ln>
+        </p:spPr>
+      </p:pic>
+    </p:spTree>
+  </p:cSld>
+</p:sld>
+</file>
+
+<file path=ppt/slides/slide26.xml><?xml version="1.0" encoding="utf-8"?>
+<p:sld xmlns:a="http://schemas.openxmlformats.org/drawingml/2006/main" xmlns:r="http://schemas.openxmlformats.org/officeDocument/2006/relationships" xmlns:p="http://schemas.openxmlformats.org/presentationml/2006/main">
+  <p:cSld>
+    <p:spTree>
+      <p:nvGrpSpPr>
+        <p:cNvPr id="1" name=""/>
+        <p:cNvGrpSpPr/>
+        <p:nvPr/>
+      </p:nvGrpSpPr>
+      <p:grpSpPr>
+        <a:xfrm>
+          <a:off x="0" y="0"/>
+          <a:ext cx="0" cy="0"/>
+          <a:chOff x="0" y="0"/>
+          <a:chExt cx="0" cy="0"/>
+        </a:xfrm>
+      </p:grpSpPr>
+      <p:pic>
+        <p:nvPicPr>
+          <p:cNvPr descr="starch-beeswarm-by-grader-1.png" id="0" name="Picture 1"/>
+          <p:cNvPicPr>
+            <a:picLocks noGrp="1" noChangeAspect="1"/>
+          </p:cNvPicPr>
+          <p:nvPr/>
+        </p:nvPicPr>
+        <p:blipFill>
+          <a:blip r:embed="rId2"/>
+          <a:stretch>
+            <a:fillRect/>
+          </a:stretch>
+        </p:blipFill>
+        <p:spPr bwMode="auto">
+          <a:xfrm>
+            <a:off x="1854200" y="1193800"/>
+            <a:ext cx="5422900" cy="3390900"/>
+          </a:xfrm>
+          <a:prstGeom prst="rect">
+            <a:avLst/>
+          </a:prstGeom>
+          <a:noFill/>
+          <a:ln w="9525">
+            <a:noFill/>
+            <a:headEnd/>
+            <a:tailEnd/>
+          </a:ln>
+        </p:spPr>
+      </p:pic>
+    </p:spTree>
+  </p:cSld>
+</p:sld>
+</file>
+
+<file path=ppt/slides/slide27.xml><?xml version="1.0" encoding="utf-8"?>
+<p:sld xmlns:a="http://schemas.openxmlformats.org/drawingml/2006/main" xmlns:r="http://schemas.openxmlformats.org/officeDocument/2006/relationships" xmlns:p="http://schemas.openxmlformats.org/presentationml/2006/main">
+  <p:cSld>
+    <p:spTree>
+      <p:nvGrpSpPr>
+        <p:cNvPr id="1" name=""/>
+        <p:cNvGrpSpPr/>
+        <p:nvPr/>
+      </p:nvGrpSpPr>
+      <p:grpSpPr>
+        <a:xfrm>
+          <a:off x="0" y="0"/>
+          <a:ext cx="0" cy="0"/>
+          <a:chOff x="0" y="0"/>
+          <a:chExt cx="0" cy="0"/>
+        </a:xfrm>
+      </p:grpSpPr>
+      <p:pic>
+        <p:nvPicPr>
+          <p:cNvPr descr="starch-violin-by-grader-1.png" id="0" name="Picture 1"/>
+          <p:cNvPicPr>
+            <a:picLocks noGrp="1" noChangeAspect="1"/>
+          </p:cNvPicPr>
+          <p:nvPr/>
+        </p:nvPicPr>
+        <p:blipFill>
+          <a:blip r:embed="rId2"/>
+          <a:stretch>
+            <a:fillRect/>
+          </a:stretch>
+        </p:blipFill>
+        <p:spPr bwMode="auto">
+          <a:xfrm>
+            <a:off x="1854200" y="1193800"/>
+            <a:ext cx="5422900" cy="3390900"/>
+          </a:xfrm>
+          <a:prstGeom prst="rect">
+            <a:avLst/>
+          </a:prstGeom>
+          <a:noFill/>
+          <a:ln w="9525">
+            <a:noFill/>
+            <a:headEnd/>
+            <a:tailEnd/>
+          </a:ln>
+        </p:spPr>
+      </p:pic>
+    </p:spTree>
+  </p:cSld>
+</p:sld>
+</file>
+
+<file path=ppt/slides/slide28.xml><?xml version="1.0" encoding="utf-8"?>
+<p:sld xmlns:a="http://schemas.openxmlformats.org/drawingml/2006/main" xmlns:r="http://schemas.openxmlformats.org/officeDocument/2006/relationships" xmlns:p="http://schemas.openxmlformats.org/presentationml/2006/main">
+  <p:cSld>
+    <p:spTree>
+      <p:nvGrpSpPr>
+        <p:cNvPr id="1" name=""/>
+        <p:cNvGrpSpPr/>
+        <p:nvPr/>
+      </p:nvGrpSpPr>
+      <p:grpSpPr>
+        <a:xfrm>
+          <a:off x="0" y="0"/>
+          <a:ext cx="0" cy="0"/>
+          <a:chOff x="0" y="0"/>
+          <a:chExt cx="0" cy="0"/>
+        </a:xfrm>
+      </p:grpSpPr>
+      <p:sp>
+        <p:nvSpPr>
           <p:cNvPr id="3" name="Content Placeholder 2"/>
           <p:cNvSpPr>
             <a:spLocks noGrp="1"/>
@@ -5680,24 +6191,75 @@
             </a:pPr>
             <a:r>
               <a:rPr b="1"/>
-              <a:t>References</a:t>
-            </a:r>
-          </a:p>
+              <a:t>Breakout Conversation</a:t>
+            </a:r>
+          </a:p>
+          <a:p>
+            <a:pPr lvl="0"/>
+            <a:r>
+              <a:rPr/>
+              <a:t>download ‘starch-elliott.zip’ and extract to view the images</a:t>
+            </a:r>
+          </a:p>
+          <a:p>
+            <a:pPr lvl="0"/>
+            <a:r>
+              <a:rPr/>
+              <a:t>discuss in your group to make sense of what you see</a:t>
+            </a:r>
+          </a:p>
+          <a:p>
+            <a:pPr lvl="0"/>
+            <a:r>
+              <a:rPr/>
+              <a:t>all of the plots are different visualizations of the same data</a:t>
+            </a:r>
+          </a:p>
+        </p:txBody>
+      </p:sp>
+    </p:spTree>
+  </p:cSld>
+</p:sld>
+</file>
+
+<file path=ppt/slides/slide29.xml><?xml version="1.0" encoding="utf-8"?>
+<p:sld xmlns:a="http://schemas.openxmlformats.org/drawingml/2006/main" xmlns:r="http://schemas.openxmlformats.org/officeDocument/2006/relationships" xmlns:p="http://schemas.openxmlformats.org/presentationml/2006/main">
+  <p:cSld>
+    <p:spTree>
+      <p:nvGrpSpPr>
+        <p:cNvPr id="1" name=""/>
+        <p:cNvGrpSpPr/>
+        <p:nvPr/>
+      </p:nvGrpSpPr>
+      <p:grpSpPr>
+        <a:xfrm>
+          <a:off x="0" y="0"/>
+          <a:ext cx="0" cy="0"/>
+          <a:chOff x="0" y="0"/>
+          <a:chExt cx="0" cy="0"/>
+        </a:xfrm>
+      </p:grpSpPr>
+      <p:sp>
+        <p:nvSpPr>
+          <p:cNvPr id="3" name="Content Placeholder 2"/>
+          <p:cNvSpPr>
+            <a:spLocks noGrp="1"/>
+          </p:cNvSpPr>
+          <p:nvPr>
+            <p:ph idx="1"/>
+          </p:nvPr>
+        </p:nvSpPr>
+        <p:spPr/>
+        <p:txBody>
+          <a:bodyPr/>
+          <a:lstStyle/>
           <a:p>
             <a:pPr lvl="0" indent="0" marL="0">
               <a:buNone/>
             </a:pPr>
             <a:r>
               <a:rPr/>
-              <a:t>Freire, P. (1990). </a:t>
-            </a:r>
-            <a:r>
-              <a:rPr i="1"/>
-              <a:t>Pedagogy of the oppressed</a:t>
-            </a:r>
-            <a:r>
-              <a:rPr/>
-              <a:t>. Penguin.</a:t>
+              <a:t>Where to go from here?</a:t>
             </a:r>
           </a:p>
         </p:txBody>
@@ -5787,6 +6349,427 @@
 </p:sld>
 </file>
 
+<file path=ppt/slides/slide30.xml><?xml version="1.0" encoding="utf-8"?>
+<p:sld xmlns:a="http://schemas.openxmlformats.org/drawingml/2006/main" xmlns:r="http://schemas.openxmlformats.org/officeDocument/2006/relationships" xmlns:p="http://schemas.openxmlformats.org/presentationml/2006/main">
+  <p:cSld>
+    <p:spTree>
+      <p:nvGrpSpPr>
+        <p:cNvPr id="1" name=""/>
+        <p:cNvGrpSpPr/>
+        <p:nvPr/>
+      </p:nvGrpSpPr>
+      <p:grpSpPr>
+        <a:xfrm>
+          <a:off x="0" y="0"/>
+          <a:ext cx="0" cy="0"/>
+          <a:chOff x="0" y="0"/>
+          <a:chExt cx="0" cy="0"/>
+        </a:xfrm>
+      </p:grpSpPr>
+      <p:sp>
+        <p:nvSpPr>
+          <p:cNvPr id="2" name="Title 1"/>
+          <p:cNvSpPr>
+            <a:spLocks noGrp="1"/>
+          </p:cNvSpPr>
+          <p:nvPr>
+            <p:ph type="title"/>
+          </p:nvPr>
+        </p:nvSpPr>
+        <p:spPr/>
+        <p:txBody>
+          <a:bodyPr/>
+          <a:lstStyle/>
+          <a:p>
+            <a:pPr lvl="0" indent="0" marL="0">
+              <a:buNone/>
+            </a:pPr>
+            <a:r>
+              <a:rPr/>
+              <a:t>Clearly-defined outcomes</a:t>
+            </a:r>
+          </a:p>
+        </p:txBody>
+      </p:sp>
+    </p:spTree>
+  </p:cSld>
+</p:sld>
+</file>
+
+<file path=ppt/slides/slide31.xml><?xml version="1.0" encoding="utf-8"?>
+<p:sld xmlns:a="http://schemas.openxmlformats.org/drawingml/2006/main" xmlns:r="http://schemas.openxmlformats.org/officeDocument/2006/relationships" xmlns:p="http://schemas.openxmlformats.org/presentationml/2006/main">
+  <p:cSld>
+    <p:spTree>
+      <p:nvGrpSpPr>
+        <p:cNvPr id="1" name=""/>
+        <p:cNvGrpSpPr/>
+        <p:nvPr/>
+      </p:nvGrpSpPr>
+      <p:grpSpPr>
+        <a:xfrm>
+          <a:off x="0" y="0"/>
+          <a:ext cx="0" cy="0"/>
+          <a:chOff x="0" y="0"/>
+          <a:chExt cx="0" cy="0"/>
+        </a:xfrm>
+      </p:grpSpPr>
+      <p:sp>
+        <p:nvSpPr>
+          <p:cNvPr id="2" name="Title 1"/>
+          <p:cNvSpPr>
+            <a:spLocks noGrp="1"/>
+          </p:cNvSpPr>
+          <p:nvPr>
+            <p:ph type="title"/>
+          </p:nvPr>
+        </p:nvSpPr>
+        <p:spPr/>
+        <p:txBody>
+          <a:bodyPr/>
+          <a:lstStyle/>
+          <a:p>
+            <a:pPr lvl="0" indent="0" marL="0">
+              <a:buNone/>
+            </a:pPr>
+            <a:r>
+              <a:rPr/>
+              <a:t>Grades communicate progress</a:t>
+            </a:r>
+          </a:p>
+        </p:txBody>
+      </p:sp>
+    </p:spTree>
+  </p:cSld>
+</p:sld>
+</file>
+
+<file path=ppt/slides/slide32.xml><?xml version="1.0" encoding="utf-8"?>
+<p:sld xmlns:a="http://schemas.openxmlformats.org/drawingml/2006/main" xmlns:r="http://schemas.openxmlformats.org/officeDocument/2006/relationships" xmlns:p="http://schemas.openxmlformats.org/presentationml/2006/main">
+  <p:cSld>
+    <p:spTree>
+      <p:nvGrpSpPr>
+        <p:cNvPr id="1" name=""/>
+        <p:cNvGrpSpPr/>
+        <p:nvPr/>
+      </p:nvGrpSpPr>
+      <p:grpSpPr>
+        <a:xfrm>
+          <a:off x="0" y="0"/>
+          <a:ext cx="0" cy="0"/>
+          <a:chOff x="0" y="0"/>
+          <a:chExt cx="0" cy="0"/>
+        </a:xfrm>
+      </p:grpSpPr>
+      <p:sp>
+        <p:nvSpPr>
+          <p:cNvPr id="2" name="Title 1"/>
+          <p:cNvSpPr>
+            <a:spLocks noGrp="1"/>
+          </p:cNvSpPr>
+          <p:nvPr>
+            <p:ph type="title"/>
+          </p:nvPr>
+        </p:nvSpPr>
+        <p:spPr/>
+        <p:txBody>
+          <a:bodyPr/>
+          <a:lstStyle/>
+          <a:p>
+            <a:pPr lvl="0" indent="0" marL="0">
+              <a:buNone/>
+            </a:pPr>
+            <a:r>
+              <a:rPr/>
+              <a:t>Closed feedback loops</a:t>
+            </a:r>
+          </a:p>
+        </p:txBody>
+      </p:sp>
+    </p:spTree>
+  </p:cSld>
+</p:sld>
+</file>
+
+<file path=ppt/slides/slide33.xml><?xml version="1.0" encoding="utf-8"?>
+<p:sld xmlns:a="http://schemas.openxmlformats.org/drawingml/2006/main" xmlns:r="http://schemas.openxmlformats.org/officeDocument/2006/relationships" xmlns:p="http://schemas.openxmlformats.org/presentationml/2006/main">
+  <p:cSld>
+    <p:spTree>
+      <p:nvGrpSpPr>
+        <p:cNvPr id="1" name=""/>
+        <p:cNvGrpSpPr/>
+        <p:nvPr/>
+      </p:nvGrpSpPr>
+      <p:grpSpPr>
+        <a:xfrm>
+          <a:off x="0" y="0"/>
+          <a:ext cx="0" cy="0"/>
+          <a:chOff x="0" y="0"/>
+          <a:chExt cx="0" cy="0"/>
+        </a:xfrm>
+      </p:grpSpPr>
+      <p:sp>
+        <p:nvSpPr>
+          <p:cNvPr id="2" name="Title 1"/>
+          <p:cNvSpPr>
+            <a:spLocks noGrp="1"/>
+          </p:cNvSpPr>
+          <p:nvPr>
+            <p:ph type="title"/>
+          </p:nvPr>
+        </p:nvSpPr>
+        <p:spPr/>
+        <p:txBody>
+          <a:bodyPr/>
+          <a:lstStyle/>
+          <a:p>
+            <a:pPr lvl="0" indent="0" marL="0">
+              <a:buNone/>
+            </a:pPr>
+            <a:r>
+              <a:rPr/>
+              <a:t>Reassessment without penalty</a:t>
+            </a:r>
+          </a:p>
+        </p:txBody>
+      </p:sp>
+      <p:sp>
+        <p:nvSpPr>
+          <p:cNvPr id="3" name="Content Placeholder 2"/>
+          <p:cNvSpPr>
+            <a:spLocks noGrp="1"/>
+          </p:cNvSpPr>
+          <p:nvPr>
+            <p:ph idx="1"/>
+          </p:nvPr>
+        </p:nvSpPr>
+        <p:spPr/>
+        <p:txBody>
+          <a:bodyPr/>
+          <a:lstStyle/>
+          <a:p>
+            <a:pPr lvl="0" indent="0" marL="1270000">
+              <a:buNone/>
+            </a:pPr>
+            <a:r>
+              <a:rPr sz="2000"/>
+              <a:t>Knowledge emerges only through invention and re-invention, through the restless, impatient, continuing, hopeful inquiry human beings pursue in the world, with the world, and with each other. (Freire, 1990, p. 72)</a:t>
+            </a:r>
+          </a:p>
+        </p:txBody>
+      </p:sp>
+    </p:spTree>
+  </p:cSld>
+</p:sld>
+</file>
+
+<file path=ppt/slides/slide34.xml><?xml version="1.0" encoding="utf-8"?>
+<p:sld xmlns:a="http://schemas.openxmlformats.org/drawingml/2006/main" xmlns:r="http://schemas.openxmlformats.org/officeDocument/2006/relationships" xmlns:p="http://schemas.openxmlformats.org/presentationml/2006/main">
+  <p:cSld>
+    <p:spTree>
+      <p:nvGrpSpPr>
+        <p:cNvPr id="1" name=""/>
+        <p:cNvGrpSpPr/>
+        <p:nvPr/>
+      </p:nvGrpSpPr>
+      <p:grpSpPr>
+        <a:xfrm>
+          <a:off x="0" y="0"/>
+          <a:ext cx="0" cy="0"/>
+          <a:chOff x="0" y="0"/>
+          <a:chExt cx="0" cy="0"/>
+        </a:xfrm>
+      </p:grpSpPr>
+      <p:sp>
+        <p:nvSpPr>
+          <p:cNvPr id="3" name="Content Placeholder 2"/>
+          <p:cNvSpPr>
+            <a:spLocks noGrp="1"/>
+          </p:cNvSpPr>
+          <p:nvPr>
+            <p:ph idx="1"/>
+          </p:nvPr>
+        </p:nvSpPr>
+        <p:spPr/>
+        <p:txBody>
+          <a:bodyPr/>
+          <a:lstStyle/>
+          <a:p>
+            <a:pPr lvl="0" indent="0" marL="0">
+              <a:buNone/>
+            </a:pPr>
+            <a:r>
+              <a:rPr>
+                <a:hlinkClick r:id="rId2"/>
+              </a:rPr>
+              <a:t>cmad.land</a:t>
+            </a:r>
+            <a:r>
+              <a:rPr/>
+              <a:t> - slides</a:t>
+            </a:r>
+          </a:p>
+        </p:txBody>
+      </p:sp>
+    </p:spTree>
+  </p:cSld>
+</p:sld>
+</file>
+
+<file path=ppt/slides/slide35.xml><?xml version="1.0" encoding="utf-8"?>
+<p:sld xmlns:a="http://schemas.openxmlformats.org/drawingml/2006/main" xmlns:r="http://schemas.openxmlformats.org/officeDocument/2006/relationships" xmlns:p="http://schemas.openxmlformats.org/presentationml/2006/main">
+  <p:cSld>
+    <p:spTree>
+      <p:nvGrpSpPr>
+        <p:cNvPr id="1" name=""/>
+        <p:cNvGrpSpPr/>
+        <p:nvPr/>
+      </p:nvGrpSpPr>
+      <p:grpSpPr>
+        <a:xfrm>
+          <a:off x="0" y="0"/>
+          <a:ext cx="0" cy="0"/>
+          <a:chOff x="0" y="0"/>
+          <a:chExt cx="0" cy="0"/>
+        </a:xfrm>
+      </p:grpSpPr>
+      <p:sp>
+        <p:nvSpPr>
+          <p:cNvPr id="2" name="Title 1"/>
+          <p:cNvSpPr>
+            <a:spLocks noGrp="1"/>
+          </p:cNvSpPr>
+          <p:nvPr>
+            <p:ph type="title"/>
+          </p:nvPr>
+        </p:nvSpPr>
+        <p:spPr/>
+        <p:txBody>
+          <a:bodyPr/>
+          <a:lstStyle/>
+          <a:p>
+            <a:pPr lvl="0" indent="0" marL="0">
+              <a:buNone/>
+            </a:pPr>
+            <a:r>
+              <a:rPr/>
+              <a:t>Stop. Be outside. Think.</a:t>
+            </a:r>
+          </a:p>
+        </p:txBody>
+      </p:sp>
+      <p:sp>
+        <p:nvSpPr>
+          <p:cNvPr id="3" name="Content Placeholder 2"/>
+          <p:cNvSpPr>
+            <a:spLocks noGrp="1"/>
+          </p:cNvSpPr>
+          <p:nvPr>
+            <p:ph idx="1"/>
+          </p:nvPr>
+        </p:nvSpPr>
+        <p:spPr/>
+        <p:txBody>
+          <a:bodyPr/>
+          <a:lstStyle/>
+          <a:p>
+            <a:pPr lvl="0" indent="0" marL="0">
+              <a:buNone/>
+            </a:pPr>
+            <a:r>
+              <a:rPr/>
+              <a:t>Recall a time when you were the </a:t>
+            </a:r>
+            <a:r>
+              <a:rPr i="1"/>
+              <a:t>object</a:t>
+            </a:r>
+            <a:r>
+              <a:rPr/>
+              <a:t> in an educational transaction, where ‘teaching’ or ‘assessing’ was something done </a:t>
+            </a:r>
+            <a:r>
+              <a:rPr b="1"/>
+              <a:t>to</a:t>
+            </a:r>
+            <a:r>
+              <a:rPr/>
+              <a:t> you. What might YOU do to avoid commoditizing grades in your practice?</a:t>
+            </a:r>
+          </a:p>
+        </p:txBody>
+      </p:sp>
+    </p:spTree>
+  </p:cSld>
+</p:sld>
+</file>
+
+<file path=ppt/slides/slide36.xml><?xml version="1.0" encoding="utf-8"?>
+<p:sld xmlns:a="http://schemas.openxmlformats.org/drawingml/2006/main" xmlns:r="http://schemas.openxmlformats.org/officeDocument/2006/relationships" xmlns:p="http://schemas.openxmlformats.org/presentationml/2006/main">
+  <p:cSld>
+    <p:spTree>
+      <p:nvGrpSpPr>
+        <p:cNvPr id="1" name=""/>
+        <p:cNvGrpSpPr/>
+        <p:nvPr/>
+      </p:nvGrpSpPr>
+      <p:grpSpPr>
+        <a:xfrm>
+          <a:off x="0" y="0"/>
+          <a:ext cx="0" cy="0"/>
+          <a:chOff x="0" y="0"/>
+          <a:chExt cx="0" cy="0"/>
+        </a:xfrm>
+      </p:grpSpPr>
+      <p:sp>
+        <p:nvSpPr>
+          <p:cNvPr id="3" name="Content Placeholder 2"/>
+          <p:cNvSpPr>
+            <a:spLocks noGrp="1"/>
+          </p:cNvSpPr>
+          <p:nvPr>
+            <p:ph idx="1"/>
+          </p:nvPr>
+        </p:nvSpPr>
+        <p:spPr/>
+        <p:txBody>
+          <a:bodyPr/>
+          <a:lstStyle/>
+          <a:p>
+            <a:pPr lvl="0" indent="0" marL="0">
+              <a:spcBef>
+                <a:spcPts val="3000"/>
+              </a:spcBef>
+              <a:buNone/>
+            </a:pPr>
+            <a:r>
+              <a:rPr b="1"/>
+              <a:t>References</a:t>
+            </a:r>
+          </a:p>
+          <a:p>
+            <a:pPr lvl="0" indent="0" marL="0">
+              <a:buNone/>
+            </a:pPr>
+            <a:r>
+              <a:rPr/>
+              <a:t>Freire, P. (1990). </a:t>
+            </a:r>
+            <a:r>
+              <a:rPr i="1"/>
+              <a:t>Pedagogy of the oppressed</a:t>
+            </a:r>
+            <a:r>
+              <a:rPr/>
+              <a:t>. Penguin.</a:t>
+            </a:r>
+          </a:p>
+        </p:txBody>
+      </p:sp>
+    </p:spTree>
+  </p:cSld>
+</p:sld>
+</file>
+
 <file path=ppt/slides/slide4.xml><?xml version="1.0" encoding="utf-8"?>
 <p:sld xmlns:a="http://schemas.openxmlformats.org/drawingml/2006/main" xmlns:r="http://schemas.openxmlformats.org/officeDocument/2006/relationships" xmlns:p="http://schemas.openxmlformats.org/presentationml/2006/main">
   <p:cSld>
@@ -5819,34 +6802,20 @@
           <a:bodyPr/>
           <a:lstStyle/>
           <a:p>
-            <a:pPr lvl="0" indent="0" marL="0">
-              <a:spcBef>
-                <a:spcPts val="3000"/>
-              </a:spcBef>
+            <a:pPr lvl="0" indent="0" marL="1270000">
               <a:buNone/>
             </a:pPr>
             <a:r>
-              <a:rPr b="1"/>
-              <a:t>Purposes of Assessment…</a:t>
-            </a:r>
-          </a:p>
-          <a:p>
-            <a:pPr lvl="0" indent="0" marL="0">
-              <a:buNone/>
-            </a:pPr>
-            <a:r>
-              <a:rPr/>
-              <a:t>…of learning</a:t>
-            </a:r>
-            <a:br/>
-            <a:r>
-              <a:rPr/>
-              <a:t>…for learning</a:t>
-            </a:r>
-            <a:br/>
-            <a:r>
-              <a:rPr/>
-              <a:t>…as learning</a:t>
+              <a:rPr sz="2000"/>
+              <a:t>A grade is an inadequate report of an inaccurate judgement by a biased and variable judge of the extent to which a student has attained an undefined level of mastery of an unknown proportion of an indefinite material. (</a:t>
+            </a:r>
+            <a:r>
+              <a:rPr sz="2000" b="1"/>
+              <a:t>feldmanGradingEquityWhat2019?</a:t>
+            </a:r>
+            <a:r>
+              <a:rPr sz="2000"/>
+              <a:t>)</a:t>
             </a:r>
           </a:p>
         </p:txBody>
@@ -5875,12 +6844,12 @@
       </p:grpSpPr>
       <p:sp>
         <p:nvSpPr>
-          <p:cNvPr id="2" name="Title 1"/>
-          <p:cNvSpPr>
-            <a:spLocks noGrp="1"/>
-          </p:cNvSpPr>
-          <p:nvPr>
-            <p:ph type="title"/>
+          <p:cNvPr id="3" name="Content Placeholder 2"/>
+          <p:cNvSpPr>
+            <a:spLocks noGrp="1"/>
+          </p:cNvSpPr>
+          <p:nvPr>
+            <p:ph idx="1"/>
           </p:nvPr>
         </p:nvSpPr>
         <p:spPr/>
@@ -5889,36 +6858,33 @@
           <a:lstStyle/>
           <a:p>
             <a:pPr lvl="0" indent="0" marL="0">
+              <a:spcBef>
+                <a:spcPts val="3000"/>
+              </a:spcBef>
               <a:buNone/>
             </a:pPr>
             <a:r>
+              <a:rPr b="1"/>
+              <a:t>Purposes of Assessment…</a:t>
+            </a:r>
+          </a:p>
+          <a:p>
+            <a:pPr lvl="0" indent="0" marL="0">
+              <a:buNone/>
+            </a:pPr>
+            <a:r>
               <a:rPr/>
-              <a:t>learning is ontological</a:t>
-            </a:r>
-          </a:p>
-        </p:txBody>
-      </p:sp>
-      <p:sp>
-        <p:nvSpPr>
-          <p:cNvPr id="3" name="Content Placeholder 2"/>
-          <p:cNvSpPr>
-            <a:spLocks noGrp="1"/>
-          </p:cNvSpPr>
-          <p:nvPr>
-            <p:ph idx="1"/>
-          </p:nvPr>
-        </p:nvSpPr>
-        <p:spPr/>
-        <p:txBody>
-          <a:bodyPr/>
-          <a:lstStyle/>
-          <a:p>
-            <a:pPr lvl="0" indent="0" marL="1270000">
-              <a:buNone/>
-            </a:pPr>
-            <a:r>
-              <a:rPr sz="2000"/>
-              <a:t>“The mission of Trinity Western University, as an arm of the Church, is to develop godly Christian leaders: positive, goal-oriented university graduates with thoroughly Christian minds; growing disciples of Jesus Christ who glorify God through fulfilling the Great Commission, serving God and people in the various marketplaces of life.”</a:t>
+              <a:t>…of learning</a:t>
+            </a:r>
+            <a:br/>
+            <a:r>
+              <a:rPr/>
+              <a:t>…for learning</a:t>
+            </a:r>
+            <a:br/>
+            <a:r>
+              <a:rPr/>
+              <a:t>…as learning</a:t>
             </a:r>
           </a:p>
         </p:txBody>
@@ -5965,7 +6931,32 @@
             </a:pPr>
             <a:r>
               <a:rPr/>
-              <a:t>teaching is ontological</a:t>
+              <a:t>learning is ontological</a:t>
+            </a:r>
+          </a:p>
+        </p:txBody>
+      </p:sp>
+      <p:sp>
+        <p:nvSpPr>
+          <p:cNvPr id="3" name="Content Placeholder 2"/>
+          <p:cNvSpPr>
+            <a:spLocks noGrp="1"/>
+          </p:cNvSpPr>
+          <p:nvPr>
+            <p:ph idx="1"/>
+          </p:nvPr>
+        </p:nvSpPr>
+        <p:spPr/>
+        <p:txBody>
+          <a:bodyPr/>
+          <a:lstStyle/>
+          <a:p>
+            <a:pPr lvl="0" indent="0" marL="1270000">
+              <a:buNone/>
+            </a:pPr>
+            <a:r>
+              <a:rPr sz="2000"/>
+              <a:t>“The mission of Trinity Western University, as an arm of the Church, is to develop godly Christian leaders: positive, goal-oriented university graduates with thoroughly Christian minds; growing disciples of Jesus Christ who glorify God through fulfilling the Great Commission, serving God and people in the various marketplaces of life.”</a:t>
             </a:r>
           </a:p>
         </p:txBody>
@@ -6012,7 +7003,7 @@
             </a:pPr>
             <a:r>
               <a:rPr/>
-              <a:t>assessing is ontological</a:t>
+              <a:t>teaching is ontological</a:t>
             </a:r>
           </a:p>
         </p:txBody>
@@ -6059,32 +7050,7 @@
             </a:pPr>
             <a:r>
               <a:rPr/>
-              <a:t>Assessment Identity</a:t>
-            </a:r>
-          </a:p>
-        </p:txBody>
-      </p:sp>
-      <p:sp>
-        <p:nvSpPr>
-          <p:cNvPr id="3" name="Content Placeholder 2"/>
-          <p:cNvSpPr>
-            <a:spLocks noGrp="1"/>
-          </p:cNvSpPr>
-          <p:nvPr>
-            <p:ph idx="1"/>
-          </p:nvPr>
-        </p:nvSpPr>
-        <p:spPr/>
-        <p:txBody>
-          <a:bodyPr/>
-          <a:lstStyle/>
-          <a:p>
-            <a:pPr lvl="0" indent="0" marL="0">
-              <a:buNone/>
-            </a:pPr>
-            <a:r>
-              <a:rPr/>
-              <a:t>beliefs | feelings | knowledge | skills</a:t>
+              <a:t>assessing is ontological</a:t>
             </a:r>
           </a:p>
         </p:txBody>
@@ -6131,7 +7097,32 @@
             </a:pPr>
             <a:r>
               <a:rPr/>
-              <a:t>Discuss with your group how you would characterize your assessment identity as it is and how it came to be.</a:t>
+              <a:t>Assessment Identity</a:t>
+            </a:r>
+          </a:p>
+        </p:txBody>
+      </p:sp>
+      <p:sp>
+        <p:nvSpPr>
+          <p:cNvPr id="3" name="Content Placeholder 2"/>
+          <p:cNvSpPr>
+            <a:spLocks noGrp="1"/>
+          </p:cNvSpPr>
+          <p:nvPr>
+            <p:ph idx="1"/>
+          </p:nvPr>
+        </p:nvSpPr>
+        <p:spPr/>
+        <p:txBody>
+          <a:bodyPr/>
+          <a:lstStyle/>
+          <a:p>
+            <a:pPr lvl="0" indent="0" marL="0">
+              <a:buNone/>
+            </a:pPr>
+            <a:r>
+              <a:rPr/>
+              <a:t>beliefs | feelings | knowledge | skills</a:t>
             </a:r>
           </a:p>
         </p:txBody>

--- a/docs/posts/fpl-assessment/index.pptx
+++ b/docs/posts/fpl-assessment/index.pptx
@@ -5,7 +5,7 @@
     <p:sldMasterId id="2147483648" r:id="rId1"/>
   </p:sldMasterIdLst>
   <p:notesMasterIdLst>
-    <p:notesMasterId r:id="rId38"/>
+    <p:notesMasterId r:id="rId44"/>
   </p:notesMasterIdLst>
   <p:sldIdLst>
     <p:sldId id="256" r:id="rId2"/>
@@ -44,6 +44,12 @@
     <p:sldId id="289" r:id="rId35"/>
     <p:sldId id="290" r:id="rId36"/>
     <p:sldId id="291" r:id="rId37"/>
+    <p:sldId id="292" r:id="rId38"/>
+    <p:sldId id="293" r:id="rId39"/>
+    <p:sldId id="294" r:id="rId40"/>
+    <p:sldId id="295" r:id="rId41"/>
+    <p:sldId id="296" r:id="rId42"/>
+    <p:sldId id="297" r:id="rId43"/>
   </p:sldIdLst>
   <p:sldSz cx="9144000" cy="5143500" type="screen16x9"/>
   <p:notesSz cx="6858000" cy="9144000"/>
@@ -581,7 +587,7 @@
           <a:p>
             <a:fld id="{18BDFEC3-8487-43E8-A154-7C12CBC1FFF2}" type="slidenum">
               <a:rPr lang="en-US"/>
-              <a:t>11</a:t>
+              <a:t>13</a:t>
             </a:fld>
             <a:endParaRPr lang="en-US"/>
           </a:p>
@@ -663,7 +669,7 @@
           <a:p>
             <a:fld id="{18BDFEC3-8487-43E8-A154-7C12CBC1FFF2}" type="slidenum">
               <a:rPr lang="en-US"/>
-              <a:t>12</a:t>
+              <a:t>14</a:t>
             </a:fld>
             <a:endParaRPr lang="en-US"/>
           </a:p>
@@ -745,7 +751,7 @@
           <a:p>
             <a:fld id="{18BDFEC3-8487-43E8-A154-7C12CBC1FFF2}" type="slidenum">
               <a:rPr lang="en-US"/>
-              <a:t>17</a:t>
+              <a:t>19</a:t>
             </a:fld>
             <a:endParaRPr lang="en-US"/>
           </a:p>
@@ -827,7 +833,7 @@
           <a:p>
             <a:fld id="{18BDFEC3-8487-43E8-A154-7C12CBC1FFF2}" type="slidenum">
               <a:rPr lang="en-US"/>
-              <a:t>24</a:t>
+              <a:t>26</a:t>
             </a:fld>
             <a:endParaRPr lang="en-US"/>
           </a:p>
@@ -3934,7 +3940,7 @@
             </a:pPr>
             <a:r>
               <a:rPr/>
-              <a:t>Discuss with your group how you would characterize your assessment identity as it is and how it came to be.</a:t>
+              <a:t>assessing is ontological</a:t>
             </a:r>
           </a:p>
         </p:txBody>
@@ -3963,6 +3969,31 @@
       </p:grpSpPr>
       <p:sp>
         <p:nvSpPr>
+          <p:cNvPr id="2" name="Title 1"/>
+          <p:cNvSpPr>
+            <a:spLocks noGrp="1"/>
+          </p:cNvSpPr>
+          <p:nvPr>
+            <p:ph type="title"/>
+          </p:nvPr>
+        </p:nvSpPr>
+        <p:spPr/>
+        <p:txBody>
+          <a:bodyPr/>
+          <a:lstStyle/>
+          <a:p>
+            <a:pPr lvl="0" indent="0" marL="0">
+              <a:buNone/>
+            </a:pPr>
+            <a:r>
+              <a:rPr/>
+              <a:t>Assessment Identity</a:t>
+            </a:r>
+          </a:p>
+        </p:txBody>
+      </p:sp>
+      <p:sp>
+        <p:nvSpPr>
           <p:cNvPr id="3" name="Content Placeholder 2"/>
           <p:cNvSpPr>
             <a:spLocks noGrp="1"/>
@@ -3977,14 +4008,20 @@
           <a:lstStyle/>
           <a:p>
             <a:pPr lvl="0" indent="0" marL="0">
-              <a:spcBef>
-                <a:spcPts val="3000"/>
-              </a:spcBef>
               <a:buNone/>
             </a:pPr>
             <a:r>
-              <a:rPr b="1"/>
-              <a:t>Highlights?</a:t>
+              <a:rPr/>
+              <a:t>beliefs | feelings | knowledge | skills</a:t>
+            </a:r>
+          </a:p>
+          <a:p>
+            <a:pPr lvl="0" indent="0" marL="0">
+              <a:buNone/>
+            </a:pPr>
+            <a:r>
+              <a:rPr/>
+              <a:t>(Looney et al., 2017)</a:t>
             </a:r>
           </a:p>
         </p:txBody>
@@ -4013,12 +4050,12 @@
       </p:grpSpPr>
       <p:sp>
         <p:nvSpPr>
-          <p:cNvPr id="3" name="Content Placeholder 2"/>
-          <p:cNvSpPr>
-            <a:spLocks noGrp="1"/>
-          </p:cNvSpPr>
-          <p:nvPr>
-            <p:ph idx="1"/>
+          <p:cNvPr id="2" name="Title 1"/>
+          <p:cNvSpPr>
+            <a:spLocks noGrp="1"/>
+          </p:cNvSpPr>
+          <p:nvPr>
+            <p:ph type="title"/>
           </p:nvPr>
         </p:nvSpPr>
         <p:spPr/>
@@ -4027,14 +4064,11 @@
           <a:lstStyle/>
           <a:p>
             <a:pPr lvl="0" indent="0" marL="0">
-              <a:spcBef>
-                <a:spcPts val="3000"/>
-              </a:spcBef>
               <a:buNone/>
             </a:pPr>
             <a:r>
-              <a:rPr b="1"/>
-              <a:t>Agency in Assessment</a:t>
+              <a:rPr/>
+              <a:t>Discuss with your group how you would characterize your assessment identity as it is and how it came to be.</a:t>
             </a:r>
           </a:p>
         </p:txBody>
@@ -4045,6 +4079,106 @@
 </file>
 
 <file path=ppt/slides/slide13.xml><?xml version="1.0" encoding="utf-8"?>
+<p:sld xmlns:a="http://schemas.openxmlformats.org/drawingml/2006/main" xmlns:r="http://schemas.openxmlformats.org/officeDocument/2006/relationships" xmlns:p="http://schemas.openxmlformats.org/presentationml/2006/main">
+  <p:cSld>
+    <p:spTree>
+      <p:nvGrpSpPr>
+        <p:cNvPr id="1" name=""/>
+        <p:cNvGrpSpPr/>
+        <p:nvPr/>
+      </p:nvGrpSpPr>
+      <p:grpSpPr>
+        <a:xfrm>
+          <a:off x="0" y="0"/>
+          <a:ext cx="0" cy="0"/>
+          <a:chOff x="0" y="0"/>
+          <a:chExt cx="0" cy="0"/>
+        </a:xfrm>
+      </p:grpSpPr>
+      <p:sp>
+        <p:nvSpPr>
+          <p:cNvPr id="3" name="Content Placeholder 2"/>
+          <p:cNvSpPr>
+            <a:spLocks noGrp="1"/>
+          </p:cNvSpPr>
+          <p:nvPr>
+            <p:ph idx="1"/>
+          </p:nvPr>
+        </p:nvSpPr>
+        <p:spPr/>
+        <p:txBody>
+          <a:bodyPr/>
+          <a:lstStyle/>
+          <a:p>
+            <a:pPr lvl="0" indent="0" marL="0">
+              <a:spcBef>
+                <a:spcPts val="3000"/>
+              </a:spcBef>
+              <a:buNone/>
+            </a:pPr>
+            <a:r>
+              <a:rPr b="1"/>
+              <a:t>Highlights?</a:t>
+            </a:r>
+          </a:p>
+        </p:txBody>
+      </p:sp>
+    </p:spTree>
+  </p:cSld>
+</p:sld>
+</file>
+
+<file path=ppt/slides/slide14.xml><?xml version="1.0" encoding="utf-8"?>
+<p:sld xmlns:a="http://schemas.openxmlformats.org/drawingml/2006/main" xmlns:r="http://schemas.openxmlformats.org/officeDocument/2006/relationships" xmlns:p="http://schemas.openxmlformats.org/presentationml/2006/main">
+  <p:cSld>
+    <p:spTree>
+      <p:nvGrpSpPr>
+        <p:cNvPr id="1" name=""/>
+        <p:cNvGrpSpPr/>
+        <p:nvPr/>
+      </p:nvGrpSpPr>
+      <p:grpSpPr>
+        <a:xfrm>
+          <a:off x="0" y="0"/>
+          <a:ext cx="0" cy="0"/>
+          <a:chOff x="0" y="0"/>
+          <a:chExt cx="0" cy="0"/>
+        </a:xfrm>
+      </p:grpSpPr>
+      <p:sp>
+        <p:nvSpPr>
+          <p:cNvPr id="3" name="Content Placeholder 2"/>
+          <p:cNvSpPr>
+            <a:spLocks noGrp="1"/>
+          </p:cNvSpPr>
+          <p:nvPr>
+            <p:ph idx="1"/>
+          </p:nvPr>
+        </p:nvSpPr>
+        <p:spPr/>
+        <p:txBody>
+          <a:bodyPr/>
+          <a:lstStyle/>
+          <a:p>
+            <a:pPr lvl="0" indent="0" marL="0">
+              <a:spcBef>
+                <a:spcPts val="3000"/>
+              </a:spcBef>
+              <a:buNone/>
+            </a:pPr>
+            <a:r>
+              <a:rPr b="1"/>
+              <a:t>Agency in Assessment</a:t>
+            </a:r>
+          </a:p>
+        </p:txBody>
+      </p:sp>
+    </p:spTree>
+  </p:cSld>
+</p:sld>
+</file>
+
+<file path=ppt/slides/slide15.xml><?xml version="1.0" encoding="utf-8"?>
 <p:sld xmlns:a="http://schemas.openxmlformats.org/drawingml/2006/main" xmlns:r="http://schemas.openxmlformats.org/officeDocument/2006/relationships" xmlns:p="http://schemas.openxmlformats.org/presentationml/2006/main">
   <p:cSld>
     <p:spTree>
@@ -4288,108 +4422,6 @@
 </p:sld>
 </file>
 
-<file path=ppt/slides/slide14.xml><?xml version="1.0" encoding="utf-8"?>
-<p:sld xmlns:a="http://schemas.openxmlformats.org/drawingml/2006/main" xmlns:r="http://schemas.openxmlformats.org/officeDocument/2006/relationships" xmlns:p="http://schemas.openxmlformats.org/presentationml/2006/main">
-  <p:cSld>
-    <p:spTree>
-      <p:nvGrpSpPr>
-        <p:cNvPr id="1" name=""/>
-        <p:cNvGrpSpPr/>
-        <p:nvPr/>
-      </p:nvGrpSpPr>
-      <p:grpSpPr>
-        <a:xfrm>
-          <a:off x="0" y="0"/>
-          <a:ext cx="0" cy="0"/>
-          <a:chOff x="0" y="0"/>
-          <a:chExt cx="0" cy="0"/>
-        </a:xfrm>
-      </p:grpSpPr>
-      <p:sp>
-        <p:nvSpPr>
-          <p:cNvPr id="3" name="Content Placeholder 2"/>
-          <p:cNvSpPr>
-            <a:spLocks noGrp="1"/>
-          </p:cNvSpPr>
-          <p:nvPr>
-            <p:ph idx="1"/>
-          </p:nvPr>
-        </p:nvSpPr>
-        <p:spPr/>
-        <p:txBody>
-          <a:bodyPr/>
-          <a:lstStyle/>
-          <a:p>
-            <a:pPr lvl="0" indent="0" marL="1270000">
-              <a:buNone/>
-            </a:pPr>
-            <a:r>
-              <a:rPr sz="2000"/>
-              <a:t>The University-wide system of percentage equivalents is shown in the table below [next slide]. </a:t>
-            </a:r>
-            <a:r>
-              <a:rPr sz="2000" i="1"/>
-              <a:t>Faculty members may deviate from this scale</a:t>
-            </a:r>
-            <a:r>
-              <a:rPr sz="2000"/>
-              <a:t>; however, if they do so, they must indicate, in their course syllabus, the percentage equivalency system they use.</a:t>
-            </a:r>
-          </a:p>
-        </p:txBody>
-      </p:sp>
-    </p:spTree>
-  </p:cSld>
-</p:sld>
-</file>
-
-<file path=ppt/slides/slide15.xml><?xml version="1.0" encoding="utf-8"?>
-<p:sld xmlns:a="http://schemas.openxmlformats.org/drawingml/2006/main" xmlns:r="http://schemas.openxmlformats.org/officeDocument/2006/relationships" xmlns:p="http://schemas.openxmlformats.org/presentationml/2006/main">
-  <p:cSld>
-    <p:spTree>
-      <p:nvGrpSpPr>
-        <p:cNvPr id="1" name=""/>
-        <p:cNvGrpSpPr/>
-        <p:nvPr/>
-      </p:nvGrpSpPr>
-      <p:grpSpPr>
-        <a:xfrm>
-          <a:off x="0" y="0"/>
-          <a:ext cx="0" cy="0"/>
-          <a:chOff x="0" y="0"/>
-          <a:chExt cx="0" cy="0"/>
-        </a:xfrm>
-      </p:grpSpPr>
-      <p:sp>
-        <p:nvSpPr>
-          <p:cNvPr id="2" name="Title 1"/>
-          <p:cNvSpPr>
-            <a:spLocks noGrp="1"/>
-          </p:cNvSpPr>
-          <p:nvPr>
-            <p:ph type="title"/>
-          </p:nvPr>
-        </p:nvSpPr>
-        <p:spPr/>
-        <p:txBody>
-          <a:bodyPr/>
-          <a:lstStyle/>
-          <a:p>
-            <a:pPr lvl="0" indent="0" marL="0">
-              <a:buNone/>
-            </a:pPr>
-            <a:r>
-              <a:rPr/>
-              <a:t>What do you notice? What do you wonder?</a:t>
-            </a:r>
-          </a:p>
-        </p:txBody>
-      </p:sp>
-    </p:spTree>
-  </p:cSld>
-</p:sld>
-</file>
-
 <file path=ppt/slides/slide16.xml><?xml version="1.0" encoding="utf-8"?>
 <p:sld xmlns:a="http://schemas.openxmlformats.org/drawingml/2006/main" xmlns:r="http://schemas.openxmlformats.org/officeDocument/2006/relationships" xmlns:p="http://schemas.openxmlformats.org/presentationml/2006/main">
   <p:cSld>
@@ -4407,696 +4439,39 @@
           <a:chExt cx="0" cy="0"/>
         </a:xfrm>
       </p:grpSpPr>
-      <p:graphicFrame>
-        <p:nvGraphicFramePr>
-          <p:cNvPr id="6" name="Content Placeholder 5"/>
-          <p:cNvGraphicFramePr>
-            <a:graphicFrameLocks noGrp="1"/>
-          </p:cNvGraphicFramePr>
+      <p:sp>
+        <p:nvSpPr>
+          <p:cNvPr id="3" name="Content Placeholder 2"/>
+          <p:cNvSpPr>
+            <a:spLocks noGrp="1"/>
+          </p:cNvSpPr>
           <p:nvPr>
             <p:ph idx="1"/>
           </p:nvPr>
-        </p:nvGraphicFramePr>
-        <p:xfrm>
-          <a:off x="457200" y="1193800"/>
-          <a:ext cx="8229600" cy="3390900"/>
-        </p:xfrm>
-        <a:graphic>
-          <a:graphicData uri="http://schemas.openxmlformats.org/drawingml/2006/table">
-            <a:tbl>
-              <a:tblPr firstRow="1" bandRow="1">
-                <a:tableStyleId>{5C22544A-7EE6-4342-B048-85BDC9FD1C3A}</a:tableStyleId>
-              </a:tblPr>
-              <a:tblGrid>
-                <a:gridCol w="2933700"/>
-                <a:gridCol w="2552700"/>
-                <a:gridCol w="2743200"/>
-              </a:tblGrid>
-              <a:tr h="0">
-                <a:tc>
-                  <a:txBody>
-                    <a:bodyPr/>
-                    <a:lstStyle/>
-                    <a:p>
-                      <a:pPr lvl="0" indent="0" marL="0">
-                        <a:buNone/>
-                      </a:pPr>
-                      <a:r>
-                        <a:rPr/>
-                        <a:t>letter.grade</a:t>
-                      </a:r>
-                    </a:p>
-                  </a:txBody>
-                  <a:tcPr/>
-                </a:tc>
-                <a:tc>
-                  <a:txBody>
-                    <a:bodyPr/>
-                    <a:lstStyle/>
-                    <a:p>
-                      <a:pPr lvl="0" indent="0" marL="0">
-                        <a:buNone/>
-                      </a:pPr>
-                      <a:r>
-                        <a:rPr/>
-                        <a:t>percentage</a:t>
-                      </a:r>
-                    </a:p>
-                  </a:txBody>
-                  <a:tcPr/>
-                </a:tc>
-                <a:tc>
-                  <a:txBody>
-                    <a:bodyPr/>
-                    <a:lstStyle/>
-                    <a:p>
-                      <a:pPr lvl="0" indent="0" marL="0">
-                        <a:buNone/>
-                      </a:pPr>
-                      <a:r>
-                        <a:rPr/>
-                        <a:t>grade.point</a:t>
-                      </a:r>
-                    </a:p>
-                  </a:txBody>
-                  <a:tcPr/>
-                </a:tc>
-              </a:tr>
-              <a:tr h="0">
-                <a:tc>
-                  <a:txBody>
-                    <a:bodyPr/>
-                    <a:lstStyle/>
-                    <a:p>
-                      <a:pPr lvl="0" indent="0" marL="0">
-                        <a:buNone/>
-                      </a:pPr>
-                      <a:r>
-                        <a:rPr/>
-                        <a:t>A+</a:t>
-                      </a:r>
-                    </a:p>
-                  </a:txBody>
-                </a:tc>
-                <a:tc>
-                  <a:txBody>
-                    <a:bodyPr/>
-                    <a:lstStyle/>
-                    <a:p>
-                      <a:pPr lvl="0" indent="0" marL="0">
-                        <a:buNone/>
-                      </a:pPr>
-                      <a:r>
-                        <a:rPr/>
-                        <a:t>90-100</a:t>
-                      </a:r>
-                    </a:p>
-                  </a:txBody>
-                </a:tc>
-                <a:tc>
-                  <a:txBody>
-                    <a:bodyPr/>
-                    <a:lstStyle/>
-                    <a:p>
-                      <a:pPr lvl="0" indent="0" marL="0">
-                        <a:buNone/>
-                      </a:pPr>
-                      <a:r>
-                        <a:rPr/>
-                        <a:t>4.3</a:t>
-                      </a:r>
-                    </a:p>
-                  </a:txBody>
-                </a:tc>
-              </a:tr>
-              <a:tr h="0">
-                <a:tc>
-                  <a:txBody>
-                    <a:bodyPr/>
-                    <a:lstStyle/>
-                    <a:p>
-                      <a:pPr lvl="0" indent="0" marL="0">
-                        <a:buNone/>
-                      </a:pPr>
-                      <a:r>
-                        <a:rPr/>
-                        <a:t>A</a:t>
-                      </a:r>
-                    </a:p>
-                  </a:txBody>
-                </a:tc>
-                <a:tc>
-                  <a:txBody>
-                    <a:bodyPr/>
-                    <a:lstStyle/>
-                    <a:p>
-                      <a:pPr lvl="0" indent="0" marL="0">
-                        <a:buNone/>
-                      </a:pPr>
-                      <a:r>
-                        <a:rPr/>
-                        <a:t>85-89</a:t>
-                      </a:r>
-                    </a:p>
-                  </a:txBody>
-                </a:tc>
-                <a:tc>
-                  <a:txBody>
-                    <a:bodyPr/>
-                    <a:lstStyle/>
-                    <a:p>
-                      <a:pPr lvl="0" indent="0" marL="0">
-                        <a:buNone/>
-                      </a:pPr>
-                      <a:r>
-                        <a:rPr/>
-                        <a:t>4.0</a:t>
-                      </a:r>
-                    </a:p>
-                  </a:txBody>
-                </a:tc>
-              </a:tr>
-              <a:tr h="0">
-                <a:tc>
-                  <a:txBody>
-                    <a:bodyPr/>
-                    <a:lstStyle/>
-                    <a:p>
-                      <a:pPr lvl="0" indent="0" marL="0">
-                        <a:buNone/>
-                      </a:pPr>
-                      <a:r>
-                        <a:rPr/>
-                        <a:t>A-</a:t>
-                      </a:r>
-                    </a:p>
-                  </a:txBody>
-                </a:tc>
-                <a:tc>
-                  <a:txBody>
-                    <a:bodyPr/>
-                    <a:lstStyle/>
-                    <a:p>
-                      <a:pPr lvl="0" indent="0" marL="0">
-                        <a:buNone/>
-                      </a:pPr>
-                      <a:r>
-                        <a:rPr/>
-                        <a:t>80-84</a:t>
-                      </a:r>
-                    </a:p>
-                  </a:txBody>
-                </a:tc>
-                <a:tc>
-                  <a:txBody>
-                    <a:bodyPr/>
-                    <a:lstStyle/>
-                    <a:p>
-                      <a:pPr lvl="0" indent="0" marL="0">
-                        <a:buNone/>
-                      </a:pPr>
-                      <a:r>
-                        <a:rPr/>
-                        <a:t>3.7</a:t>
-                      </a:r>
-                    </a:p>
-                  </a:txBody>
-                </a:tc>
-              </a:tr>
-              <a:tr h="0">
-                <a:tc>
-                  <a:txBody>
-                    <a:bodyPr/>
-                    <a:lstStyle/>
-                    <a:p>
-                      <a:pPr lvl="0" indent="0" marL="0">
-                        <a:buNone/>
-                      </a:pPr>
-                      <a:r>
-                        <a:rPr/>
-                        <a:t>B+</a:t>
-                      </a:r>
-                    </a:p>
-                  </a:txBody>
-                </a:tc>
-                <a:tc>
-                  <a:txBody>
-                    <a:bodyPr/>
-                    <a:lstStyle/>
-                    <a:p>
-                      <a:pPr lvl="0" indent="0" marL="0">
-                        <a:buNone/>
-                      </a:pPr>
-                      <a:r>
-                        <a:rPr/>
-                        <a:t>77-79</a:t>
-                      </a:r>
-                    </a:p>
-                  </a:txBody>
-                </a:tc>
-                <a:tc>
-                  <a:txBody>
-                    <a:bodyPr/>
-                    <a:lstStyle/>
-                    <a:p>
-                      <a:pPr lvl="0" indent="0" marL="0">
-                        <a:buNone/>
-                      </a:pPr>
-                      <a:r>
-                        <a:rPr/>
-                        <a:t>3.3</a:t>
-                      </a:r>
-                    </a:p>
-                  </a:txBody>
-                </a:tc>
-              </a:tr>
-              <a:tr h="0">
-                <a:tc>
-                  <a:txBody>
-                    <a:bodyPr/>
-                    <a:lstStyle/>
-                    <a:p>
-                      <a:pPr lvl="0" indent="0" marL="0">
-                        <a:buNone/>
-                      </a:pPr>
-                      <a:r>
-                        <a:rPr/>
-                        <a:t>B</a:t>
-                      </a:r>
-                    </a:p>
-                  </a:txBody>
-                </a:tc>
-                <a:tc>
-                  <a:txBody>
-                    <a:bodyPr/>
-                    <a:lstStyle/>
-                    <a:p>
-                      <a:pPr lvl="0" indent="0" marL="0">
-                        <a:buNone/>
-                      </a:pPr>
-                      <a:r>
-                        <a:rPr/>
-                        <a:t>73-76</a:t>
-                      </a:r>
-                    </a:p>
-                  </a:txBody>
-                </a:tc>
-                <a:tc>
-                  <a:txBody>
-                    <a:bodyPr/>
-                    <a:lstStyle/>
-                    <a:p>
-                      <a:pPr lvl="0" indent="0" marL="0">
-                        <a:buNone/>
-                      </a:pPr>
-                      <a:r>
-                        <a:rPr/>
-                        <a:t>3.0</a:t>
-                      </a:r>
-                    </a:p>
-                  </a:txBody>
-                </a:tc>
-              </a:tr>
-              <a:tr h="0">
-                <a:tc>
-                  <a:txBody>
-                    <a:bodyPr/>
-                    <a:lstStyle/>
-                    <a:p>
-                      <a:pPr lvl="0" indent="0" marL="0">
-                        <a:buNone/>
-                      </a:pPr>
-                      <a:r>
-                        <a:rPr/>
-                        <a:t>B-</a:t>
-                      </a:r>
-                    </a:p>
-                  </a:txBody>
-                </a:tc>
-                <a:tc>
-                  <a:txBody>
-                    <a:bodyPr/>
-                    <a:lstStyle/>
-                    <a:p>
-                      <a:pPr lvl="0" indent="0" marL="0">
-                        <a:buNone/>
-                      </a:pPr>
-                      <a:r>
-                        <a:rPr/>
-                        <a:t>70-72</a:t>
-                      </a:r>
-                    </a:p>
-                  </a:txBody>
-                </a:tc>
-                <a:tc>
-                  <a:txBody>
-                    <a:bodyPr/>
-                    <a:lstStyle/>
-                    <a:p>
-                      <a:pPr lvl="0" indent="0" marL="0">
-                        <a:buNone/>
-                      </a:pPr>
-                      <a:r>
-                        <a:rPr/>
-                        <a:t>2.7</a:t>
-                      </a:r>
-                    </a:p>
-                  </a:txBody>
-                </a:tc>
-              </a:tr>
-              <a:tr h="0">
-                <a:tc>
-                  <a:txBody>
-                    <a:bodyPr/>
-                    <a:lstStyle/>
-                    <a:p>
-                      <a:pPr lvl="0" indent="0" marL="0">
-                        <a:buNone/>
-                      </a:pPr>
-                      <a:r>
-                        <a:rPr/>
-                        <a:t>C+</a:t>
-                      </a:r>
-                    </a:p>
-                  </a:txBody>
-                </a:tc>
-                <a:tc>
-                  <a:txBody>
-                    <a:bodyPr/>
-                    <a:lstStyle/>
-                    <a:p>
-                      <a:pPr lvl="0" indent="0" marL="0">
-                        <a:buNone/>
-                      </a:pPr>
-                      <a:r>
-                        <a:rPr/>
-                        <a:t>67-69</a:t>
-                      </a:r>
-                    </a:p>
-                  </a:txBody>
-                </a:tc>
-                <a:tc>
-                  <a:txBody>
-                    <a:bodyPr/>
-                    <a:lstStyle/>
-                    <a:p>
-                      <a:pPr lvl="0" indent="0" marL="0">
-                        <a:buNone/>
-                      </a:pPr>
-                      <a:r>
-                        <a:rPr/>
-                        <a:t>2.3</a:t>
-                      </a:r>
-                    </a:p>
-                  </a:txBody>
-                </a:tc>
-              </a:tr>
-              <a:tr h="0">
-                <a:tc>
-                  <a:txBody>
-                    <a:bodyPr/>
-                    <a:lstStyle/>
-                    <a:p>
-                      <a:pPr lvl="0" indent="0" marL="0">
-                        <a:buNone/>
-                      </a:pPr>
-                      <a:r>
-                        <a:rPr/>
-                        <a:t>C</a:t>
-                      </a:r>
-                    </a:p>
-                  </a:txBody>
-                </a:tc>
-                <a:tc>
-                  <a:txBody>
-                    <a:bodyPr/>
-                    <a:lstStyle/>
-                    <a:p>
-                      <a:pPr lvl="0" indent="0" marL="0">
-                        <a:buNone/>
-                      </a:pPr>
-                      <a:r>
-                        <a:rPr/>
-                        <a:t>63-66</a:t>
-                      </a:r>
-                    </a:p>
-                  </a:txBody>
-                </a:tc>
-                <a:tc>
-                  <a:txBody>
-                    <a:bodyPr/>
-                    <a:lstStyle/>
-                    <a:p>
-                      <a:pPr lvl="0" indent="0" marL="0">
-                        <a:buNone/>
-                      </a:pPr>
-                      <a:r>
-                        <a:rPr/>
-                        <a:t>2.0</a:t>
-                      </a:r>
-                    </a:p>
-                  </a:txBody>
-                </a:tc>
-              </a:tr>
-              <a:tr h="0">
-                <a:tc>
-                  <a:txBody>
-                    <a:bodyPr/>
-                    <a:lstStyle/>
-                    <a:p>
-                      <a:pPr lvl="0" indent="0" marL="0">
-                        <a:buNone/>
-                      </a:pPr>
-                      <a:r>
-                        <a:rPr/>
-                        <a:t>C-</a:t>
-                      </a:r>
-                    </a:p>
-                  </a:txBody>
-                </a:tc>
-                <a:tc>
-                  <a:txBody>
-                    <a:bodyPr/>
-                    <a:lstStyle/>
-                    <a:p>
-                      <a:pPr lvl="0" indent="0" marL="0">
-                        <a:buNone/>
-                      </a:pPr>
-                      <a:r>
-                        <a:rPr/>
-                        <a:t>60-62</a:t>
-                      </a:r>
-                    </a:p>
-                  </a:txBody>
-                </a:tc>
-                <a:tc>
-                  <a:txBody>
-                    <a:bodyPr/>
-                    <a:lstStyle/>
-                    <a:p>
-                      <a:pPr lvl="0" indent="0" marL="0">
-                        <a:buNone/>
-                      </a:pPr>
-                      <a:r>
-                        <a:rPr/>
-                        <a:t>1.7</a:t>
-                      </a:r>
-                    </a:p>
-                  </a:txBody>
-                </a:tc>
-              </a:tr>
-              <a:tr h="0">
-                <a:tc>
-                  <a:txBody>
-                    <a:bodyPr/>
-                    <a:lstStyle/>
-                    <a:p>
-                      <a:pPr lvl="0" indent="0" marL="0">
-                        <a:buNone/>
-                      </a:pPr>
-                      <a:r>
-                        <a:rPr/>
-                        <a:t>D+</a:t>
-                      </a:r>
-                    </a:p>
-                  </a:txBody>
-                </a:tc>
-                <a:tc>
-                  <a:txBody>
-                    <a:bodyPr/>
-                    <a:lstStyle/>
-                    <a:p>
-                      <a:pPr lvl="0" indent="0" marL="0">
-                        <a:buNone/>
-                      </a:pPr>
-                      <a:r>
-                        <a:rPr/>
-                        <a:t>57-59</a:t>
-                      </a:r>
-                    </a:p>
-                  </a:txBody>
-                </a:tc>
-                <a:tc>
-                  <a:txBody>
-                    <a:bodyPr/>
-                    <a:lstStyle/>
-                    <a:p>
-                      <a:pPr lvl="0" indent="0" marL="0">
-                        <a:buNone/>
-                      </a:pPr>
-                      <a:r>
-                        <a:rPr/>
-                        <a:t>1.3</a:t>
-                      </a:r>
-                    </a:p>
-                  </a:txBody>
-                </a:tc>
-              </a:tr>
-              <a:tr h="0">
-                <a:tc>
-                  <a:txBody>
-                    <a:bodyPr/>
-                    <a:lstStyle/>
-                    <a:p>
-                      <a:pPr lvl="0" indent="0" marL="0">
-                        <a:buNone/>
-                      </a:pPr>
-                      <a:r>
-                        <a:rPr/>
-                        <a:t>D</a:t>
-                      </a:r>
-                    </a:p>
-                  </a:txBody>
-                </a:tc>
-                <a:tc>
-                  <a:txBody>
-                    <a:bodyPr/>
-                    <a:lstStyle/>
-                    <a:p>
-                      <a:pPr lvl="0" indent="0" marL="0">
-                        <a:buNone/>
-                      </a:pPr>
-                      <a:r>
-                        <a:rPr/>
-                        <a:t>53-56</a:t>
-                      </a:r>
-                    </a:p>
-                  </a:txBody>
-                </a:tc>
-                <a:tc>
-                  <a:txBody>
-                    <a:bodyPr/>
-                    <a:lstStyle/>
-                    <a:p>
-                      <a:pPr lvl="0" indent="0" marL="0">
-                        <a:buNone/>
-                      </a:pPr>
-                      <a:r>
-                        <a:rPr/>
-                        <a:t>1.0</a:t>
-                      </a:r>
-                    </a:p>
-                  </a:txBody>
-                </a:tc>
-              </a:tr>
-              <a:tr h="0">
-                <a:tc>
-                  <a:txBody>
-                    <a:bodyPr/>
-                    <a:lstStyle/>
-                    <a:p>
-                      <a:pPr lvl="0" indent="0" marL="0">
-                        <a:buNone/>
-                      </a:pPr>
-                      <a:r>
-                        <a:rPr/>
-                        <a:t>D-</a:t>
-                      </a:r>
-                    </a:p>
-                  </a:txBody>
-                </a:tc>
-                <a:tc>
-                  <a:txBody>
-                    <a:bodyPr/>
-                    <a:lstStyle/>
-                    <a:p>
-                      <a:pPr lvl="0" indent="0" marL="0">
-                        <a:buNone/>
-                      </a:pPr>
-                      <a:r>
-                        <a:rPr/>
-                        <a:t>50-52</a:t>
-                      </a:r>
-                    </a:p>
-                  </a:txBody>
-                </a:tc>
-                <a:tc>
-                  <a:txBody>
-                    <a:bodyPr/>
-                    <a:lstStyle/>
-                    <a:p>
-                      <a:pPr lvl="0" indent="0" marL="0">
-                        <a:buNone/>
-                      </a:pPr>
-                      <a:r>
-                        <a:rPr/>
-                        <a:t>0.7</a:t>
-                      </a:r>
-                    </a:p>
-                  </a:txBody>
-                </a:tc>
-              </a:tr>
-              <a:tr h="0">
-                <a:tc>
-                  <a:txBody>
-                    <a:bodyPr/>
-                    <a:lstStyle/>
-                    <a:p>
-                      <a:pPr lvl="0" indent="0" marL="0">
-                        <a:buNone/>
-                      </a:pPr>
-                      <a:r>
-                        <a:rPr/>
-                        <a:t>F</a:t>
-                      </a:r>
-                    </a:p>
-                  </a:txBody>
-                </a:tc>
-                <a:tc>
-                  <a:txBody>
-                    <a:bodyPr/>
-                    <a:lstStyle/>
-                    <a:p>
-                      <a:pPr lvl="0" indent="0" marL="0">
-                        <a:buNone/>
-                      </a:pPr>
-                      <a:r>
-                        <a:rPr/>
-                        <a:t>Below 50</a:t>
-                      </a:r>
-                    </a:p>
-                  </a:txBody>
-                </a:tc>
-                <a:tc>
-                  <a:txBody>
-                    <a:bodyPr/>
-                    <a:lstStyle/>
-                    <a:p>
-                      <a:pPr lvl="0" indent="0" marL="0">
-                        <a:buNone/>
-                      </a:pPr>
-                      <a:r>
-                        <a:rPr/>
-                        <a:t>0.0</a:t>
-                      </a:r>
-                    </a:p>
-                  </a:txBody>
-                </a:tc>
-              </a:tr>
-            </a:tbl>
-          </a:graphicData>
-        </a:graphic>
-      </p:graphicFrame>
+        </p:nvSpPr>
+        <p:spPr/>
+        <p:txBody>
+          <a:bodyPr/>
+          <a:lstStyle/>
+          <a:p>
+            <a:pPr lvl="0" indent="0" marL="1270000">
+              <a:buNone/>
+            </a:pPr>
+            <a:r>
+              <a:rPr sz="2000"/>
+              <a:t>The University-wide system of percentage equivalents is shown in the table below [upcoming slide]. </a:t>
+            </a:r>
+            <a:r>
+              <a:rPr sz="2000" i="1"/>
+              <a:t>Faculty members may deviate from this scale</a:t>
+            </a:r>
+            <a:r>
+              <a:rPr sz="2000"/>
+              <a:t>; however, if they do so, they must indicate, in their course syllabus, the percentage equivalency system they use.</a:t>
+            </a:r>
+          </a:p>
+        </p:txBody>
+      </p:sp>
     </p:spTree>
   </p:cSld>
 </p:sld>
@@ -5121,12 +4496,12 @@
       </p:grpSpPr>
       <p:sp>
         <p:nvSpPr>
-          <p:cNvPr id="3" name="Content Placeholder 2"/>
-          <p:cNvSpPr>
-            <a:spLocks noGrp="1"/>
-          </p:cNvSpPr>
-          <p:nvPr>
-            <p:ph idx="1"/>
+          <p:cNvPr id="2" name="Title 1"/>
+          <p:cNvSpPr>
+            <a:spLocks noGrp="1"/>
+          </p:cNvSpPr>
+          <p:nvPr>
+            <p:ph type="title"/>
           </p:nvPr>
         </p:nvSpPr>
         <p:spPr/>
@@ -5135,79 +4510,11 @@
           <a:lstStyle/>
           <a:p>
             <a:pPr lvl="0" indent="0" marL="0">
-              <a:spcBef>
-                <a:spcPts val="3000"/>
-              </a:spcBef>
               <a:buNone/>
             </a:pPr>
             <a:r>
-              <a:rPr b="1"/>
-              <a:t>Breakout Cooperative Activity</a:t>
-            </a:r>
-          </a:p>
-          <a:p>
-            <a:pPr lvl="0" indent="0" marL="0">
-              <a:buNone/>
-            </a:pPr>
-            <a:r>
               <a:rPr/>
-              <a:t>10 mins</a:t>
-            </a:r>
-          </a:p>
-          <a:p>
-            <a:pPr lvl="0"/>
-            <a:r>
-              <a:rPr/>
-              <a:t>shared MS Excel file which contains </a:t>
-            </a:r>
-            <a:r>
-              <a:rPr i="1"/>
-              <a:t>simulated</a:t>
-            </a:r>
-            <a:r>
-              <a:rPr/>
-              <a:t> grade data from a class of 100 learners who completed 11 assignments, two papers, one midterm exam, and one final exam.</a:t>
-            </a:r>
-          </a:p>
-          <a:p>
-            <a:pPr lvl="0"/>
-            <a:r>
-              <a:rPr/>
-              <a:t>all items in the gradebook are recorded as a raw score out of 100</a:t>
-            </a:r>
-          </a:p>
-          <a:p>
-            <a:pPr lvl="0"/>
-            <a:r>
-              <a:rPr/>
-              <a:t>download the file and open in MS Excel</a:t>
-            </a:r>
-          </a:p>
-          <a:p>
-            <a:pPr lvl="0"/>
-            <a:r>
-              <a:rPr/>
-              <a:t>using the tools in Excel, decide as a group how you would report these learners’ final letter grades</a:t>
-            </a:r>
-          </a:p>
-          <a:p>
-            <a:pPr lvl="0"/>
-            <a:r>
-              <a:rPr/>
-              <a:t>calculate the grades in the columns to the right of the data</a:t>
-            </a:r>
-          </a:p>
-          <a:p>
-            <a:pPr lvl="0"/>
-            <a:r>
-              <a:rPr/>
-              <a:t>Use the </a:t>
-            </a:r>
-            <a:r>
-              <a:rPr>
-                <a:hlinkClick r:id="rId3"/>
-              </a:rPr>
-              <a:t>TWU Standard Grading System</a:t>
+              <a:t>What do you notice? What do you wonder?</a:t>
             </a:r>
           </a:p>
         </p:txBody>
@@ -5218,6 +4525,927 @@
 </file>
 
 <file path=ppt/slides/slide18.xml><?xml version="1.0" encoding="utf-8"?>
+<p:sld xmlns:a="http://schemas.openxmlformats.org/drawingml/2006/main" xmlns:r="http://schemas.openxmlformats.org/officeDocument/2006/relationships" xmlns:p="http://schemas.openxmlformats.org/presentationml/2006/main">
+  <p:cSld>
+    <p:spTree>
+      <p:nvGrpSpPr>
+        <p:cNvPr id="1" name=""/>
+        <p:cNvGrpSpPr/>
+        <p:nvPr/>
+      </p:nvGrpSpPr>
+      <p:grpSpPr>
+        <a:xfrm>
+          <a:off x="0" y="0"/>
+          <a:ext cx="0" cy="0"/>
+          <a:chOff x="0" y="0"/>
+          <a:chExt cx="0" cy="0"/>
+        </a:xfrm>
+      </p:grpSpPr>
+      <p:sp>
+        <p:nvSpPr>
+          <p:cNvPr id="4" name="Text Placeholder 3"/>
+          <p:cNvSpPr>
+            <a:spLocks noGrp="1"/>
+          </p:cNvSpPr>
+          <p:nvPr>
+            <p:ph idx="2" sz="half" type="body"/>
+          </p:nvPr>
+        </p:nvSpPr>
+        <p:spPr/>
+        <p:txBody>
+          <a:bodyPr/>
+          <a:lstStyle/>
+          <a:p>
+            <a:pPr lvl="0" indent="0" marL="0">
+              <a:spcBef>
+                <a:spcPts val="3000"/>
+              </a:spcBef>
+              <a:buNone/>
+            </a:pPr>
+            <a:r>
+              <a:rPr b="1"/>
+              <a:t>Percentage Equivalents</a:t>
+            </a:r>
+          </a:p>
+          <a:p>
+            <a:pPr lvl="0" indent="0" marL="0">
+              <a:buNone/>
+            </a:pPr>
+          </a:p>
+        </p:txBody>
+      </p:sp>
+      <p:graphicFrame>
+        <p:nvGraphicFramePr>
+          <p:cNvPr id="6" name="Content Placeholder 5"/>
+          <p:cNvGraphicFramePr>
+            <a:graphicFrameLocks noGrp="1"/>
+          </p:cNvGraphicFramePr>
+          <p:nvPr>
+            <p:ph idx="1"/>
+          </p:nvPr>
+        </p:nvGraphicFramePr>
+        <p:xfrm>
+          <a:off x="3568700" y="203200"/>
+          <a:ext cx="5105400" cy="4381500"/>
+        </p:xfrm>
+        <a:graphic>
+          <a:graphicData uri="http://schemas.openxmlformats.org/drawingml/2006/table">
+            <a:tbl>
+              <a:tblPr firstRow="1" bandRow="1">
+                <a:tableStyleId>{5C22544A-7EE6-4342-B048-85BDC9FD1C3A}</a:tableStyleId>
+              </a:tblPr>
+              <a:tblGrid>
+                <a:gridCol w="1701800"/>
+                <a:gridCol w="1701800"/>
+                <a:gridCol w="1701800"/>
+              </a:tblGrid>
+              <a:tr h="0">
+                <a:tc>
+                  <a:txBody>
+                    <a:bodyPr/>
+                    <a:lstStyle/>
+                    <a:p>
+                      <a:pPr lvl="0" indent="0" marL="0" algn="l">
+                        <a:buNone/>
+                      </a:pPr>
+                      <a:r>
+                        <a:rPr/>
+                        <a:t>letter.grade</a:t>
+                      </a:r>
+                    </a:p>
+                  </a:txBody>
+                  <a:tcPr/>
+                </a:tc>
+                <a:tc>
+                  <a:txBody>
+                    <a:bodyPr/>
+                    <a:lstStyle/>
+                    <a:p>
+                      <a:pPr lvl="0" indent="0" marL="0" algn="l">
+                        <a:buNone/>
+                      </a:pPr>
+                      <a:r>
+                        <a:rPr/>
+                        <a:t>percentage</a:t>
+                      </a:r>
+                    </a:p>
+                  </a:txBody>
+                  <a:tcPr/>
+                </a:tc>
+                <a:tc>
+                  <a:txBody>
+                    <a:bodyPr/>
+                    <a:lstStyle/>
+                    <a:p>
+                      <a:pPr lvl="0" indent="0" marL="0" algn="r">
+                        <a:buNone/>
+                      </a:pPr>
+                      <a:r>
+                        <a:rPr/>
+                        <a:t>grade.point</a:t>
+                      </a:r>
+                    </a:p>
+                  </a:txBody>
+                  <a:tcPr/>
+                </a:tc>
+              </a:tr>
+              <a:tr h="0">
+                <a:tc>
+                  <a:txBody>
+                    <a:bodyPr/>
+                    <a:lstStyle/>
+                    <a:p>
+                      <a:pPr lvl="0" indent="0" marL="0" algn="l">
+                        <a:buNone/>
+                      </a:pPr>
+                      <a:r>
+                        <a:rPr/>
+                        <a:t>A+</a:t>
+                      </a:r>
+                    </a:p>
+                  </a:txBody>
+                </a:tc>
+                <a:tc>
+                  <a:txBody>
+                    <a:bodyPr/>
+                    <a:lstStyle/>
+                    <a:p>
+                      <a:pPr lvl="0" indent="0" marL="0" algn="l">
+                        <a:buNone/>
+                      </a:pPr>
+                      <a:r>
+                        <a:rPr/>
+                        <a:t>90-100</a:t>
+                      </a:r>
+                    </a:p>
+                  </a:txBody>
+                </a:tc>
+                <a:tc>
+                  <a:txBody>
+                    <a:bodyPr/>
+                    <a:lstStyle/>
+                    <a:p>
+                      <a:pPr lvl="0" indent="0" marL="0" algn="r">
+                        <a:buNone/>
+                      </a:pPr>
+                      <a:r>
+                        <a:rPr/>
+                        <a:t>4.3</a:t>
+                      </a:r>
+                    </a:p>
+                  </a:txBody>
+                </a:tc>
+              </a:tr>
+              <a:tr h="0">
+                <a:tc>
+                  <a:txBody>
+                    <a:bodyPr/>
+                    <a:lstStyle/>
+                    <a:p>
+                      <a:pPr lvl="0" indent="0" marL="0" algn="l">
+                        <a:buNone/>
+                      </a:pPr>
+                      <a:r>
+                        <a:rPr/>
+                        <a:t>A</a:t>
+                      </a:r>
+                    </a:p>
+                  </a:txBody>
+                </a:tc>
+                <a:tc>
+                  <a:txBody>
+                    <a:bodyPr/>
+                    <a:lstStyle/>
+                    <a:p>
+                      <a:pPr lvl="0" indent="0" marL="0" algn="l">
+                        <a:buNone/>
+                      </a:pPr>
+                      <a:r>
+                        <a:rPr/>
+                        <a:t>85-89</a:t>
+                      </a:r>
+                    </a:p>
+                  </a:txBody>
+                </a:tc>
+                <a:tc>
+                  <a:txBody>
+                    <a:bodyPr/>
+                    <a:lstStyle/>
+                    <a:p>
+                      <a:pPr lvl="0" indent="0" marL="0" algn="r">
+                        <a:buNone/>
+                      </a:pPr>
+                      <a:r>
+                        <a:rPr/>
+                        <a:t>4.0</a:t>
+                      </a:r>
+                    </a:p>
+                  </a:txBody>
+                </a:tc>
+              </a:tr>
+              <a:tr h="0">
+                <a:tc>
+                  <a:txBody>
+                    <a:bodyPr/>
+                    <a:lstStyle/>
+                    <a:p>
+                      <a:pPr lvl="0" indent="0" marL="0" algn="l">
+                        <a:buNone/>
+                      </a:pPr>
+                      <a:r>
+                        <a:rPr/>
+                        <a:t>A-</a:t>
+                      </a:r>
+                    </a:p>
+                  </a:txBody>
+                </a:tc>
+                <a:tc>
+                  <a:txBody>
+                    <a:bodyPr/>
+                    <a:lstStyle/>
+                    <a:p>
+                      <a:pPr lvl="0" indent="0" marL="0" algn="l">
+                        <a:buNone/>
+                      </a:pPr>
+                      <a:r>
+                        <a:rPr/>
+                        <a:t>80-84</a:t>
+                      </a:r>
+                    </a:p>
+                  </a:txBody>
+                </a:tc>
+                <a:tc>
+                  <a:txBody>
+                    <a:bodyPr/>
+                    <a:lstStyle/>
+                    <a:p>
+                      <a:pPr lvl="0" indent="0" marL="0" algn="r">
+                        <a:buNone/>
+                      </a:pPr>
+                      <a:r>
+                        <a:rPr/>
+                        <a:t>3.7</a:t>
+                      </a:r>
+                    </a:p>
+                  </a:txBody>
+                </a:tc>
+              </a:tr>
+              <a:tr h="0">
+                <a:tc>
+                  <a:txBody>
+                    <a:bodyPr/>
+                    <a:lstStyle/>
+                    <a:p>
+                      <a:pPr lvl="0" indent="0" marL="0" algn="l">
+                        <a:buNone/>
+                      </a:pPr>
+                      <a:r>
+                        <a:rPr/>
+                        <a:t>B+</a:t>
+                      </a:r>
+                    </a:p>
+                  </a:txBody>
+                </a:tc>
+                <a:tc>
+                  <a:txBody>
+                    <a:bodyPr/>
+                    <a:lstStyle/>
+                    <a:p>
+                      <a:pPr lvl="0" indent="0" marL="0" algn="l">
+                        <a:buNone/>
+                      </a:pPr>
+                      <a:r>
+                        <a:rPr/>
+                        <a:t>77-79</a:t>
+                      </a:r>
+                    </a:p>
+                  </a:txBody>
+                </a:tc>
+                <a:tc>
+                  <a:txBody>
+                    <a:bodyPr/>
+                    <a:lstStyle/>
+                    <a:p>
+                      <a:pPr lvl="0" indent="0" marL="0" algn="r">
+                        <a:buNone/>
+                      </a:pPr>
+                      <a:r>
+                        <a:rPr/>
+                        <a:t>3.3</a:t>
+                      </a:r>
+                    </a:p>
+                  </a:txBody>
+                </a:tc>
+              </a:tr>
+              <a:tr h="0">
+                <a:tc>
+                  <a:txBody>
+                    <a:bodyPr/>
+                    <a:lstStyle/>
+                    <a:p>
+                      <a:pPr lvl="0" indent="0" marL="0" algn="l">
+                        <a:buNone/>
+                      </a:pPr>
+                      <a:r>
+                        <a:rPr/>
+                        <a:t>B</a:t>
+                      </a:r>
+                    </a:p>
+                  </a:txBody>
+                </a:tc>
+                <a:tc>
+                  <a:txBody>
+                    <a:bodyPr/>
+                    <a:lstStyle/>
+                    <a:p>
+                      <a:pPr lvl="0" indent="0" marL="0" algn="l">
+                        <a:buNone/>
+                      </a:pPr>
+                      <a:r>
+                        <a:rPr/>
+                        <a:t>73-76</a:t>
+                      </a:r>
+                    </a:p>
+                  </a:txBody>
+                </a:tc>
+                <a:tc>
+                  <a:txBody>
+                    <a:bodyPr/>
+                    <a:lstStyle/>
+                    <a:p>
+                      <a:pPr lvl="0" indent="0" marL="0" algn="r">
+                        <a:buNone/>
+                      </a:pPr>
+                      <a:r>
+                        <a:rPr/>
+                        <a:t>3.0</a:t>
+                      </a:r>
+                    </a:p>
+                  </a:txBody>
+                </a:tc>
+              </a:tr>
+              <a:tr h="0">
+                <a:tc>
+                  <a:txBody>
+                    <a:bodyPr/>
+                    <a:lstStyle/>
+                    <a:p>
+                      <a:pPr lvl="0" indent="0" marL="0" algn="l">
+                        <a:buNone/>
+                      </a:pPr>
+                      <a:r>
+                        <a:rPr/>
+                        <a:t>B-</a:t>
+                      </a:r>
+                    </a:p>
+                  </a:txBody>
+                </a:tc>
+                <a:tc>
+                  <a:txBody>
+                    <a:bodyPr/>
+                    <a:lstStyle/>
+                    <a:p>
+                      <a:pPr lvl="0" indent="0" marL="0" algn="l">
+                        <a:buNone/>
+                      </a:pPr>
+                      <a:r>
+                        <a:rPr/>
+                        <a:t>70-72</a:t>
+                      </a:r>
+                    </a:p>
+                  </a:txBody>
+                </a:tc>
+                <a:tc>
+                  <a:txBody>
+                    <a:bodyPr/>
+                    <a:lstStyle/>
+                    <a:p>
+                      <a:pPr lvl="0" indent="0" marL="0" algn="r">
+                        <a:buNone/>
+                      </a:pPr>
+                      <a:r>
+                        <a:rPr/>
+                        <a:t>2.7</a:t>
+                      </a:r>
+                    </a:p>
+                  </a:txBody>
+                </a:tc>
+              </a:tr>
+              <a:tr h="0">
+                <a:tc>
+                  <a:txBody>
+                    <a:bodyPr/>
+                    <a:lstStyle/>
+                    <a:p>
+                      <a:pPr lvl="0" indent="0" marL="0" algn="l">
+                        <a:buNone/>
+                      </a:pPr>
+                      <a:r>
+                        <a:rPr/>
+                        <a:t>C+</a:t>
+                      </a:r>
+                    </a:p>
+                  </a:txBody>
+                </a:tc>
+                <a:tc>
+                  <a:txBody>
+                    <a:bodyPr/>
+                    <a:lstStyle/>
+                    <a:p>
+                      <a:pPr lvl="0" indent="0" marL="0" algn="l">
+                        <a:buNone/>
+                      </a:pPr>
+                      <a:r>
+                        <a:rPr/>
+                        <a:t>67-69</a:t>
+                      </a:r>
+                    </a:p>
+                  </a:txBody>
+                </a:tc>
+                <a:tc>
+                  <a:txBody>
+                    <a:bodyPr/>
+                    <a:lstStyle/>
+                    <a:p>
+                      <a:pPr lvl="0" indent="0" marL="0" algn="r">
+                        <a:buNone/>
+                      </a:pPr>
+                      <a:r>
+                        <a:rPr/>
+                        <a:t>2.3</a:t>
+                      </a:r>
+                    </a:p>
+                  </a:txBody>
+                </a:tc>
+              </a:tr>
+              <a:tr h="0">
+                <a:tc>
+                  <a:txBody>
+                    <a:bodyPr/>
+                    <a:lstStyle/>
+                    <a:p>
+                      <a:pPr lvl="0" indent="0" marL="0" algn="l">
+                        <a:buNone/>
+                      </a:pPr>
+                      <a:r>
+                        <a:rPr/>
+                        <a:t>C</a:t>
+                      </a:r>
+                    </a:p>
+                  </a:txBody>
+                </a:tc>
+                <a:tc>
+                  <a:txBody>
+                    <a:bodyPr/>
+                    <a:lstStyle/>
+                    <a:p>
+                      <a:pPr lvl="0" indent="0" marL="0" algn="l">
+                        <a:buNone/>
+                      </a:pPr>
+                      <a:r>
+                        <a:rPr/>
+                        <a:t>63-66</a:t>
+                      </a:r>
+                    </a:p>
+                  </a:txBody>
+                </a:tc>
+                <a:tc>
+                  <a:txBody>
+                    <a:bodyPr/>
+                    <a:lstStyle/>
+                    <a:p>
+                      <a:pPr lvl="0" indent="0" marL="0" algn="r">
+                        <a:buNone/>
+                      </a:pPr>
+                      <a:r>
+                        <a:rPr/>
+                        <a:t>2.0</a:t>
+                      </a:r>
+                    </a:p>
+                  </a:txBody>
+                </a:tc>
+              </a:tr>
+              <a:tr h="0">
+                <a:tc>
+                  <a:txBody>
+                    <a:bodyPr/>
+                    <a:lstStyle/>
+                    <a:p>
+                      <a:pPr lvl="0" indent="0" marL="0" algn="l">
+                        <a:buNone/>
+                      </a:pPr>
+                      <a:r>
+                        <a:rPr/>
+                        <a:t>C-</a:t>
+                      </a:r>
+                    </a:p>
+                  </a:txBody>
+                </a:tc>
+                <a:tc>
+                  <a:txBody>
+                    <a:bodyPr/>
+                    <a:lstStyle/>
+                    <a:p>
+                      <a:pPr lvl="0" indent="0" marL="0" algn="l">
+                        <a:buNone/>
+                      </a:pPr>
+                      <a:r>
+                        <a:rPr/>
+                        <a:t>60-62</a:t>
+                      </a:r>
+                    </a:p>
+                  </a:txBody>
+                </a:tc>
+                <a:tc>
+                  <a:txBody>
+                    <a:bodyPr/>
+                    <a:lstStyle/>
+                    <a:p>
+                      <a:pPr lvl="0" indent="0" marL="0" algn="r">
+                        <a:buNone/>
+                      </a:pPr>
+                      <a:r>
+                        <a:rPr/>
+                        <a:t>1.7</a:t>
+                      </a:r>
+                    </a:p>
+                  </a:txBody>
+                </a:tc>
+              </a:tr>
+              <a:tr h="0">
+                <a:tc>
+                  <a:txBody>
+                    <a:bodyPr/>
+                    <a:lstStyle/>
+                    <a:p>
+                      <a:pPr lvl="0" indent="0" marL="0" algn="l">
+                        <a:buNone/>
+                      </a:pPr>
+                      <a:r>
+                        <a:rPr/>
+                        <a:t>D+</a:t>
+                      </a:r>
+                    </a:p>
+                  </a:txBody>
+                </a:tc>
+                <a:tc>
+                  <a:txBody>
+                    <a:bodyPr/>
+                    <a:lstStyle/>
+                    <a:p>
+                      <a:pPr lvl="0" indent="0" marL="0" algn="l">
+                        <a:buNone/>
+                      </a:pPr>
+                      <a:r>
+                        <a:rPr/>
+                        <a:t>57-59</a:t>
+                      </a:r>
+                    </a:p>
+                  </a:txBody>
+                </a:tc>
+                <a:tc>
+                  <a:txBody>
+                    <a:bodyPr/>
+                    <a:lstStyle/>
+                    <a:p>
+                      <a:pPr lvl="0" indent="0" marL="0" algn="r">
+                        <a:buNone/>
+                      </a:pPr>
+                      <a:r>
+                        <a:rPr/>
+                        <a:t>1.3</a:t>
+                      </a:r>
+                    </a:p>
+                  </a:txBody>
+                </a:tc>
+              </a:tr>
+              <a:tr h="0">
+                <a:tc>
+                  <a:txBody>
+                    <a:bodyPr/>
+                    <a:lstStyle/>
+                    <a:p>
+                      <a:pPr lvl="0" indent="0" marL="0" algn="l">
+                        <a:buNone/>
+                      </a:pPr>
+                      <a:r>
+                        <a:rPr/>
+                        <a:t>D</a:t>
+                      </a:r>
+                    </a:p>
+                  </a:txBody>
+                </a:tc>
+                <a:tc>
+                  <a:txBody>
+                    <a:bodyPr/>
+                    <a:lstStyle/>
+                    <a:p>
+                      <a:pPr lvl="0" indent="0" marL="0" algn="l">
+                        <a:buNone/>
+                      </a:pPr>
+                      <a:r>
+                        <a:rPr/>
+                        <a:t>53-56</a:t>
+                      </a:r>
+                    </a:p>
+                  </a:txBody>
+                </a:tc>
+                <a:tc>
+                  <a:txBody>
+                    <a:bodyPr/>
+                    <a:lstStyle/>
+                    <a:p>
+                      <a:pPr lvl="0" indent="0" marL="0" algn="r">
+                        <a:buNone/>
+                      </a:pPr>
+                      <a:r>
+                        <a:rPr/>
+                        <a:t>1.0</a:t>
+                      </a:r>
+                    </a:p>
+                  </a:txBody>
+                </a:tc>
+              </a:tr>
+              <a:tr h="0">
+                <a:tc>
+                  <a:txBody>
+                    <a:bodyPr/>
+                    <a:lstStyle/>
+                    <a:p>
+                      <a:pPr lvl="0" indent="0" marL="0" algn="l">
+                        <a:buNone/>
+                      </a:pPr>
+                      <a:r>
+                        <a:rPr/>
+                        <a:t>D-</a:t>
+                      </a:r>
+                    </a:p>
+                  </a:txBody>
+                </a:tc>
+                <a:tc>
+                  <a:txBody>
+                    <a:bodyPr/>
+                    <a:lstStyle/>
+                    <a:p>
+                      <a:pPr lvl="0" indent="0" marL="0" algn="l">
+                        <a:buNone/>
+                      </a:pPr>
+                      <a:r>
+                        <a:rPr/>
+                        <a:t>50-52</a:t>
+                      </a:r>
+                    </a:p>
+                  </a:txBody>
+                </a:tc>
+                <a:tc>
+                  <a:txBody>
+                    <a:bodyPr/>
+                    <a:lstStyle/>
+                    <a:p>
+                      <a:pPr lvl="0" indent="0" marL="0" algn="r">
+                        <a:buNone/>
+                      </a:pPr>
+                      <a:r>
+                        <a:rPr/>
+                        <a:t>0.7</a:t>
+                      </a:r>
+                    </a:p>
+                  </a:txBody>
+                </a:tc>
+              </a:tr>
+              <a:tr h="0">
+                <a:tc>
+                  <a:txBody>
+                    <a:bodyPr/>
+                    <a:lstStyle/>
+                    <a:p>
+                      <a:pPr lvl="0" indent="0" marL="0" algn="l">
+                        <a:buNone/>
+                      </a:pPr>
+                      <a:r>
+                        <a:rPr/>
+                        <a:t>F</a:t>
+                      </a:r>
+                    </a:p>
+                  </a:txBody>
+                </a:tc>
+                <a:tc>
+                  <a:txBody>
+                    <a:bodyPr/>
+                    <a:lstStyle/>
+                    <a:p>
+                      <a:pPr lvl="0" indent="0" marL="0" algn="l">
+                        <a:buNone/>
+                      </a:pPr>
+                      <a:r>
+                        <a:rPr/>
+                        <a:t>Below 50</a:t>
+                      </a:r>
+                    </a:p>
+                  </a:txBody>
+                </a:tc>
+                <a:tc>
+                  <a:txBody>
+                    <a:bodyPr/>
+                    <a:lstStyle/>
+                    <a:p>
+                      <a:pPr lvl="0" indent="0" marL="0" algn="r">
+                        <a:buNone/>
+                      </a:pPr>
+                      <a:r>
+                        <a:rPr/>
+                        <a:t>0.0</a:t>
+                      </a:r>
+                    </a:p>
+                  </a:txBody>
+                </a:tc>
+              </a:tr>
+            </a:tbl>
+          </a:graphicData>
+        </a:graphic>
+      </p:graphicFrame>
+    </p:spTree>
+  </p:cSld>
+</p:sld>
+</file>
+
+<file path=ppt/slides/slide19.xml><?xml version="1.0" encoding="utf-8"?>
+<p:sld xmlns:a="http://schemas.openxmlformats.org/drawingml/2006/main" xmlns:r="http://schemas.openxmlformats.org/officeDocument/2006/relationships" xmlns:p="http://schemas.openxmlformats.org/presentationml/2006/main">
+  <p:cSld>
+    <p:spTree>
+      <p:nvGrpSpPr>
+        <p:cNvPr id="1" name=""/>
+        <p:cNvGrpSpPr/>
+        <p:nvPr/>
+      </p:nvGrpSpPr>
+      <p:grpSpPr>
+        <a:xfrm>
+          <a:off x="0" y="0"/>
+          <a:ext cx="0" cy="0"/>
+          <a:chOff x="0" y="0"/>
+          <a:chExt cx="0" cy="0"/>
+        </a:xfrm>
+      </p:grpSpPr>
+      <p:sp>
+        <p:nvSpPr>
+          <p:cNvPr id="3" name="Content Placeholder 2"/>
+          <p:cNvSpPr>
+            <a:spLocks noGrp="1"/>
+          </p:cNvSpPr>
+          <p:nvPr>
+            <p:ph idx="1"/>
+          </p:nvPr>
+        </p:nvSpPr>
+        <p:spPr/>
+        <p:txBody>
+          <a:bodyPr/>
+          <a:lstStyle/>
+          <a:p>
+            <a:pPr lvl="0" indent="0" marL="0">
+              <a:spcBef>
+                <a:spcPts val="3000"/>
+              </a:spcBef>
+              <a:buNone/>
+            </a:pPr>
+            <a:r>
+              <a:rPr b="1"/>
+              <a:t>Breakout Cooperative Activity</a:t>
+            </a:r>
+          </a:p>
+          <a:p>
+            <a:pPr lvl="0" indent="0" marL="0">
+              <a:buNone/>
+            </a:pPr>
+            <a:r>
+              <a:rPr/>
+              <a:t>10 mins</a:t>
+            </a:r>
+          </a:p>
+          <a:p>
+            <a:pPr lvl="0"/>
+            <a:r>
+              <a:rPr/>
+              <a:t>shared MS Excel file which contains </a:t>
+            </a:r>
+            <a:r>
+              <a:rPr i="1"/>
+              <a:t>simulated</a:t>
+            </a:r>
+            <a:r>
+              <a:rPr/>
+              <a:t> grade data from a class of 100 learners who completed 11 assignments, two papers, one midterm exam, and one final exam.</a:t>
+            </a:r>
+          </a:p>
+          <a:p>
+            <a:pPr lvl="0"/>
+            <a:r>
+              <a:rPr/>
+              <a:t>all items in the gradebook are recorded as a raw score out of 100</a:t>
+            </a:r>
+          </a:p>
+          <a:p>
+            <a:pPr lvl="0"/>
+            <a:r>
+              <a:rPr/>
+              <a:t>download the file and open in MS Excel</a:t>
+            </a:r>
+          </a:p>
+          <a:p>
+            <a:pPr lvl="0"/>
+            <a:r>
+              <a:rPr/>
+              <a:t>using the tools in Excel, decide as a group how you would report these learners’ final letter grades</a:t>
+            </a:r>
+          </a:p>
+          <a:p>
+            <a:pPr lvl="0"/>
+            <a:r>
+              <a:rPr/>
+              <a:t>calculate the grades in the columns to the right of the data</a:t>
+            </a:r>
+          </a:p>
+          <a:p>
+            <a:pPr lvl="0"/>
+            <a:r>
+              <a:rPr/>
+              <a:t>Use the </a:t>
+            </a:r>
+            <a:r>
+              <a:rPr>
+                <a:hlinkClick r:id="rId3"/>
+              </a:rPr>
+              <a:t>TWU Standard Grading System</a:t>
+            </a:r>
+          </a:p>
+        </p:txBody>
+      </p:sp>
+    </p:spTree>
+  </p:cSld>
+</p:sld>
+</file>
+
+<file path=ppt/slides/slide2.xml><?xml version="1.0" encoding="utf-8"?>
+<p:sld xmlns:a="http://schemas.openxmlformats.org/drawingml/2006/main" xmlns:r="http://schemas.openxmlformats.org/officeDocument/2006/relationships" xmlns:p="http://schemas.openxmlformats.org/presentationml/2006/main">
+  <p:cSld>
+    <p:bg>
+      <p:bgPr>
+        <a:blipFill dpi="0" rotWithShape="1">
+          <a:blip r:embed="rId2">
+            <a:lum/>
+          </a:blip>
+          <a:srcRect/>
+          <a:stretch>
+            <a:fillRect t="-17000" b="-17000"/>
+          </a:stretch>
+        </a:blipFill>
+        <a:effectsLst/>
+      </p:bgPr>
+    </p:bg>
+    <p:spTree>
+      <p:nvGrpSpPr>
+        <p:cNvPr id="1" name=""/>
+        <p:cNvGrpSpPr/>
+        <p:nvPr/>
+      </p:nvGrpSpPr>
+      <p:grpSpPr>
+        <a:xfrm>
+          <a:off x="0" y="0"/>
+          <a:ext cx="0" cy="0"/>
+          <a:chOff x="0" y="0"/>
+          <a:chExt cx="0" cy="0"/>
+        </a:xfrm>
+      </p:grpSpPr>
+      <p:sp>
+        <p:nvSpPr>
+          <p:cNvPr id="2" name="Title 1"/>
+          <p:cNvSpPr>
+            <a:spLocks noGrp="1"/>
+          </p:cNvSpPr>
+          <p:nvPr>
+            <p:ph type="title"/>
+          </p:nvPr>
+        </p:nvSpPr>
+        <p:spPr/>
+        <p:txBody>
+          <a:bodyPr/>
+          <a:lstStyle/>
+          <a:p>
+            <a:pPr lvl="0" indent="0" marL="0">
+              <a:buNone/>
+            </a:pPr>
+            <a:r>
+              <a:rPr/>
+              <a:t>Welcome</a:t>
+            </a:r>
+          </a:p>
+        </p:txBody>
+      </p:sp>
+    </p:spTree>
+  </p:cSld>
+</p:sld>
+</file>
+
+<file path=ppt/slides/slide20.xml><?xml version="1.0" encoding="utf-8"?>
 <p:sld xmlns:a="http://schemas.openxmlformats.org/drawingml/2006/main" xmlns:r="http://schemas.openxmlformats.org/officeDocument/2006/relationships" xmlns:p="http://schemas.openxmlformats.org/presentationml/2006/main">
   <p:cSld>
     <p:spTree>
@@ -5269,7 +5497,7 @@
 </p:sld>
 </file>
 
-<file path=ppt/slides/slide19.xml><?xml version="1.0" encoding="utf-8"?>
+<file path=ppt/slides/slide21.xml><?xml version="1.0" encoding="utf-8"?>
 <p:sld xmlns:a="http://schemas.openxmlformats.org/drawingml/2006/main" xmlns:r="http://schemas.openxmlformats.org/officeDocument/2006/relationships" xmlns:p="http://schemas.openxmlformats.org/presentationml/2006/main">
   <p:cSld>
     <p:spTree>
@@ -5354,54 +5582,7 @@
 </p:sld>
 </file>
 
-<file path=ppt/slides/slide2.xml><?xml version="1.0" encoding="utf-8"?>
-<p:sld xmlns:a="http://schemas.openxmlformats.org/drawingml/2006/main" xmlns:r="http://schemas.openxmlformats.org/officeDocument/2006/relationships" xmlns:p="http://schemas.openxmlformats.org/presentationml/2006/main">
-  <p:cSld>
-    <p:spTree>
-      <p:nvGrpSpPr>
-        <p:cNvPr id="1" name=""/>
-        <p:cNvGrpSpPr/>
-        <p:nvPr/>
-      </p:nvGrpSpPr>
-      <p:grpSpPr>
-        <a:xfrm>
-          <a:off x="0" y="0"/>
-          <a:ext cx="0" cy="0"/>
-          <a:chOff x="0" y="0"/>
-          <a:chExt cx="0" cy="0"/>
-        </a:xfrm>
-      </p:grpSpPr>
-      <p:sp>
-        <p:nvSpPr>
-          <p:cNvPr id="2" name="Title 1"/>
-          <p:cNvSpPr>
-            <a:spLocks noGrp="1"/>
-          </p:cNvSpPr>
-          <p:nvPr>
-            <p:ph type="title"/>
-          </p:nvPr>
-        </p:nvSpPr>
-        <p:spPr/>
-        <p:txBody>
-          <a:bodyPr/>
-          <a:lstStyle/>
-          <a:p>
-            <a:pPr lvl="0" indent="0" marL="0">
-              <a:buNone/>
-            </a:pPr>
-            <a:r>
-              <a:rPr/>
-              <a:t>What is Assessment?</a:t>
-            </a:r>
-          </a:p>
-        </p:txBody>
-      </p:sp>
-    </p:spTree>
-  </p:cSld>
-</p:sld>
-</file>
-
-<file path=ppt/slides/slide20.xml><?xml version="1.0" encoding="utf-8"?>
+<file path=ppt/slides/slide22.xml><?xml version="1.0" encoding="utf-8"?>
 <p:sld xmlns:a="http://schemas.openxmlformats.org/drawingml/2006/main" xmlns:r="http://schemas.openxmlformats.org/officeDocument/2006/relationships" xmlns:p="http://schemas.openxmlformats.org/presentationml/2006/main">
   <p:cSld>
     <p:spTree>
@@ -5767,7 +5948,7 @@
 </p:sld>
 </file>
 
-<file path=ppt/slides/slide21.xml><?xml version="1.0" encoding="utf-8"?>
+<file path=ppt/slides/slide23.xml><?xml version="1.0" encoding="utf-8"?>
 <p:sld xmlns:a="http://schemas.openxmlformats.org/drawingml/2006/main" xmlns:r="http://schemas.openxmlformats.org/officeDocument/2006/relationships" xmlns:p="http://schemas.openxmlformats.org/presentationml/2006/main">
   <p:cSld>
     <p:spTree>
@@ -5844,7 +6025,7 @@
 </p:sld>
 </file>
 
-<file path=ppt/slides/slide22.xml><?xml version="1.0" encoding="utf-8"?>
+<file path=ppt/slides/slide24.xml><?xml version="1.0" encoding="utf-8"?>
 <p:sld xmlns:a="http://schemas.openxmlformats.org/drawingml/2006/main" xmlns:r="http://schemas.openxmlformats.org/officeDocument/2006/relationships" xmlns:p="http://schemas.openxmlformats.org/presentationml/2006/main">
   <p:cSld>
     <p:spTree>
@@ -5891,7 +6072,7 @@
 </p:sld>
 </file>
 
-<file path=ppt/slides/slide23.xml><?xml version="1.0" encoding="utf-8"?>
+<file path=ppt/slides/slide25.xml><?xml version="1.0" encoding="utf-8"?>
 <p:sld xmlns:a="http://schemas.openxmlformats.org/drawingml/2006/main" xmlns:r="http://schemas.openxmlformats.org/officeDocument/2006/relationships" xmlns:p="http://schemas.openxmlformats.org/presentationml/2006/main">
   <p:cSld>
     <p:spTree>
@@ -5943,7 +6124,7 @@
 </p:sld>
 </file>
 
-<file path=ppt/slides/slide24.xml><?xml version="1.0" encoding="utf-8"?>
+<file path=ppt/slides/slide26.xml><?xml version="1.0" encoding="utf-8"?>
 <p:sld xmlns:a="http://schemas.openxmlformats.org/drawingml/2006/main" xmlns:r="http://schemas.openxmlformats.org/officeDocument/2006/relationships" xmlns:p="http://schemas.openxmlformats.org/presentationml/2006/main">
   <p:cSld>
     <p:spTree>
@@ -5995,7 +6176,54 @@
 </p:sld>
 </file>
 
-<file path=ppt/slides/slide25.xml><?xml version="1.0" encoding="utf-8"?>
+<file path=ppt/slides/slide27.xml><?xml version="1.0" encoding="utf-8"?>
+<p:sld xmlns:a="http://schemas.openxmlformats.org/drawingml/2006/main" xmlns:r="http://schemas.openxmlformats.org/officeDocument/2006/relationships" xmlns:p="http://schemas.openxmlformats.org/presentationml/2006/main">
+  <p:cSld>
+    <p:spTree>
+      <p:nvGrpSpPr>
+        <p:cNvPr id="1" name=""/>
+        <p:cNvGrpSpPr/>
+        <p:nvPr/>
+      </p:nvGrpSpPr>
+      <p:grpSpPr>
+        <a:xfrm>
+          <a:off x="0" y="0"/>
+          <a:ext cx="0" cy="0"/>
+          <a:chOff x="0" y="0"/>
+          <a:chExt cx="0" cy="0"/>
+        </a:xfrm>
+      </p:grpSpPr>
+      <p:sp>
+        <p:nvSpPr>
+          <p:cNvPr id="3" name="Content Placeholder 2"/>
+          <p:cNvSpPr>
+            <a:spLocks noGrp="1"/>
+          </p:cNvSpPr>
+          <p:nvPr>
+            <p:ph idx="1"/>
+          </p:nvPr>
+        </p:nvSpPr>
+        <p:spPr/>
+        <p:txBody>
+          <a:bodyPr/>
+          <a:lstStyle/>
+          <a:p>
+            <a:pPr lvl="0" indent="0" marL="0">
+              <a:buNone/>
+            </a:pPr>
+            <a:r>
+              <a:rPr/>
+              <a:t>(Starch, 1913; Starch &amp; Elliott, 1912)</a:t>
+            </a:r>
+          </a:p>
+        </p:txBody>
+      </p:sp>
+    </p:spTree>
+  </p:cSld>
+</p:sld>
+</file>
+
+<file path=ppt/slides/slide28.xml><?xml version="1.0" encoding="utf-8"?>
 <p:sld xmlns:a="http://schemas.openxmlformats.org/drawingml/2006/main" xmlns:r="http://schemas.openxmlformats.org/officeDocument/2006/relationships" xmlns:p="http://schemas.openxmlformats.org/presentationml/2006/main">
   <p:cSld>
     <p:spTree>
@@ -6047,7 +6275,7 @@
 </p:sld>
 </file>
 
-<file path=ppt/slides/slide26.xml><?xml version="1.0" encoding="utf-8"?>
+<file path=ppt/slides/slide29.xml><?xml version="1.0" encoding="utf-8"?>
 <p:sld xmlns:a="http://schemas.openxmlformats.org/drawingml/2006/main" xmlns:r="http://schemas.openxmlformats.org/officeDocument/2006/relationships" xmlns:p="http://schemas.openxmlformats.org/presentationml/2006/main">
   <p:cSld>
     <p:spTree>
@@ -6099,7 +6327,54 @@
 </p:sld>
 </file>
 
-<file path=ppt/slides/slide27.xml><?xml version="1.0" encoding="utf-8"?>
+<file path=ppt/slides/slide3.xml><?xml version="1.0" encoding="utf-8"?>
+<p:sld xmlns:a="http://schemas.openxmlformats.org/drawingml/2006/main" xmlns:r="http://schemas.openxmlformats.org/officeDocument/2006/relationships" xmlns:p="http://schemas.openxmlformats.org/presentationml/2006/main">
+  <p:cSld>
+    <p:spTree>
+      <p:nvGrpSpPr>
+        <p:cNvPr id="1" name=""/>
+        <p:cNvGrpSpPr/>
+        <p:nvPr/>
+      </p:nvGrpSpPr>
+      <p:grpSpPr>
+        <a:xfrm>
+          <a:off x="0" y="0"/>
+          <a:ext cx="0" cy="0"/>
+          <a:chOff x="0" y="0"/>
+          <a:chExt cx="0" cy="0"/>
+        </a:xfrm>
+      </p:grpSpPr>
+      <p:sp>
+        <p:nvSpPr>
+          <p:cNvPr id="2" name="Title 1"/>
+          <p:cNvSpPr>
+            <a:spLocks noGrp="1"/>
+          </p:cNvSpPr>
+          <p:nvPr>
+            <p:ph type="title"/>
+          </p:nvPr>
+        </p:nvSpPr>
+        <p:spPr/>
+        <p:txBody>
+          <a:bodyPr/>
+          <a:lstStyle/>
+          <a:p>
+            <a:pPr lvl="0" indent="0" marL="0">
+              <a:buNone/>
+            </a:pPr>
+            <a:r>
+              <a:rPr/>
+              <a:t>What is Assessment?</a:t>
+            </a:r>
+          </a:p>
+        </p:txBody>
+      </p:sp>
+    </p:spTree>
+  </p:cSld>
+</p:sld>
+</file>
+
+<file path=ppt/slides/slide30.xml><?xml version="1.0" encoding="utf-8"?>
 <p:sld xmlns:a="http://schemas.openxmlformats.org/drawingml/2006/main" xmlns:r="http://schemas.openxmlformats.org/officeDocument/2006/relationships" xmlns:p="http://schemas.openxmlformats.org/presentationml/2006/main">
   <p:cSld>
     <p:spTree>
@@ -6151,7 +6426,7 @@
 </p:sld>
 </file>
 
-<file path=ppt/slides/slide28.xml><?xml version="1.0" encoding="utf-8"?>
+<file path=ppt/slides/slide31.xml><?xml version="1.0" encoding="utf-8"?>
 <p:sld xmlns:a="http://schemas.openxmlformats.org/drawingml/2006/main" xmlns:r="http://schemas.openxmlformats.org/officeDocument/2006/relationships" xmlns:p="http://schemas.openxmlformats.org/presentationml/2006/main">
   <p:cSld>
     <p:spTree>
@@ -6222,7 +6497,7 @@
 </p:sld>
 </file>
 
-<file path=ppt/slides/slide29.xml><?xml version="1.0" encoding="utf-8"?>
+<file path=ppt/slides/slide32.xml><?xml version="1.0" encoding="utf-8"?>
 <p:sld xmlns:a="http://schemas.openxmlformats.org/drawingml/2006/main" xmlns:r="http://schemas.openxmlformats.org/officeDocument/2006/relationships" xmlns:p="http://schemas.openxmlformats.org/presentationml/2006/main">
   <p:cSld>
     <p:spTree>
@@ -6269,7 +6544,571 @@
 </p:sld>
 </file>
 
-<file path=ppt/slides/slide3.xml><?xml version="1.0" encoding="utf-8"?>
+<file path=ppt/slides/slide33.xml><?xml version="1.0" encoding="utf-8"?>
+<p:sld xmlns:a="http://schemas.openxmlformats.org/drawingml/2006/main" xmlns:r="http://schemas.openxmlformats.org/officeDocument/2006/relationships" xmlns:p="http://schemas.openxmlformats.org/presentationml/2006/main">
+  <p:cSld>
+    <p:spTree>
+      <p:nvGrpSpPr>
+        <p:cNvPr id="1" name=""/>
+        <p:cNvGrpSpPr/>
+        <p:nvPr/>
+      </p:nvGrpSpPr>
+      <p:grpSpPr>
+        <a:xfrm>
+          <a:off x="0" y="0"/>
+          <a:ext cx="0" cy="0"/>
+          <a:chOff x="0" y="0"/>
+          <a:chExt cx="0" cy="0"/>
+        </a:xfrm>
+      </p:grpSpPr>
+      <p:sp>
+        <p:nvSpPr>
+          <p:cNvPr id="2" name="Title 1"/>
+          <p:cNvSpPr>
+            <a:spLocks noGrp="1"/>
+          </p:cNvSpPr>
+          <p:nvPr>
+            <p:ph type="title"/>
+          </p:nvPr>
+        </p:nvSpPr>
+        <p:spPr/>
+        <p:txBody>
+          <a:bodyPr/>
+          <a:lstStyle/>
+          <a:p>
+            <a:pPr lvl="0" indent="0" marL="0">
+              <a:buNone/>
+            </a:pPr>
+            <a:r>
+              <a:rPr/>
+              <a:t>Clearly-defined outcomes</a:t>
+            </a:r>
+          </a:p>
+        </p:txBody>
+      </p:sp>
+      <p:sp>
+        <p:nvSpPr>
+          <p:cNvPr id="3" name="Content Placeholder 2"/>
+          <p:cNvSpPr>
+            <a:spLocks noGrp="1"/>
+          </p:cNvSpPr>
+          <p:nvPr>
+            <p:ph idx="1"/>
+          </p:nvPr>
+        </p:nvSpPr>
+        <p:spPr/>
+        <p:txBody>
+          <a:bodyPr/>
+          <a:lstStyle/>
+          <a:p>
+            <a:pPr lvl="0" indent="0" marL="0">
+              <a:buNone/>
+            </a:pPr>
+            <a:r>
+              <a:rPr/>
+              <a:t> - ‘Learners will be able to…’ - [verb] - [level of proficiency] - not ‘learners will [verb]’ (that’s an activity, not an outcome) - pay attention to the verb - remember vs. apply - define vs. create </a:t>
+            </a:r>
+          </a:p>
+        </p:txBody>
+      </p:sp>
+    </p:spTree>
+  </p:cSld>
+</p:sld>
+</file>
+
+<file path=ppt/slides/slide34.xml><?xml version="1.0" encoding="utf-8"?>
+<p:sld xmlns:a="http://schemas.openxmlformats.org/drawingml/2006/main" xmlns:r="http://schemas.openxmlformats.org/officeDocument/2006/relationships" xmlns:p="http://schemas.openxmlformats.org/presentationml/2006/main">
+  <p:cSld>
+    <p:spTree>
+      <p:nvGrpSpPr>
+        <p:cNvPr id="1" name=""/>
+        <p:cNvGrpSpPr/>
+        <p:nvPr/>
+      </p:nvGrpSpPr>
+      <p:grpSpPr>
+        <a:xfrm>
+          <a:off x="0" y="0"/>
+          <a:ext cx="0" cy="0"/>
+          <a:chOff x="0" y="0"/>
+          <a:chExt cx="0" cy="0"/>
+        </a:xfrm>
+      </p:grpSpPr>
+      <p:sp>
+        <p:nvSpPr>
+          <p:cNvPr id="2" name="Title 1"/>
+          <p:cNvSpPr>
+            <a:spLocks noGrp="1"/>
+          </p:cNvSpPr>
+          <p:nvPr>
+            <p:ph type="title"/>
+          </p:nvPr>
+        </p:nvSpPr>
+        <p:spPr/>
+        <p:txBody>
+          <a:bodyPr/>
+          <a:lstStyle/>
+          <a:p>
+            <a:pPr lvl="0" indent="0" marL="0">
+              <a:buNone/>
+            </a:pPr>
+            <a:r>
+              <a:rPr/>
+              <a:t>Grades communicate progress</a:t>
+            </a:r>
+          </a:p>
+        </p:txBody>
+      </p:sp>
+      <p:sp>
+        <p:nvSpPr>
+          <p:cNvPr id="3" name="Content Placeholder 2"/>
+          <p:cNvSpPr>
+            <a:spLocks noGrp="1"/>
+          </p:cNvSpPr>
+          <p:nvPr>
+            <p:ph idx="1"/>
+          </p:nvPr>
+        </p:nvSpPr>
+        <p:spPr/>
+        <p:txBody>
+          <a:bodyPr/>
+          <a:lstStyle/>
+          <a:p>
+            <a:pPr lvl="0"/>
+            <a:r>
+              <a:rPr/>
+              <a:t>fewer categories of quality (5-13)</a:t>
+            </a:r>
+          </a:p>
+          <a:p>
+            <a:pPr lvl="0"/>
+            <a:r>
+              <a:rPr/>
+              <a:t>not assessable, emerging, developing, proficient, extending</a:t>
+            </a:r>
+          </a:p>
+          <a:p>
+            <a:pPr lvl="0"/>
+            <a:r>
+              <a:rPr/>
+              <a:t>not assessable, revision needed, meets expectations, excellent</a:t>
+            </a:r>
+          </a:p>
+          <a:p>
+            <a:pPr lvl="0"/>
+            <a:r>
+              <a:rPr/>
+              <a:t>🏗️, ✏️, 👏🏿, 💅🏽, ✨</a:t>
+            </a:r>
+          </a:p>
+        </p:txBody>
+      </p:sp>
+    </p:spTree>
+  </p:cSld>
+</p:sld>
+</file>
+
+<file path=ppt/slides/slide35.xml><?xml version="1.0" encoding="utf-8"?>
+<p:sld xmlns:a="http://schemas.openxmlformats.org/drawingml/2006/main" xmlns:r="http://schemas.openxmlformats.org/officeDocument/2006/relationships" xmlns:p="http://schemas.openxmlformats.org/presentationml/2006/main">
+  <p:cSld>
+    <p:spTree>
+      <p:nvGrpSpPr>
+        <p:cNvPr id="1" name=""/>
+        <p:cNvGrpSpPr/>
+        <p:nvPr/>
+      </p:nvGrpSpPr>
+      <p:grpSpPr>
+        <a:xfrm>
+          <a:off x="0" y="0"/>
+          <a:ext cx="0" cy="0"/>
+          <a:chOff x="0" y="0"/>
+          <a:chExt cx="0" cy="0"/>
+        </a:xfrm>
+      </p:grpSpPr>
+      <p:sp>
+        <p:nvSpPr>
+          <p:cNvPr id="2" name="Title 1"/>
+          <p:cNvSpPr>
+            <a:spLocks noGrp="1"/>
+          </p:cNvSpPr>
+          <p:nvPr>
+            <p:ph type="title"/>
+          </p:nvPr>
+        </p:nvSpPr>
+        <p:spPr>
+          <a:xfrm>
+            <a:off x="457201" y="204787"/>
+            <a:ext cx="3008313" cy="871538"/>
+          </a:xfrm>
+        </p:spPr>
+        <p:txBody>
+          <a:bodyPr/>
+          <a:lstStyle/>
+          <a:p>
+            <a:pPr lvl="0" indent="0" marL="0">
+              <a:buNone/>
+            </a:pPr>
+            <a:r>
+              <a:rPr/>
+              <a:t>Closed feedback loops</a:t>
+            </a:r>
+          </a:p>
+        </p:txBody>
+      </p:sp>
+      <p:sp>
+        <p:nvSpPr>
+          <p:cNvPr id="4" name="Text Placeholder 3"/>
+          <p:cNvSpPr>
+            <a:spLocks noGrp="1"/>
+          </p:cNvSpPr>
+          <p:nvPr>
+            <p:ph idx="2" sz="half" type="body"/>
+          </p:nvPr>
+        </p:nvSpPr>
+        <p:spPr/>
+        <p:txBody>
+          <a:bodyPr/>
+          <a:lstStyle/>
+          <a:p>
+            <a:pPr lvl="0" indent="0" marL="0">
+              <a:spcBef>
+                <a:spcPts val="3000"/>
+              </a:spcBef>
+              <a:buNone/>
+            </a:pPr>
+            <a:r>
+              <a:rPr b="1"/>
+              <a:t>Knowledge of Results</a:t>
+            </a:r>
+          </a:p>
+          <a:p>
+            <a:pPr lvl="0" indent="0" marL="0">
+              <a:buNone/>
+            </a:pPr>
+          </a:p>
+        </p:txBody>
+      </p:sp>
+      <p:pic>
+        <p:nvPicPr>
+          <p:cNvPr descr="index_files/figure-pptx/mermaid-figure-4.png" id="0" name="Picture 1"/>
+          <p:cNvPicPr>
+            <a:picLocks noGrp="1" noChangeAspect="1"/>
+          </p:cNvPicPr>
+          <p:nvPr/>
+        </p:nvPicPr>
+        <p:blipFill>
+          <a:blip r:embed="rId2"/>
+          <a:stretch>
+            <a:fillRect/>
+          </a:stretch>
+        </p:blipFill>
+        <p:spPr bwMode="auto">
+          <a:xfrm>
+            <a:off x="3568700" y="901700"/>
+            <a:ext cx="5105400" cy="2984500"/>
+          </a:xfrm>
+          <a:prstGeom prst="rect">
+            <a:avLst/>
+          </a:prstGeom>
+          <a:noFill/>
+          <a:ln w="9525">
+            <a:noFill/>
+            <a:headEnd/>
+            <a:tailEnd/>
+          </a:ln>
+        </p:spPr>
+      </p:pic>
+    </p:spTree>
+  </p:cSld>
+</p:sld>
+</file>
+
+<file path=ppt/slides/slide36.xml><?xml version="1.0" encoding="utf-8"?>
+<p:sld xmlns:a="http://schemas.openxmlformats.org/drawingml/2006/main" xmlns:r="http://schemas.openxmlformats.org/officeDocument/2006/relationships" xmlns:p="http://schemas.openxmlformats.org/presentationml/2006/main">
+  <p:cSld>
+    <p:spTree>
+      <p:nvGrpSpPr>
+        <p:cNvPr id="1" name=""/>
+        <p:cNvGrpSpPr/>
+        <p:nvPr/>
+      </p:nvGrpSpPr>
+      <p:grpSpPr>
+        <a:xfrm>
+          <a:off x="0" y="0"/>
+          <a:ext cx="0" cy="0"/>
+          <a:chOff x="0" y="0"/>
+          <a:chExt cx="0" cy="0"/>
+        </a:xfrm>
+      </p:grpSpPr>
+      <p:sp>
+        <p:nvSpPr>
+          <p:cNvPr id="4" name="Text Placeholder 3"/>
+          <p:cNvSpPr>
+            <a:spLocks noGrp="1"/>
+          </p:cNvSpPr>
+          <p:nvPr>
+            <p:ph idx="2" sz="half" type="body"/>
+          </p:nvPr>
+        </p:nvSpPr>
+        <p:spPr/>
+        <p:txBody>
+          <a:bodyPr/>
+          <a:lstStyle/>
+          <a:p>
+            <a:pPr lvl="0" indent="0" marL="0">
+              <a:spcBef>
+                <a:spcPts val="3000"/>
+              </a:spcBef>
+              <a:buNone/>
+            </a:pPr>
+            <a:r>
+              <a:rPr b="1"/>
+              <a:t>Feedback Loops</a:t>
+            </a:r>
+          </a:p>
+          <a:p>
+            <a:pPr lvl="0" indent="0" marL="0">
+              <a:buNone/>
+            </a:pPr>
+          </a:p>
+        </p:txBody>
+      </p:sp>
+      <p:pic>
+        <p:nvPicPr>
+          <p:cNvPr descr="index_files/figure-pptx/mermaid-figure-3.png" id="0" name="Picture 1"/>
+          <p:cNvPicPr>
+            <a:picLocks noGrp="1" noChangeAspect="1"/>
+          </p:cNvPicPr>
+          <p:nvPr/>
+        </p:nvPicPr>
+        <p:blipFill>
+          <a:blip r:embed="rId2"/>
+          <a:stretch>
+            <a:fillRect/>
+          </a:stretch>
+        </p:blipFill>
+        <p:spPr bwMode="auto">
+          <a:xfrm>
+            <a:off x="3568700" y="876300"/>
+            <a:ext cx="5105400" cy="3035300"/>
+          </a:xfrm>
+          <a:prstGeom prst="rect">
+            <a:avLst/>
+          </a:prstGeom>
+          <a:noFill/>
+          <a:ln w="9525">
+            <a:noFill/>
+            <a:headEnd/>
+            <a:tailEnd/>
+          </a:ln>
+        </p:spPr>
+      </p:pic>
+    </p:spTree>
+  </p:cSld>
+</p:sld>
+</file>
+
+<file path=ppt/slides/slide37.xml><?xml version="1.0" encoding="utf-8"?>
+<p:sld xmlns:a="http://schemas.openxmlformats.org/drawingml/2006/main" xmlns:r="http://schemas.openxmlformats.org/officeDocument/2006/relationships" xmlns:p="http://schemas.openxmlformats.org/presentationml/2006/main">
+  <p:cSld>
+    <p:spTree>
+      <p:nvGrpSpPr>
+        <p:cNvPr id="1" name=""/>
+        <p:cNvGrpSpPr/>
+        <p:nvPr/>
+      </p:nvGrpSpPr>
+      <p:grpSpPr>
+        <a:xfrm>
+          <a:off x="0" y="0"/>
+          <a:ext cx="0" cy="0"/>
+          <a:chOff x="0" y="0"/>
+          <a:chExt cx="0" cy="0"/>
+        </a:xfrm>
+      </p:grpSpPr>
+      <p:sp>
+        <p:nvSpPr>
+          <p:cNvPr id="2" name="Title 1"/>
+          <p:cNvSpPr>
+            <a:spLocks noGrp="1"/>
+          </p:cNvSpPr>
+          <p:nvPr>
+            <p:ph type="title"/>
+          </p:nvPr>
+        </p:nvSpPr>
+        <p:spPr/>
+        <p:txBody>
+          <a:bodyPr/>
+          <a:lstStyle/>
+          <a:p>
+            <a:pPr lvl="0" indent="0" marL="0">
+              <a:buNone/>
+            </a:pPr>
+            <a:r>
+              <a:rPr/>
+              <a:t>Reassessment without penalty</a:t>
+            </a:r>
+          </a:p>
+        </p:txBody>
+      </p:sp>
+      <p:sp>
+        <p:nvSpPr>
+          <p:cNvPr id="3" name="Content Placeholder 2"/>
+          <p:cNvSpPr>
+            <a:spLocks noGrp="1"/>
+          </p:cNvSpPr>
+          <p:nvPr>
+            <p:ph idx="1"/>
+          </p:nvPr>
+        </p:nvSpPr>
+        <p:spPr/>
+        <p:txBody>
+          <a:bodyPr/>
+          <a:lstStyle/>
+          <a:p>
+            <a:pPr lvl="0" indent="0" marL="1270000">
+              <a:buNone/>
+            </a:pPr>
+            <a:r>
+              <a:rPr sz="2000" b="1"/>
+              <a:t>Important</a:t>
+            </a:r>
+          </a:p>
+          <a:p>
+            <a:pPr lvl="0" indent="0" marL="1270000">
+              <a:buNone/>
+            </a:pPr>
+            <a:r>
+              <a:rPr sz="2000"/>
+              <a:t>This does NOT mean ‘reassessment without limit’!</a:t>
+            </a:r>
+          </a:p>
+        </p:txBody>
+      </p:sp>
+    </p:spTree>
+  </p:cSld>
+</p:sld>
+</file>
+
+<file path=ppt/slides/slide38.xml><?xml version="1.0" encoding="utf-8"?>
+<p:sld xmlns:a="http://schemas.openxmlformats.org/drawingml/2006/main" xmlns:r="http://schemas.openxmlformats.org/officeDocument/2006/relationships" xmlns:p="http://schemas.openxmlformats.org/presentationml/2006/main">
+  <p:cSld>
+    <p:spTree>
+      <p:nvGrpSpPr>
+        <p:cNvPr id="1" name=""/>
+        <p:cNvGrpSpPr/>
+        <p:nvPr/>
+      </p:nvGrpSpPr>
+      <p:grpSpPr>
+        <a:xfrm>
+          <a:off x="0" y="0"/>
+          <a:ext cx="0" cy="0"/>
+          <a:chOff x="0" y="0"/>
+          <a:chExt cx="0" cy="0"/>
+        </a:xfrm>
+      </p:grpSpPr>
+      <p:sp>
+        <p:nvSpPr>
+          <p:cNvPr id="4" name="Text Placeholder 3"/>
+          <p:cNvSpPr>
+            <a:spLocks noGrp="1"/>
+          </p:cNvSpPr>
+          <p:nvPr>
+            <p:ph idx="2" sz="half" type="body"/>
+          </p:nvPr>
+        </p:nvSpPr>
+        <p:spPr/>
+        <p:txBody>
+          <a:bodyPr/>
+          <a:lstStyle/>
+          <a:p>
+            <a:pPr lvl="0" indent="0" marL="0">
+              <a:buNone/>
+            </a:pPr>
+          </a:p>
+        </p:txBody>
+      </p:sp>
+      <p:pic>
+        <p:nvPicPr>
+          <p:cNvPr descr="index_files/figure-pptx/mermaid-figure-2.png" id="0" name="Picture 1"/>
+          <p:cNvPicPr>
+            <a:picLocks noGrp="1" noChangeAspect="1"/>
+          </p:cNvPicPr>
+          <p:nvPr/>
+        </p:nvPicPr>
+        <p:blipFill>
+          <a:blip r:embed="rId2"/>
+          <a:stretch>
+            <a:fillRect/>
+          </a:stretch>
+        </p:blipFill>
+        <p:spPr bwMode="auto">
+          <a:xfrm>
+            <a:off x="4572000" y="203200"/>
+            <a:ext cx="3098800" cy="4381500"/>
+          </a:xfrm>
+          <a:prstGeom prst="rect">
+            <a:avLst/>
+          </a:prstGeom>
+          <a:noFill/>
+          <a:ln w="9525">
+            <a:noFill/>
+            <a:headEnd/>
+            <a:tailEnd/>
+          </a:ln>
+        </p:spPr>
+      </p:pic>
+    </p:spTree>
+  </p:cSld>
+</p:sld>
+</file>
+
+<file path=ppt/slides/slide39.xml><?xml version="1.0" encoding="utf-8"?>
+<p:sld xmlns:a="http://schemas.openxmlformats.org/drawingml/2006/main" xmlns:r="http://schemas.openxmlformats.org/officeDocument/2006/relationships" xmlns:p="http://schemas.openxmlformats.org/presentationml/2006/main">
+  <p:cSld>
+    <p:spTree>
+      <p:nvGrpSpPr>
+        <p:cNvPr id="1" name=""/>
+        <p:cNvGrpSpPr/>
+        <p:nvPr/>
+      </p:nvGrpSpPr>
+      <p:grpSpPr>
+        <a:xfrm>
+          <a:off x="0" y="0"/>
+          <a:ext cx="0" cy="0"/>
+          <a:chOff x="0" y="0"/>
+          <a:chExt cx="0" cy="0"/>
+        </a:xfrm>
+      </p:grpSpPr>
+      <p:sp>
+        <p:nvSpPr>
+          <p:cNvPr id="3" name="Content Placeholder 2"/>
+          <p:cNvSpPr>
+            <a:spLocks noGrp="1"/>
+          </p:cNvSpPr>
+          <p:nvPr>
+            <p:ph idx="1"/>
+          </p:nvPr>
+        </p:nvSpPr>
+        <p:spPr/>
+        <p:txBody>
+          <a:bodyPr/>
+          <a:lstStyle/>
+          <a:p>
+            <a:pPr lvl="0" indent="0" marL="1270000">
+              <a:buNone/>
+            </a:pPr>
+            <a:r>
+              <a:rPr sz="2000"/>
+              <a:t>Knowledge emerges only through invention and re-invention, through the restless, impatient, continuing, hopeful inquiry human beings pursue in the world, with the world, and with each other. (Freire, 1990, p. 72)</a:t>
+            </a:r>
+          </a:p>
+        </p:txBody>
+      </p:sp>
+    </p:spTree>
+  </p:cSld>
+</p:sld>
+</file>
+
+<file path=ppt/slides/slide4.xml><?xml version="1.0" encoding="utf-8"?>
 <p:sld xmlns:a="http://schemas.openxmlformats.org/drawingml/2006/main" xmlns:r="http://schemas.openxmlformats.org/officeDocument/2006/relationships" xmlns:p="http://schemas.openxmlformats.org/presentationml/2006/main">
   <p:cSld>
     <p:spTree>
@@ -6349,7 +7188,7 @@
 </p:sld>
 </file>
 
-<file path=ppt/slides/slide30.xml><?xml version="1.0" encoding="utf-8"?>
+<file path=ppt/slides/slide40.xml><?xml version="1.0" encoding="utf-8"?>
 <p:sld xmlns:a="http://schemas.openxmlformats.org/drawingml/2006/main" xmlns:r="http://schemas.openxmlformats.org/officeDocument/2006/relationships" xmlns:p="http://schemas.openxmlformats.org/presentationml/2006/main">
   <p:cSld>
     <p:spTree>
@@ -6368,12 +7207,12 @@
       </p:grpSpPr>
       <p:sp>
         <p:nvSpPr>
-          <p:cNvPr id="2" name="Title 1"/>
-          <p:cNvSpPr>
-            <a:spLocks noGrp="1"/>
-          </p:cNvSpPr>
-          <p:nvPr>
-            <p:ph type="title"/>
+          <p:cNvPr id="3" name="Content Placeholder 2"/>
+          <p:cNvSpPr>
+            <a:spLocks noGrp="1"/>
+          </p:cNvSpPr>
+          <p:nvPr>
+            <p:ph idx="1"/>
           </p:nvPr>
         </p:nvSpPr>
         <p:spPr/>
@@ -6385,8 +7224,14 @@
               <a:buNone/>
             </a:pPr>
             <a:r>
+              <a:rPr>
+                <a:hlinkClick r:id="rId2"/>
+              </a:rPr>
+              <a:t>cmad.land</a:t>
+            </a:r>
+            <a:r>
               <a:rPr/>
-              <a:t>Clearly-defined outcomes</a:t>
+              <a:t> - slides</a:t>
             </a:r>
           </a:p>
         </p:txBody>
@@ -6396,7 +7241,7 @@
 </p:sld>
 </file>
 
-<file path=ppt/slides/slide31.xml><?xml version="1.0" encoding="utf-8"?>
+<file path=ppt/slides/slide41.xml><?xml version="1.0" encoding="utf-8"?>
 <p:sld xmlns:a="http://schemas.openxmlformats.org/drawingml/2006/main" xmlns:r="http://schemas.openxmlformats.org/officeDocument/2006/relationships" xmlns:p="http://schemas.openxmlformats.org/presentationml/2006/main">
   <p:cSld>
     <p:spTree>
@@ -6433,7 +7278,48 @@
             </a:pPr>
             <a:r>
               <a:rPr/>
-              <a:t>Grades communicate progress</a:t>
+              <a:t>Stop. Be outside. Think.</a:t>
+            </a:r>
+          </a:p>
+        </p:txBody>
+      </p:sp>
+      <p:sp>
+        <p:nvSpPr>
+          <p:cNvPr id="3" name="Content Placeholder 2"/>
+          <p:cNvSpPr>
+            <a:spLocks noGrp="1"/>
+          </p:cNvSpPr>
+          <p:nvPr>
+            <p:ph idx="1"/>
+          </p:nvPr>
+        </p:nvSpPr>
+        <p:spPr/>
+        <p:txBody>
+          <a:bodyPr/>
+          <a:lstStyle/>
+          <a:p>
+            <a:pPr lvl="0" indent="0" marL="0">
+              <a:buNone/>
+            </a:pPr>
+            <a:r>
+              <a:rPr/>
+              <a:t>Recall a time when you were the </a:t>
+            </a:r>
+            <a:r>
+              <a:rPr i="1"/>
+              <a:t>object</a:t>
+            </a:r>
+            <a:r>
+              <a:rPr/>
+              <a:t> in an educational transaction, where ‘teaching’ or ‘assessing’ was something done </a:t>
+            </a:r>
+            <a:r>
+              <a:rPr b="1"/>
+              <a:t>to</a:t>
+            </a:r>
+            <a:r>
+              <a:rPr/>
+              <a:t> you. What might YOU do to avoid commoditizing grades in your practice?</a:t>
             </a:r>
           </a:p>
         </p:txBody>
@@ -6443,7 +7329,7 @@
 </p:sld>
 </file>
 
-<file path=ppt/slides/slide32.xml><?xml version="1.0" encoding="utf-8"?>
+<file path=ppt/slides/slide42.xml><?xml version="1.0" encoding="utf-8"?>
 <p:sld xmlns:a="http://schemas.openxmlformats.org/drawingml/2006/main" xmlns:r="http://schemas.openxmlformats.org/officeDocument/2006/relationships" xmlns:p="http://schemas.openxmlformats.org/presentationml/2006/main">
   <p:cSld>
     <p:spTree>
@@ -6462,266 +7348,6 @@
       </p:grpSpPr>
       <p:sp>
         <p:nvSpPr>
-          <p:cNvPr id="2" name="Title 1"/>
-          <p:cNvSpPr>
-            <a:spLocks noGrp="1"/>
-          </p:cNvSpPr>
-          <p:nvPr>
-            <p:ph type="title"/>
-          </p:nvPr>
-        </p:nvSpPr>
-        <p:spPr/>
-        <p:txBody>
-          <a:bodyPr/>
-          <a:lstStyle/>
-          <a:p>
-            <a:pPr lvl="0" indent="0" marL="0">
-              <a:buNone/>
-            </a:pPr>
-            <a:r>
-              <a:rPr/>
-              <a:t>Closed feedback loops</a:t>
-            </a:r>
-          </a:p>
-        </p:txBody>
-      </p:sp>
-    </p:spTree>
-  </p:cSld>
-</p:sld>
-</file>
-
-<file path=ppt/slides/slide33.xml><?xml version="1.0" encoding="utf-8"?>
-<p:sld xmlns:a="http://schemas.openxmlformats.org/drawingml/2006/main" xmlns:r="http://schemas.openxmlformats.org/officeDocument/2006/relationships" xmlns:p="http://schemas.openxmlformats.org/presentationml/2006/main">
-  <p:cSld>
-    <p:spTree>
-      <p:nvGrpSpPr>
-        <p:cNvPr id="1" name=""/>
-        <p:cNvGrpSpPr/>
-        <p:nvPr/>
-      </p:nvGrpSpPr>
-      <p:grpSpPr>
-        <a:xfrm>
-          <a:off x="0" y="0"/>
-          <a:ext cx="0" cy="0"/>
-          <a:chOff x="0" y="0"/>
-          <a:chExt cx="0" cy="0"/>
-        </a:xfrm>
-      </p:grpSpPr>
-      <p:sp>
-        <p:nvSpPr>
-          <p:cNvPr id="2" name="Title 1"/>
-          <p:cNvSpPr>
-            <a:spLocks noGrp="1"/>
-          </p:cNvSpPr>
-          <p:nvPr>
-            <p:ph type="title"/>
-          </p:nvPr>
-        </p:nvSpPr>
-        <p:spPr/>
-        <p:txBody>
-          <a:bodyPr/>
-          <a:lstStyle/>
-          <a:p>
-            <a:pPr lvl="0" indent="0" marL="0">
-              <a:buNone/>
-            </a:pPr>
-            <a:r>
-              <a:rPr/>
-              <a:t>Reassessment without penalty</a:t>
-            </a:r>
-          </a:p>
-        </p:txBody>
-      </p:sp>
-      <p:sp>
-        <p:nvSpPr>
-          <p:cNvPr id="3" name="Content Placeholder 2"/>
-          <p:cNvSpPr>
-            <a:spLocks noGrp="1"/>
-          </p:cNvSpPr>
-          <p:nvPr>
-            <p:ph idx="1"/>
-          </p:nvPr>
-        </p:nvSpPr>
-        <p:spPr/>
-        <p:txBody>
-          <a:bodyPr/>
-          <a:lstStyle/>
-          <a:p>
-            <a:pPr lvl="0" indent="0" marL="1270000">
-              <a:buNone/>
-            </a:pPr>
-            <a:r>
-              <a:rPr sz="2000"/>
-              <a:t>Knowledge emerges only through invention and re-invention, through the restless, impatient, continuing, hopeful inquiry human beings pursue in the world, with the world, and with each other. (Freire, 1990, p. 72)</a:t>
-            </a:r>
-          </a:p>
-        </p:txBody>
-      </p:sp>
-    </p:spTree>
-  </p:cSld>
-</p:sld>
-</file>
-
-<file path=ppt/slides/slide34.xml><?xml version="1.0" encoding="utf-8"?>
-<p:sld xmlns:a="http://schemas.openxmlformats.org/drawingml/2006/main" xmlns:r="http://schemas.openxmlformats.org/officeDocument/2006/relationships" xmlns:p="http://schemas.openxmlformats.org/presentationml/2006/main">
-  <p:cSld>
-    <p:spTree>
-      <p:nvGrpSpPr>
-        <p:cNvPr id="1" name=""/>
-        <p:cNvGrpSpPr/>
-        <p:nvPr/>
-      </p:nvGrpSpPr>
-      <p:grpSpPr>
-        <a:xfrm>
-          <a:off x="0" y="0"/>
-          <a:ext cx="0" cy="0"/>
-          <a:chOff x="0" y="0"/>
-          <a:chExt cx="0" cy="0"/>
-        </a:xfrm>
-      </p:grpSpPr>
-      <p:sp>
-        <p:nvSpPr>
-          <p:cNvPr id="3" name="Content Placeholder 2"/>
-          <p:cNvSpPr>
-            <a:spLocks noGrp="1"/>
-          </p:cNvSpPr>
-          <p:nvPr>
-            <p:ph idx="1"/>
-          </p:nvPr>
-        </p:nvSpPr>
-        <p:spPr/>
-        <p:txBody>
-          <a:bodyPr/>
-          <a:lstStyle/>
-          <a:p>
-            <a:pPr lvl="0" indent="0" marL="0">
-              <a:buNone/>
-            </a:pPr>
-            <a:r>
-              <a:rPr>
-                <a:hlinkClick r:id="rId2"/>
-              </a:rPr>
-              <a:t>cmad.land</a:t>
-            </a:r>
-            <a:r>
-              <a:rPr/>
-              <a:t> - slides</a:t>
-            </a:r>
-          </a:p>
-        </p:txBody>
-      </p:sp>
-    </p:spTree>
-  </p:cSld>
-</p:sld>
-</file>
-
-<file path=ppt/slides/slide35.xml><?xml version="1.0" encoding="utf-8"?>
-<p:sld xmlns:a="http://schemas.openxmlformats.org/drawingml/2006/main" xmlns:r="http://schemas.openxmlformats.org/officeDocument/2006/relationships" xmlns:p="http://schemas.openxmlformats.org/presentationml/2006/main">
-  <p:cSld>
-    <p:spTree>
-      <p:nvGrpSpPr>
-        <p:cNvPr id="1" name=""/>
-        <p:cNvGrpSpPr/>
-        <p:nvPr/>
-      </p:nvGrpSpPr>
-      <p:grpSpPr>
-        <a:xfrm>
-          <a:off x="0" y="0"/>
-          <a:ext cx="0" cy="0"/>
-          <a:chOff x="0" y="0"/>
-          <a:chExt cx="0" cy="0"/>
-        </a:xfrm>
-      </p:grpSpPr>
-      <p:sp>
-        <p:nvSpPr>
-          <p:cNvPr id="2" name="Title 1"/>
-          <p:cNvSpPr>
-            <a:spLocks noGrp="1"/>
-          </p:cNvSpPr>
-          <p:nvPr>
-            <p:ph type="title"/>
-          </p:nvPr>
-        </p:nvSpPr>
-        <p:spPr/>
-        <p:txBody>
-          <a:bodyPr/>
-          <a:lstStyle/>
-          <a:p>
-            <a:pPr lvl="0" indent="0" marL="0">
-              <a:buNone/>
-            </a:pPr>
-            <a:r>
-              <a:rPr/>
-              <a:t>Stop. Be outside. Think.</a:t>
-            </a:r>
-          </a:p>
-        </p:txBody>
-      </p:sp>
-      <p:sp>
-        <p:nvSpPr>
-          <p:cNvPr id="3" name="Content Placeholder 2"/>
-          <p:cNvSpPr>
-            <a:spLocks noGrp="1"/>
-          </p:cNvSpPr>
-          <p:nvPr>
-            <p:ph idx="1"/>
-          </p:nvPr>
-        </p:nvSpPr>
-        <p:spPr/>
-        <p:txBody>
-          <a:bodyPr/>
-          <a:lstStyle/>
-          <a:p>
-            <a:pPr lvl="0" indent="0" marL="0">
-              <a:buNone/>
-            </a:pPr>
-            <a:r>
-              <a:rPr/>
-              <a:t>Recall a time when you were the </a:t>
-            </a:r>
-            <a:r>
-              <a:rPr i="1"/>
-              <a:t>object</a:t>
-            </a:r>
-            <a:r>
-              <a:rPr/>
-              <a:t> in an educational transaction, where ‘teaching’ or ‘assessing’ was something done </a:t>
-            </a:r>
-            <a:r>
-              <a:rPr b="1"/>
-              <a:t>to</a:t>
-            </a:r>
-            <a:r>
-              <a:rPr/>
-              <a:t> you. What might YOU do to avoid commoditizing grades in your practice?</a:t>
-            </a:r>
-          </a:p>
-        </p:txBody>
-      </p:sp>
-    </p:spTree>
-  </p:cSld>
-</p:sld>
-</file>
-
-<file path=ppt/slides/slide36.xml><?xml version="1.0" encoding="utf-8"?>
-<p:sld xmlns:a="http://schemas.openxmlformats.org/drawingml/2006/main" xmlns:r="http://schemas.openxmlformats.org/officeDocument/2006/relationships" xmlns:p="http://schemas.openxmlformats.org/presentationml/2006/main">
-  <p:cSld>
-    <p:spTree>
-      <p:nvGrpSpPr>
-        <p:cNvPr id="1" name=""/>
-        <p:cNvGrpSpPr/>
-        <p:nvPr/>
-      </p:nvGrpSpPr>
-      <p:grpSpPr>
-        <a:xfrm>
-          <a:off x="0" y="0"/>
-          <a:ext cx="0" cy="0"/>
-          <a:chOff x="0" y="0"/>
-          <a:chExt cx="0" cy="0"/>
-        </a:xfrm>
-      </p:grpSpPr>
-      <p:sp>
-        <p:nvSpPr>
           <p:cNvPr id="3" name="Content Placeholder 2"/>
           <p:cNvSpPr>
             <a:spLocks noGrp="1"/>
@@ -6752,6 +7378,40 @@
             </a:pPr>
             <a:r>
               <a:rPr/>
+              <a:t>Earl, L. M. (2013). </a:t>
+            </a:r>
+            <a:r>
+              <a:rPr i="1"/>
+              <a:t>Assessment as learning: Using classroom assessment to maximize student learning</a:t>
+            </a:r>
+            <a:r>
+              <a:rPr/>
+              <a:t> (Second edition). Corwin Press.</a:t>
+            </a:r>
+          </a:p>
+          <a:p>
+            <a:pPr lvl="0" indent="0" marL="0">
+              <a:buNone/>
+            </a:pPr>
+            <a:r>
+              <a:rPr/>
+              <a:t>Feldman, J. (2019). </a:t>
+            </a:r>
+            <a:r>
+              <a:rPr i="1"/>
+              <a:t>Grading for equity: What it is, why it matters, and how it can transform schools and classrooms</a:t>
+            </a:r>
+            <a:r>
+              <a:rPr/>
+              <a:t>. Corwin, a SAGE Company.</a:t>
+            </a:r>
+          </a:p>
+          <a:p>
+            <a:pPr lvl="0" indent="0" marL="0">
+              <a:buNone/>
+            </a:pPr>
+            <a:r>
+              <a:rPr/>
               <a:t>Freire, P. (1990). </a:t>
             </a:r>
             <a:r>
@@ -6763,59 +7423,120 @@
               <a:t>. Penguin.</a:t>
             </a:r>
           </a:p>
-        </p:txBody>
-      </p:sp>
-    </p:spTree>
-  </p:cSld>
-</p:sld>
-</file>
-
-<file path=ppt/slides/slide4.xml><?xml version="1.0" encoding="utf-8"?>
-<p:sld xmlns:a="http://schemas.openxmlformats.org/drawingml/2006/main" xmlns:r="http://schemas.openxmlformats.org/officeDocument/2006/relationships" xmlns:p="http://schemas.openxmlformats.org/presentationml/2006/main">
-  <p:cSld>
-    <p:spTree>
-      <p:nvGrpSpPr>
-        <p:cNvPr id="1" name=""/>
-        <p:cNvGrpSpPr/>
-        <p:nvPr/>
-      </p:nvGrpSpPr>
-      <p:grpSpPr>
-        <a:xfrm>
-          <a:off x="0" y="0"/>
-          <a:ext cx="0" cy="0"/>
-          <a:chOff x="0" y="0"/>
-          <a:chExt cx="0" cy="0"/>
-        </a:xfrm>
-      </p:grpSpPr>
-      <p:sp>
-        <p:nvSpPr>
-          <p:cNvPr id="3" name="Content Placeholder 2"/>
-          <p:cNvSpPr>
-            <a:spLocks noGrp="1"/>
-          </p:cNvSpPr>
-          <p:nvPr>
-            <p:ph idx="1"/>
-          </p:nvPr>
-        </p:nvSpPr>
-        <p:spPr/>
-        <p:txBody>
-          <a:bodyPr/>
-          <a:lstStyle/>
-          <a:p>
-            <a:pPr lvl="0" indent="0" marL="1270000">
+          <a:p>
+            <a:pPr lvl="0" indent="0" marL="0">
               <a:buNone/>
             </a:pPr>
             <a:r>
-              <a:rPr sz="2000"/>
-              <a:t>A grade is an inadequate report of an inaccurate judgement by a biased and variable judge of the extent to which a student has attained an undefined level of mastery of an unknown proportion of an indefinite material. (</a:t>
-            </a:r>
-            <a:r>
-              <a:rPr sz="2000" b="1"/>
-              <a:t>feldmanGradingEquityWhat2019?</a:t>
-            </a:r>
-            <a:r>
-              <a:rPr sz="2000"/>
-              <a:t>)</a:t>
+              <a:rPr/>
+              <a:t>Looney, A., Cumming, J., van der Kleij, F. M., &amp; Harris, K. (2017). Reconceptualising the role of teachers as assessors: Teacher assessment identity. </a:t>
+            </a:r>
+            <a:r>
+              <a:rPr i="1"/>
+              <a:t>Assessment in Education: Principles, Policy &amp; Practice</a:t>
+            </a:r>
+            <a:r>
+              <a:rPr/>
+              <a:t>, </a:t>
+            </a:r>
+            <a:r>
+              <a:rPr i="1"/>
+              <a:t>25</a:t>
+            </a:r>
+            <a:r>
+              <a:rPr/>
+              <a:t>, 442–467. </a:t>
+            </a:r>
+            <a:r>
+              <a:rPr>
+                <a:hlinkClick r:id="rId2"/>
+              </a:rPr>
+              <a:t>https://doi.org/gfkfk6</a:t>
+            </a:r>
+          </a:p>
+          <a:p>
+            <a:pPr lvl="0" indent="0" marL="0">
+              <a:buNone/>
+            </a:pPr>
+            <a:r>
+              <a:rPr/>
+              <a:t>Pellegrino, J. W., Chudowsky, N., &amp; Glaser, R. (2001). </a:t>
+            </a:r>
+            <a:r>
+              <a:rPr i="1"/>
+              <a:t>Knowing What Students Know: The Science and Design of Educational Assessment</a:t>
+            </a:r>
+            <a:r>
+              <a:rPr/>
+              <a:t>. National Academies Press. </a:t>
+            </a:r>
+            <a:r>
+              <a:rPr>
+                <a:hlinkClick r:id="rId3"/>
+              </a:rPr>
+              <a:t>https://doi.org/10.17226/10019</a:t>
+            </a:r>
+          </a:p>
+          <a:p>
+            <a:pPr lvl="0" indent="0" marL="0">
+              <a:buNone/>
+            </a:pPr>
+            <a:r>
+              <a:rPr/>
+              <a:t>Starch, D. (1913). Reliability and Distribution of Grades. </a:t>
+            </a:r>
+            <a:r>
+              <a:rPr i="1"/>
+              <a:t>Science</a:t>
+            </a:r>
+            <a:r>
+              <a:rPr/>
+              <a:t>, </a:t>
+            </a:r>
+            <a:r>
+              <a:rPr i="1"/>
+              <a:t>38</a:t>
+            </a:r>
+            <a:r>
+              <a:rPr/>
+              <a:t>(983), 630–636. </a:t>
+            </a:r>
+            <a:r>
+              <a:rPr>
+                <a:hlinkClick r:id="rId4"/>
+              </a:rPr>
+              <a:t>https://doi.org/10.1126/science.38.983.630</a:t>
+            </a:r>
+          </a:p>
+          <a:p>
+            <a:pPr lvl="0" indent="0" marL="0">
+              <a:buNone/>
+            </a:pPr>
+            <a:r>
+              <a:rPr/>
+              <a:t>Starch, D., &amp; Elliott, E. C. (1912). Reliability of the Grading of High-School Work in English. </a:t>
+            </a:r>
+            <a:r>
+              <a:rPr i="1"/>
+              <a:t>The School Review</a:t>
+            </a:r>
+            <a:r>
+              <a:rPr/>
+              <a:t>, </a:t>
+            </a:r>
+            <a:r>
+              <a:rPr i="1"/>
+              <a:t>20</a:t>
+            </a:r>
+            <a:r>
+              <a:rPr/>
+              <a:t>(7), 442–457. </a:t>
+            </a:r>
+            <a:r>
+              <a:rPr>
+                <a:hlinkClick r:id="rId5"/>
+              </a:rPr>
+              <a:t>https://doi.org/10.1086/435971</a:t>
             </a:r>
           </a:p>
         </p:txBody>
@@ -6858,33 +7579,11 @@
           <a:lstStyle/>
           <a:p>
             <a:pPr lvl="0" indent="0" marL="0">
-              <a:spcBef>
-                <a:spcPts val="3000"/>
-              </a:spcBef>
               <a:buNone/>
             </a:pPr>
             <a:r>
-              <a:rPr b="1"/>
-              <a:t>Purposes of Assessment…</a:t>
-            </a:r>
-          </a:p>
-          <a:p>
-            <a:pPr lvl="0" indent="0" marL="0">
-              <a:buNone/>
-            </a:pPr>
-            <a:r>
               <a:rPr/>
-              <a:t>…of learning</a:t>
-            </a:r>
-            <a:br/>
-            <a:r>
-              <a:rPr/>
-              <a:t>…for learning</a:t>
-            </a:r>
-            <a:br/>
-            <a:r>
-              <a:rPr/>
-              <a:t>…as learning</a:t>
+              <a:t>(Pellegrino et al., 2001)</a:t>
             </a:r>
           </a:p>
         </p:txBody>
@@ -6913,50 +7612,34 @@
       </p:grpSpPr>
       <p:sp>
         <p:nvSpPr>
-          <p:cNvPr id="2" name="Title 1"/>
-          <p:cNvSpPr>
-            <a:spLocks noGrp="1"/>
-          </p:cNvSpPr>
-          <p:nvPr>
-            <p:ph type="title"/>
-          </p:nvPr>
-        </p:nvSpPr>
-        <p:spPr/>
-        <p:txBody>
-          <a:bodyPr/>
-          <a:lstStyle/>
+          <p:cNvPr id="3" name="Content Placeholder 2"/>
+          <p:cNvSpPr>
+            <a:spLocks noGrp="1"/>
+          </p:cNvSpPr>
+          <p:nvPr>
+            <p:ph idx="1"/>
+          </p:nvPr>
+        </p:nvSpPr>
+        <p:spPr/>
+        <p:txBody>
+          <a:bodyPr/>
+          <a:lstStyle/>
+          <a:p>
+            <a:pPr lvl="0" indent="0" marL="1270000">
+              <a:buNone/>
+            </a:pPr>
+            <a:r>
+              <a:rPr sz="2000"/>
+              <a:t>A grade is an inadequate report of an inaccurate judgement by a biased and variable judge of the extent to which a student has attained an undefined level of mastery of an unknown proportion of an indefinite material.</a:t>
+            </a:r>
+          </a:p>
           <a:p>
             <a:pPr lvl="0" indent="0" marL="0">
               <a:buNone/>
             </a:pPr>
             <a:r>
               <a:rPr/>
-              <a:t>learning is ontological</a:t>
-            </a:r>
-          </a:p>
-        </p:txBody>
-      </p:sp>
-      <p:sp>
-        <p:nvSpPr>
-          <p:cNvPr id="3" name="Content Placeholder 2"/>
-          <p:cNvSpPr>
-            <a:spLocks noGrp="1"/>
-          </p:cNvSpPr>
-          <p:nvPr>
-            <p:ph idx="1"/>
-          </p:nvPr>
-        </p:nvSpPr>
-        <p:spPr/>
-        <p:txBody>
-          <a:bodyPr/>
-          <a:lstStyle/>
-          <a:p>
-            <a:pPr lvl="0" indent="0" marL="1270000">
-              <a:buNone/>
-            </a:pPr>
-            <a:r>
-              <a:rPr sz="2000"/>
-              <a:t>“The mission of Trinity Western University, as an arm of the Church, is to develop godly Christian leaders: positive, goal-oriented university graduates with thoroughly Christian minds; growing disciples of Jesus Christ who glorify God through fulfilling the Great Commission, serving God and people in the various marketplaces of life.”</a:t>
+              <a:t>(Feldman, 2019, p. 25)</a:t>
             </a:r>
           </a:p>
         </p:txBody>
@@ -6985,12 +7668,12 @@
       </p:grpSpPr>
       <p:sp>
         <p:nvSpPr>
-          <p:cNvPr id="2" name="Title 1"/>
-          <p:cNvSpPr>
-            <a:spLocks noGrp="1"/>
-          </p:cNvSpPr>
-          <p:nvPr>
-            <p:ph type="title"/>
+          <p:cNvPr id="3" name="Content Placeholder 2"/>
+          <p:cNvSpPr>
+            <a:spLocks noGrp="1"/>
+          </p:cNvSpPr>
+          <p:nvPr>
+            <p:ph idx="1"/>
           </p:nvPr>
         </p:nvSpPr>
         <p:spPr/>
@@ -6999,11 +7682,42 @@
           <a:lstStyle/>
           <a:p>
             <a:pPr lvl="0" indent="0" marL="0">
+              <a:spcBef>
+                <a:spcPts val="3000"/>
+              </a:spcBef>
               <a:buNone/>
             </a:pPr>
             <a:r>
+              <a:rPr b="1"/>
+              <a:t>Purposes of Assessment…</a:t>
+            </a:r>
+          </a:p>
+          <a:p>
+            <a:pPr lvl="0" indent="0" marL="0">
+              <a:buNone/>
+            </a:pPr>
+            <a:r>
               <a:rPr/>
-              <a:t>teaching is ontological</a:t>
+              <a:t>…of learning</a:t>
+            </a:r>
+            <a:br/>
+            <a:r>
+              <a:rPr/>
+              <a:t>…for learning</a:t>
+            </a:r>
+            <a:br/>
+            <a:r>
+              <a:rPr/>
+              <a:t>…as learning</a:t>
+            </a:r>
+          </a:p>
+          <a:p>
+            <a:pPr lvl="0" indent="0" marL="0">
+              <a:buNone/>
+            </a:pPr>
+            <a:r>
+              <a:rPr/>
+              <a:t>(Earl, 2013)</a:t>
             </a:r>
           </a:p>
         </p:txBody>
@@ -7050,7 +7764,32 @@
             </a:pPr>
             <a:r>
               <a:rPr/>
-              <a:t>assessing is ontological</a:t>
+              <a:t>learning is ontological</a:t>
+            </a:r>
+          </a:p>
+        </p:txBody>
+      </p:sp>
+      <p:sp>
+        <p:nvSpPr>
+          <p:cNvPr id="3" name="Content Placeholder 2"/>
+          <p:cNvSpPr>
+            <a:spLocks noGrp="1"/>
+          </p:cNvSpPr>
+          <p:nvPr>
+            <p:ph idx="1"/>
+          </p:nvPr>
+        </p:nvSpPr>
+        <p:spPr/>
+        <p:txBody>
+          <a:bodyPr/>
+          <a:lstStyle/>
+          <a:p>
+            <a:pPr lvl="0" indent="0" marL="1270000">
+              <a:buNone/>
+            </a:pPr>
+            <a:r>
+              <a:rPr sz="2000"/>
+              <a:t>“The mission of Trinity Western University, as an arm of the Church, is to develop godly Christian leaders: positive, goal-oriented university graduates with thoroughly Christian minds; growing disciples of Jesus Christ who glorify God through fulfilling the Great Commission, serving God and people in the various marketplaces of life.”</a:t>
             </a:r>
           </a:p>
         </p:txBody>
@@ -7097,32 +7836,7 @@
             </a:pPr>
             <a:r>
               <a:rPr/>
-              <a:t>Assessment Identity</a:t>
-            </a:r>
-          </a:p>
-        </p:txBody>
-      </p:sp>
-      <p:sp>
-        <p:nvSpPr>
-          <p:cNvPr id="3" name="Content Placeholder 2"/>
-          <p:cNvSpPr>
-            <a:spLocks noGrp="1"/>
-          </p:cNvSpPr>
-          <p:nvPr>
-            <p:ph idx="1"/>
-          </p:nvPr>
-        </p:nvSpPr>
-        <p:spPr/>
-        <p:txBody>
-          <a:bodyPr/>
-          <a:lstStyle/>
-          <a:p>
-            <a:pPr lvl="0" indent="0" marL="0">
-              <a:buNone/>
-            </a:pPr>
-            <a:r>
-              <a:rPr/>
-              <a:t>beliefs | feelings | knowledge | skills</a:t>
+              <a:t>teaching is ontological</a:t>
             </a:r>
           </a:p>
         </p:txBody>

--- a/docs/posts/fpl-assessment/index.pptx
+++ b/docs/posts/fpl-assessment/index.pptx
@@ -7021,6 +7021,18 @@
           <a:lstStyle/>
           <a:p>
             <a:pPr lvl="0" indent="0" marL="0">
+              <a:spcBef>
+                <a:spcPts val="3000"/>
+              </a:spcBef>
+              <a:buNone/>
+            </a:pPr>
+            <a:r>
+              <a:rPr b="1"/>
+              <a:t>Reassessment without penalty</a:t>
+            </a:r>
+          </a:p>
+          <a:p>
+            <a:pPr lvl="0" indent="0" marL="0">
               <a:buNone/>
             </a:pPr>
           </a:p>
@@ -7207,12 +7219,12 @@
       </p:grpSpPr>
       <p:sp>
         <p:nvSpPr>
-          <p:cNvPr id="3" name="Content Placeholder 2"/>
-          <p:cNvSpPr>
-            <a:spLocks noGrp="1"/>
-          </p:cNvSpPr>
-          <p:nvPr>
-            <p:ph idx="1"/>
+          <p:cNvPr id="2" name="Title 1"/>
+          <p:cNvSpPr>
+            <a:spLocks noGrp="1"/>
+          </p:cNvSpPr>
+          <p:nvPr>
+            <p:ph type="title"/>
           </p:nvPr>
         </p:nvSpPr>
         <p:spPr/>
@@ -7224,14 +7236,8 @@
               <a:buNone/>
             </a:pPr>
             <a:r>
-              <a:rPr>
-                <a:hlinkClick r:id="rId2"/>
-              </a:rPr>
-              <a:t>cmad.land</a:t>
-            </a:r>
-            <a:r>
               <a:rPr/>
-              <a:t> - slides</a:t>
+              <a:t>Stop. Be outside. Think.</a:t>
             </a:r>
           </a:p>
         </p:txBody>
@@ -7260,12 +7266,12 @@
       </p:grpSpPr>
       <p:sp>
         <p:nvSpPr>
-          <p:cNvPr id="2" name="Title 1"/>
-          <p:cNvSpPr>
-            <a:spLocks noGrp="1"/>
-          </p:cNvSpPr>
-          <p:nvPr>
-            <p:ph type="title"/>
+          <p:cNvPr id="3" name="Content Placeholder 2"/>
+          <p:cNvSpPr>
+            <a:spLocks noGrp="1"/>
+          </p:cNvSpPr>
+          <p:nvPr>
+            <p:ph idx="1"/>
           </p:nvPr>
         </p:nvSpPr>
         <p:spPr/>
@@ -7277,49 +7283,14 @@
               <a:buNone/>
             </a:pPr>
             <a:r>
+              <a:rPr>
+                <a:hlinkClick r:id="rId2"/>
+              </a:rPr>
+              <a:t>cmad.land</a:t>
+            </a:r>
+            <a:r>
               <a:rPr/>
-              <a:t>Stop. Be outside. Think.</a:t>
-            </a:r>
-          </a:p>
-        </p:txBody>
-      </p:sp>
-      <p:sp>
-        <p:nvSpPr>
-          <p:cNvPr id="3" name="Content Placeholder 2"/>
-          <p:cNvSpPr>
-            <a:spLocks noGrp="1"/>
-          </p:cNvSpPr>
-          <p:nvPr>
-            <p:ph idx="1"/>
-          </p:nvPr>
-        </p:nvSpPr>
-        <p:spPr/>
-        <p:txBody>
-          <a:bodyPr/>
-          <a:lstStyle/>
-          <a:p>
-            <a:pPr lvl="0" indent="0" marL="0">
-              <a:buNone/>
-            </a:pPr>
-            <a:r>
-              <a:rPr/>
-              <a:t>Recall a time when you were the </a:t>
-            </a:r>
-            <a:r>
-              <a:rPr i="1"/>
-              <a:t>object</a:t>
-            </a:r>
-            <a:r>
-              <a:rPr/>
-              <a:t> in an educational transaction, where ‘teaching’ or ‘assessing’ was something done </a:t>
-            </a:r>
-            <a:r>
-              <a:rPr b="1"/>
-              <a:t>to</a:t>
-            </a:r>
-            <a:r>
-              <a:rPr/>
-              <a:t> you. What might YOU do to avoid commoditizing grades in your practice?</a:t>
+              <a:t> - slides</a:t>
             </a:r>
           </a:p>
         </p:txBody>

--- a/docs/posts/fpl-assessment/index.pptx
+++ b/docs/posts/fpl-assessment/index.pptx
@@ -5563,8 +5563,8 @@
         </p:blipFill>
         <p:spPr bwMode="auto">
           <a:xfrm>
-            <a:off x="3568700" y="1143000"/>
-            <a:ext cx="5105400" cy="2514600"/>
+            <a:off x="3568700" y="1016000"/>
+            <a:ext cx="5105400" cy="2755900"/>
           </a:xfrm>
           <a:prstGeom prst="rect">
             <a:avLst/>
@@ -6803,8 +6803,8 @@
         </p:blipFill>
         <p:spPr bwMode="auto">
           <a:xfrm>
-            <a:off x="3568700" y="901700"/>
-            <a:ext cx="5105400" cy="2984500"/>
+            <a:off x="3568700" y="609600"/>
+            <a:ext cx="5105400" cy="3556000"/>
           </a:xfrm>
           <a:prstGeom prst="rect">
             <a:avLst/>
@@ -6888,8 +6888,8 @@
         </p:blipFill>
         <p:spPr bwMode="auto">
           <a:xfrm>
-            <a:off x="3568700" y="876300"/>
-            <a:ext cx="5105400" cy="3035300"/>
+            <a:off x="3568700" y="533400"/>
+            <a:ext cx="5105400" cy="3721100"/>
           </a:xfrm>
           <a:prstGeom prst="rect">
             <a:avLst/>
@@ -7054,8 +7054,8 @@
         </p:blipFill>
         <p:spPr bwMode="auto">
           <a:xfrm>
-            <a:off x="4572000" y="203200"/>
-            <a:ext cx="3098800" cy="4381500"/>
+            <a:off x="5118100" y="203200"/>
+            <a:ext cx="1993900" cy="4381500"/>
           </a:xfrm>
           <a:prstGeom prst="rect">
             <a:avLst/>
@@ -7422,7 +7422,7 @@
               <a:rPr>
                 <a:hlinkClick r:id="rId2"/>
               </a:rPr>
-              <a:t>https://doi.org/gfkfk6</a:t>
+              <a:t>https://doi.org/10/gfkfk6</a:t>
             </a:r>
           </a:p>
           <a:p>

--- a/docs/posts/fpl-assessment/index.pptx
+++ b/docs/posts/fpl-assessment/index.pptx
@@ -3864,8 +3864,6 @@
             <a:pPr lvl="0" indent="0" marL="0">
               <a:buNone/>
             </a:pPr>
-            <a:br/>
-            <a:br/>
             <a:r>
               <a:rPr/>
               <a:t>Colin Madland</a:t>
@@ -6803,8 +6801,8 @@
         </p:blipFill>
         <p:spPr bwMode="auto">
           <a:xfrm>
-            <a:off x="3568700" y="609600"/>
-            <a:ext cx="5105400" cy="3556000"/>
+            <a:off x="3568700" y="2171700"/>
+            <a:ext cx="5105400" cy="457200"/>
           </a:xfrm>
           <a:prstGeom prst="rect">
             <a:avLst/>
